--- a/sesion10/Sesion10_Metodos_de_Solucion.pptx
+++ b/sesion10/Sesion10_Metodos_de_Solucion.pptx
@@ -7594,27 +7594,27 @@
         </p:nvSpPr>
         <p:spPr>
           <a:xfrm>
-            <a:off x="1325880" y="1737360"/>
-            <a:ext cx="4381348" cy="640080"/>
-          </a:xfrm>
-          <a:prstGeom prst="rect">
-            <a:avLst/>
-          </a:prstGeom>
-          <a:noFill/>
-          <a:ln/>
-        </p:spPr>
-        <p:txBody>
-          <a:bodyPr wrap="square" lIns="0" tIns="0" rIns="0" bIns="0" rtlCol="0" anchor="t"/>
+            <a:off x="1325880" y="1783080"/>
+            <a:ext cx="4381348" cy="1051560"/>
+          </a:xfrm>
+          <a:prstGeom prst="rect">
+            <a:avLst/>
+          </a:prstGeom>
+          <a:noFill/>
+          <a:ln/>
+        </p:spPr>
+        <p:txBody>
+          <a:bodyPr wrap="square" lIns="0" tIns="0" rIns="0" bIns="0" rtlCol="0" anchor="ctr"/>
           <a:lstStyle/>
           <a:p>
             <a:pPr indent="0" marL="0">
               <a:lnSpc>
-                <a:spcPct val="110000"/>
+                <a:spcPct val="115000"/>
               </a:lnSpc>
               <a:buNone/>
             </a:pPr>
             <a:r>
-              <a:rPr lang="en-US" sz="1300" b="1" dirty="0">
+              <a:rPr lang="en-US" sz="1500" b="1" dirty="0">
                 <a:solidFill>
                   <a:srgbClr val="F8FAFC"/>
                 </a:solidFill>
@@ -7624,55 +7624,13 @@
               </a:rPr>
               <a:t>¿Qué operador aniquila un polinomio de grado k?</a:t>
             </a:r>
-            <a:endParaRPr lang="en-US" sz="1300" dirty="0"/>
-          </a:p>
-        </p:txBody>
-      </p:sp>
-      <p:sp>
-        <p:nvSpPr>
-          <p:cNvPr id="8" name="Text 6"/>
-          <p:cNvSpPr/>
-          <p:nvPr/>
-        </p:nvSpPr>
-        <p:spPr>
-          <a:xfrm>
-            <a:off x="822960" y="2514600"/>
-            <a:ext cx="4838548" cy="411480"/>
-          </a:xfrm>
-          <a:prstGeom prst="rect">
-            <a:avLst/>
-          </a:prstGeom>
-          <a:noFill/>
-          <a:ln/>
-        </p:spPr>
-        <p:txBody>
-          <a:bodyPr wrap="square" lIns="0" tIns="0" rIns="0" bIns="0" rtlCol="0" anchor="t"/>
-          <a:lstStyle/>
-          <a:p>
-            <a:pPr algn="l" indent="0" marL="0">
-              <a:lnSpc>
-                <a:spcPct val="112000"/>
-              </a:lnSpc>
-              <a:buNone/>
-            </a:pPr>
-            <a:r>
-              <a:rPr lang="en-US" sz="1200" dirty="0">
-                <a:solidFill>
-                  <a:srgbClr val="CBD5E1"/>
-                </a:solidFill>
-                <a:latin typeface="Calibri" pitchFamily="34" charset="0"/>
-                <a:ea typeface="Calibri" pitchFamily="34" charset="-122"/>
-                <a:cs typeface="Calibri" pitchFamily="34" charset="-120"/>
-              </a:rPr>
-              <a:t>→ Dᵏ⁺¹</a:t>
-            </a:r>
-            <a:endParaRPr lang="en-US" sz="1200" dirty="0"/>
-          </a:p>
-        </p:txBody>
-      </p:sp>
-      <p:sp>
-        <p:nvSpPr>
-          <p:cNvPr id="9" name="Shape 7"/>
+            <a:endParaRPr lang="en-US" sz="1500" dirty="0"/>
+          </a:p>
+        </p:txBody>
+      </p:sp>
+      <p:sp>
+        <p:nvSpPr>
+          <p:cNvPr id="8" name="Shape 6"/>
           <p:cNvSpPr/>
           <p:nvPr/>
         </p:nvSpPr>
@@ -7699,7 +7657,7 @@
       </p:sp>
       <p:sp>
         <p:nvSpPr>
-          <p:cNvPr id="10" name="Shape 8"/>
+          <p:cNvPr id="9" name="Shape 7"/>
           <p:cNvSpPr/>
           <p:nvPr/>
         </p:nvSpPr>
@@ -7724,7 +7682,7 @@
       </p:sp>
       <p:sp>
         <p:nvSpPr>
-          <p:cNvPr id="11" name="Text 9"/>
+          <p:cNvPr id="10" name="Text 8"/>
           <p:cNvSpPr/>
           <p:nvPr/>
         </p:nvSpPr>
@@ -7763,33 +7721,33 @@
       </p:sp>
       <p:sp>
         <p:nvSpPr>
-          <p:cNvPr id="12" name="Text 10"/>
-          <p:cNvSpPr/>
-          <p:nvPr/>
-        </p:nvSpPr>
-        <p:spPr>
-          <a:xfrm>
-            <a:off x="7033108" y="1737360"/>
-            <a:ext cx="4381348" cy="640080"/>
-          </a:xfrm>
-          <a:prstGeom prst="rect">
-            <a:avLst/>
-          </a:prstGeom>
-          <a:noFill/>
-          <a:ln/>
-        </p:spPr>
-        <p:txBody>
-          <a:bodyPr wrap="square" lIns="0" tIns="0" rIns="0" bIns="0" rtlCol="0" anchor="t"/>
+          <p:cNvPr id="11" name="Text 9"/>
+          <p:cNvSpPr/>
+          <p:nvPr/>
+        </p:nvSpPr>
+        <p:spPr>
+          <a:xfrm>
+            <a:off x="7033108" y="1783080"/>
+            <a:ext cx="4381348" cy="1051560"/>
+          </a:xfrm>
+          <a:prstGeom prst="rect">
+            <a:avLst/>
+          </a:prstGeom>
+          <a:noFill/>
+          <a:ln/>
+        </p:spPr>
+        <p:txBody>
+          <a:bodyPr wrap="square" lIns="0" tIns="0" rIns="0" bIns="0" rtlCol="0" anchor="ctr"/>
           <a:lstStyle/>
           <a:p>
             <a:pPr indent="0" marL="0">
               <a:lnSpc>
-                <a:spcPct val="110000"/>
+                <a:spcPct val="115000"/>
               </a:lnSpc>
               <a:buNone/>
             </a:pPr>
             <a:r>
-              <a:rPr lang="en-US" sz="1300" b="1" dirty="0">
+              <a:rPr lang="en-US" sz="1500" b="1" dirty="0">
                 <a:solidFill>
                   <a:srgbClr val="F8FAFC"/>
                 </a:solidFill>
@@ -7799,55 +7757,13 @@
               </a:rPr>
               <a:t>¿Qué operador aniquila eʳˣ?</a:t>
             </a:r>
-            <a:endParaRPr lang="en-US" sz="1300" dirty="0"/>
-          </a:p>
-        </p:txBody>
-      </p:sp>
-      <p:sp>
-        <p:nvSpPr>
-          <p:cNvPr id="13" name="Text 11"/>
-          <p:cNvSpPr/>
-          <p:nvPr/>
-        </p:nvSpPr>
-        <p:spPr>
-          <a:xfrm>
-            <a:off x="6530188" y="2514600"/>
-            <a:ext cx="4838548" cy="411480"/>
-          </a:xfrm>
-          <a:prstGeom prst="rect">
-            <a:avLst/>
-          </a:prstGeom>
-          <a:noFill/>
-          <a:ln/>
-        </p:spPr>
-        <p:txBody>
-          <a:bodyPr wrap="square" lIns="0" tIns="0" rIns="0" bIns="0" rtlCol="0" anchor="t"/>
-          <a:lstStyle/>
-          <a:p>
-            <a:pPr algn="l" indent="0" marL="0">
-              <a:lnSpc>
-                <a:spcPct val="112000"/>
-              </a:lnSpc>
-              <a:buNone/>
-            </a:pPr>
-            <a:r>
-              <a:rPr lang="en-US" sz="1200" dirty="0">
-                <a:solidFill>
-                  <a:srgbClr val="CBD5E1"/>
-                </a:solidFill>
-                <a:latin typeface="Calibri" pitchFamily="34" charset="0"/>
-                <a:ea typeface="Calibri" pitchFamily="34" charset="-122"/>
-                <a:cs typeface="Calibri" pitchFamily="34" charset="-120"/>
-              </a:rPr>
-              <a:t>→ (D−r)</a:t>
-            </a:r>
-            <a:endParaRPr lang="en-US" sz="1200" dirty="0"/>
-          </a:p>
-        </p:txBody>
-      </p:sp>
-      <p:sp>
-        <p:nvSpPr>
-          <p:cNvPr id="14" name="Shape 12"/>
+            <a:endParaRPr lang="en-US" sz="1500" dirty="0"/>
+          </a:p>
+        </p:txBody>
+      </p:sp>
+      <p:sp>
+        <p:nvSpPr>
+          <p:cNvPr id="12" name="Shape 10"/>
           <p:cNvSpPr/>
           <p:nvPr/>
         </p:nvSpPr>
@@ -7874,7 +7790,7 @@
       </p:sp>
       <p:sp>
         <p:nvSpPr>
-          <p:cNvPr id="15" name="Shape 13"/>
+          <p:cNvPr id="13" name="Shape 11"/>
           <p:cNvSpPr/>
           <p:nvPr/>
         </p:nvSpPr>
@@ -7899,7 +7815,7 @@
       </p:sp>
       <p:sp>
         <p:nvSpPr>
-          <p:cNvPr id="16" name="Text 14"/>
+          <p:cNvPr id="14" name="Text 12"/>
           <p:cNvSpPr/>
           <p:nvPr/>
         </p:nvSpPr>
@@ -7938,33 +7854,33 @@
       </p:sp>
       <p:sp>
         <p:nvSpPr>
-          <p:cNvPr id="17" name="Text 15"/>
-          <p:cNvSpPr/>
-          <p:nvPr/>
-        </p:nvSpPr>
-        <p:spPr>
-          <a:xfrm>
-            <a:off x="1325880" y="3383280"/>
-            <a:ext cx="4381348" cy="640080"/>
-          </a:xfrm>
-          <a:prstGeom prst="rect">
-            <a:avLst/>
-          </a:prstGeom>
-          <a:noFill/>
-          <a:ln/>
-        </p:spPr>
-        <p:txBody>
-          <a:bodyPr wrap="square" lIns="0" tIns="0" rIns="0" bIns="0" rtlCol="0" anchor="t"/>
+          <p:cNvPr id="15" name="Text 13"/>
+          <p:cNvSpPr/>
+          <p:nvPr/>
+        </p:nvSpPr>
+        <p:spPr>
+          <a:xfrm>
+            <a:off x="1325880" y="3429000"/>
+            <a:ext cx="4381348" cy="1051560"/>
+          </a:xfrm>
+          <a:prstGeom prst="rect">
+            <a:avLst/>
+          </a:prstGeom>
+          <a:noFill/>
+          <a:ln/>
+        </p:spPr>
+        <p:txBody>
+          <a:bodyPr wrap="square" lIns="0" tIns="0" rIns="0" bIns="0" rtlCol="0" anchor="ctr"/>
           <a:lstStyle/>
           <a:p>
             <a:pPr indent="0" marL="0">
               <a:lnSpc>
-                <a:spcPct val="110000"/>
+                <a:spcPct val="115000"/>
               </a:lnSpc>
               <a:buNone/>
             </a:pPr>
             <a:r>
-              <a:rPr lang="en-US" sz="1300" b="1" dirty="0">
+              <a:rPr lang="en-US" sz="1500" b="1" dirty="0">
                 <a:solidFill>
                   <a:srgbClr val="F8FAFC"/>
                 </a:solidFill>
@@ -7974,55 +7890,13 @@
               </a:rPr>
               <a:t>Si tengo xeʳˣ, ¿por qué (D−r) ya no basta?</a:t>
             </a:r>
-            <a:endParaRPr lang="en-US" sz="1300" dirty="0"/>
-          </a:p>
-        </p:txBody>
-      </p:sp>
-      <p:sp>
-        <p:nvSpPr>
-          <p:cNvPr id="18" name="Text 16"/>
-          <p:cNvSpPr/>
-          <p:nvPr/>
-        </p:nvSpPr>
-        <p:spPr>
-          <a:xfrm>
-            <a:off x="822960" y="4160520"/>
-            <a:ext cx="4838548" cy="411480"/>
-          </a:xfrm>
-          <a:prstGeom prst="rect">
-            <a:avLst/>
-          </a:prstGeom>
-          <a:noFill/>
-          <a:ln/>
-        </p:spPr>
-        <p:txBody>
-          <a:bodyPr wrap="square" lIns="0" tIns="0" rIns="0" bIns="0" rtlCol="0" anchor="t"/>
-          <a:lstStyle/>
-          <a:p>
-            <a:pPr algn="l" indent="0" marL="0">
-              <a:lnSpc>
-                <a:spcPct val="112000"/>
-              </a:lnSpc>
-              <a:buNone/>
-            </a:pPr>
-            <a:r>
-              <a:rPr lang="en-US" sz="1200" dirty="0">
-                <a:solidFill>
-                  <a:srgbClr val="CBD5E1"/>
-                </a:solidFill>
-                <a:latin typeface="Calibri" pitchFamily="34" charset="0"/>
-                <a:ea typeface="Calibri" pitchFamily="34" charset="-122"/>
-                <a:cs typeface="Calibri" pitchFamily="34" charset="-120"/>
-              </a:rPr>
-              <a:t>→ (D−r)² — una aplicación sola no alcanza el factor x</a:t>
-            </a:r>
-            <a:endParaRPr lang="en-US" sz="1200" dirty="0"/>
-          </a:p>
-        </p:txBody>
-      </p:sp>
-      <p:sp>
-        <p:nvSpPr>
-          <p:cNvPr id="19" name="Shape 17"/>
+            <a:endParaRPr lang="en-US" sz="1500" dirty="0"/>
+          </a:p>
+        </p:txBody>
+      </p:sp>
+      <p:sp>
+        <p:nvSpPr>
+          <p:cNvPr id="16" name="Shape 14"/>
           <p:cNvSpPr/>
           <p:nvPr/>
         </p:nvSpPr>
@@ -8049,7 +7923,7 @@
       </p:sp>
       <p:sp>
         <p:nvSpPr>
-          <p:cNvPr id="20" name="Shape 18"/>
+          <p:cNvPr id="17" name="Shape 15"/>
           <p:cNvSpPr/>
           <p:nvPr/>
         </p:nvSpPr>
@@ -8074,7 +7948,7 @@
       </p:sp>
       <p:sp>
         <p:nvSpPr>
-          <p:cNvPr id="21" name="Text 19"/>
+          <p:cNvPr id="18" name="Text 16"/>
           <p:cNvSpPr/>
           <p:nvPr/>
         </p:nvSpPr>
@@ -8113,33 +7987,33 @@
       </p:sp>
       <p:sp>
         <p:nvSpPr>
-          <p:cNvPr id="22" name="Text 20"/>
-          <p:cNvSpPr/>
-          <p:nvPr/>
-        </p:nvSpPr>
-        <p:spPr>
-          <a:xfrm>
-            <a:off x="7033108" y="3383280"/>
-            <a:ext cx="4381348" cy="640080"/>
-          </a:xfrm>
-          <a:prstGeom prst="rect">
-            <a:avLst/>
-          </a:prstGeom>
-          <a:noFill/>
-          <a:ln/>
-        </p:spPr>
-        <p:txBody>
-          <a:bodyPr wrap="square" lIns="0" tIns="0" rIns="0" bIns="0" rtlCol="0" anchor="t"/>
+          <p:cNvPr id="19" name="Text 17"/>
+          <p:cNvSpPr/>
+          <p:nvPr/>
+        </p:nvSpPr>
+        <p:spPr>
+          <a:xfrm>
+            <a:off x="7033108" y="3429000"/>
+            <a:ext cx="4381348" cy="1051560"/>
+          </a:xfrm>
+          <a:prstGeom prst="rect">
+            <a:avLst/>
+          </a:prstGeom>
+          <a:noFill/>
+          <a:ln/>
+        </p:spPr>
+        <p:txBody>
+          <a:bodyPr wrap="square" lIns="0" tIns="0" rIns="0" bIns="0" rtlCol="0" anchor="ctr"/>
           <a:lstStyle/>
           <a:p>
             <a:pPr indent="0" marL="0">
               <a:lnSpc>
-                <a:spcPct val="110000"/>
+                <a:spcPct val="115000"/>
               </a:lnSpc>
               <a:buNone/>
             </a:pPr>
             <a:r>
-              <a:rPr lang="en-US" sz="1300" b="1" dirty="0">
+              <a:rPr lang="en-US" sz="1500" b="1" dirty="0">
                 <a:solidFill>
                   <a:srgbClr val="F8FAFC"/>
                 </a:solidFill>
@@ -8149,55 +8023,13 @@
               </a:rPr>
               <a:t>Si g(x)=3x+e²ˣ, ¿cómo aniquilan toda la suma?</a:t>
             </a:r>
-            <a:endParaRPr lang="en-US" sz="1300" dirty="0"/>
-          </a:p>
-        </p:txBody>
-      </p:sp>
-      <p:sp>
-        <p:nvSpPr>
-          <p:cNvPr id="23" name="Text 21"/>
-          <p:cNvSpPr/>
-          <p:nvPr/>
-        </p:nvSpPr>
-        <p:spPr>
-          <a:xfrm>
-            <a:off x="6530188" y="4160520"/>
-            <a:ext cx="4838548" cy="411480"/>
-          </a:xfrm>
-          <a:prstGeom prst="rect">
-            <a:avLst/>
-          </a:prstGeom>
-          <a:noFill/>
-          <a:ln/>
-        </p:spPr>
-        <p:txBody>
-          <a:bodyPr wrap="square" lIns="0" tIns="0" rIns="0" bIns="0" rtlCol="0" anchor="t"/>
-          <a:lstStyle/>
-          <a:p>
-            <a:pPr algn="l" indent="0" marL="0">
-              <a:lnSpc>
-                <a:spcPct val="112000"/>
-              </a:lnSpc>
-              <a:buNone/>
-            </a:pPr>
-            <a:r>
-              <a:rPr lang="en-US" sz="1200" dirty="0">
-                <a:solidFill>
-                  <a:srgbClr val="CBD5E1"/>
-                </a:solidFill>
-                <a:latin typeface="Calibri" pitchFamily="34" charset="0"/>
-                <a:ea typeface="Calibri" pitchFamily="34" charset="-122"/>
-                <a:cs typeface="Calibri" pitchFamily="34" charset="-120"/>
-              </a:rPr>
-              <a:t>→ combinan los anuladores: D²(D−2)</a:t>
-            </a:r>
-            <a:endParaRPr lang="en-US" sz="1200" dirty="0"/>
-          </a:p>
-        </p:txBody>
-      </p:sp>
-      <p:sp>
-        <p:nvSpPr>
-          <p:cNvPr id="24" name="Shape 22"/>
+            <a:endParaRPr lang="en-US" sz="1500" dirty="0"/>
+          </a:p>
+        </p:txBody>
+      </p:sp>
+      <p:sp>
+        <p:nvSpPr>
+          <p:cNvPr id="20" name="Shape 18"/>
           <p:cNvSpPr/>
           <p:nvPr/>
         </p:nvSpPr>
@@ -8224,7 +8056,7 @@
       </p:sp>
       <p:sp>
         <p:nvSpPr>
-          <p:cNvPr id="25" name="Text 23"/>
+          <p:cNvPr id="21" name="Text 19"/>
           <p:cNvSpPr/>
           <p:nvPr/>
         </p:nvSpPr>
@@ -8266,7 +8098,7 @@
       </p:sp>
       <p:sp>
         <p:nvSpPr>
-          <p:cNvPr id="26" name="Text 24"/>
+          <p:cNvPr id="22" name="Text 20"/>
           <p:cNvSpPr/>
           <p:nvPr/>
         </p:nvSpPr>
@@ -8305,7 +8137,7 @@
       </p:sp>
       <p:sp>
         <p:nvSpPr>
-          <p:cNvPr id="27" name="Text 25"/>
+          <p:cNvPr id="23" name="Text 21"/>
           <p:cNvSpPr/>
           <p:nvPr/>
         </p:nvSpPr>

--- a/sesion10/Sesion10_Metodos_de_Solucion.pptx
+++ b/sesion10/Sesion10_Metodos_de_Solucion.pptx
@@ -31,9 +31,10 @@
     <p:sldId id="279" r:id="rId25"/>
     <p:sldId id="280" r:id="rId26"/>
     <p:sldId id="281" r:id="rId27"/>
+    <p:sldId id="282" r:id="rId28"/>
   </p:sldIdLst>
   <p:notesMasterIdLst>
-    <p:notesMasterId r:id="rId28"/>
+    <p:notesMasterId r:id="rId29"/>
   </p:notesMasterIdLst>
   <p:sldSz cx="12191695" cy="6858000"/>
   <p:notesSz cx="6858000" cy="12191695"/>
@@ -2135,6 +2136,94 @@
             <a:fld id="{F7021451-1387-4CA6-816F-3879F97B5CBC}" type="slidenum">
               <a:rPr lang="en-US"/>
               <a:t>26</a:t>
+            </a:fld>
+            <a:endParaRPr lang="en-US"/>
+          </a:p>
+        </p:txBody>
+      </p:sp>
+    </p:spTree>
+    <p:extLst>
+      <p:ext uri="{BB962C8B-B14F-4D97-AF65-F5344CB8AC3E}">
+        <p14:creationId xmlns:p14="http://schemas.microsoft.com/office/powerpoint/2010/main" val="1024086991"/>
+      </p:ext>
+    </p:extLst>
+  </p:cSld>
+  <p:clrMapOvr>
+    <a:masterClrMapping/>
+  </p:clrMapOvr>
+</p:notes>
+</file>
+
+<file path=ppt/notesSlides/notesSlide27.xml><?xml version="1.0" encoding="utf-8"?>
+<p:notes xmlns:a="http://schemas.openxmlformats.org/drawingml/2006/main" xmlns:r="http://schemas.openxmlformats.org/officeDocument/2006/relationships" xmlns:p="http://schemas.openxmlformats.org/presentationml/2006/main">
+  <p:cSld>
+    <p:spTree>
+      <p:nvGrpSpPr>
+        <p:cNvPr id="1" name=""/>
+        <p:cNvGrpSpPr/>
+        <p:nvPr/>
+      </p:nvGrpSpPr>
+      <p:grpSpPr>
+        <a:xfrm>
+          <a:off x="0" y="0"/>
+          <a:ext cx="0" cy="0"/>
+          <a:chOff x="0" y="0"/>
+          <a:chExt cx="0" cy="0"/>
+        </a:xfrm>
+      </p:grpSpPr>
+      <p:sp>
+        <p:nvSpPr>
+          <p:cNvPr id="2" name="Slide Image Placeholder 1"/>
+          <p:cNvSpPr>
+            <a:spLocks noGrp="1" noRot="1" noChangeAspect="1"/>
+          </p:cNvSpPr>
+          <p:nvPr>
+            <p:ph type="sldImg"/>
+          </p:nvPr>
+        </p:nvSpPr>
+        <p:spPr/>
+      </p:sp>
+      <p:sp>
+        <p:nvSpPr>
+          <p:cNvPr id="3" name="Notes Placeholder 2"/>
+          <p:cNvSpPr>
+            <a:spLocks noGrp="1"/>
+          </p:cNvSpPr>
+          <p:nvPr>
+            <p:ph type="body" idx="1"/>
+          </p:nvPr>
+        </p:nvSpPr>
+        <p:spPr/>
+        <p:txBody>
+          <a:bodyPr/>
+          <a:lstStyle/>
+          <a:p>
+            <a:r>
+              <a:rPr lang="en-US" dirty="0"/>
+              <a:t/>
+            </a:r>
+            <a:endParaRPr lang="en-US" dirty="0"/>
+          </a:p>
+        </p:txBody>
+      </p:sp>
+      <p:sp>
+        <p:nvSpPr>
+          <p:cNvPr id="4" name="Slide Number Placeholder 3"/>
+          <p:cNvSpPr>
+            <a:spLocks noGrp="1"/>
+          </p:cNvSpPr>
+          <p:nvPr>
+            <p:ph type="sldNum" sz="quarter" idx="10"/>
+          </p:nvPr>
+        </p:nvSpPr>
+        <p:spPr/>
+        <p:txBody>
+          <a:bodyPr/>
+          <a:lstStyle/>
+          <a:p>
+            <a:fld id="{F7021451-1387-4CA6-816F-3879F97B5CBC}" type="slidenum">
+              <a:rPr lang="en-US"/>
+              <a:t>27</a:t>
             </a:fld>
             <a:endParaRPr lang="en-US"/>
           </a:p>
@@ -5594,7 +5683,7 @@
                 <a:ea typeface="Calibri" pitchFamily="34" charset="-122"/>
                 <a:cs typeface="Calibri" pitchFamily="34" charset="-120"/>
               </a:rPr>
-              <a:t>PIZARRÓN</a:t>
+              <a:t>LA ECUACIÓN AUXILIAR</a:t>
             </a:r>
             <a:endParaRPr lang="en-US" sz="1300" dirty="0"/>
           </a:p>
@@ -5633,7 +5722,7 @@
                 <a:ea typeface="Calibri" pitchFamily="34" charset="-122"/>
                 <a:cs typeface="Calibri" pitchFamily="34" charset="-120"/>
               </a:rPr>
-              <a:t>Cauchy-Euler — Ejemplo (Planteamiento)</a:t>
+              <a:t>Cauchy-Euler — Los Tres Casos</a:t>
             </a:r>
             <a:endParaRPr lang="en-US" sz="2900" dirty="0"/>
           </a:p>
@@ -5647,12 +5736,12 @@
         </p:nvSpPr>
         <p:spPr>
           <a:xfrm>
-            <a:off x="548640" y="2103120"/>
-            <a:ext cx="11094415" cy="1280160"/>
+            <a:off x="548640" y="1691640"/>
+            <a:ext cx="3515258" cy="2926080"/>
           </a:xfrm>
           <a:prstGeom prst="roundRect">
             <a:avLst>
-              <a:gd name="adj" fmla="val 5714"/>
+              <a:gd name="adj" fmla="val 2500"/>
             </a:avLst>
           </a:prstGeom>
           <a:solidFill>
@@ -5666,9 +5755,90 @@
           </a:ln>
         </p:spPr>
       </p:sp>
+      <p:sp>
+        <p:nvSpPr>
+          <p:cNvPr id="5" name="Text 3"/>
+          <p:cNvSpPr/>
+          <p:nvPr/>
+        </p:nvSpPr>
+        <p:spPr>
+          <a:xfrm>
+            <a:off x="731520" y="1874520"/>
+            <a:ext cx="3149498" cy="274320"/>
+          </a:xfrm>
+          <a:prstGeom prst="rect">
+            <a:avLst/>
+          </a:prstGeom>
+          <a:noFill/>
+          <a:ln/>
+        </p:spPr>
+        <p:txBody>
+          <a:bodyPr wrap="square" lIns="0" tIns="0" rIns="0" bIns="0" rtlCol="0" anchor="ctr"/>
+          <a:lstStyle/>
+          <a:p>
+            <a:pPr algn="ctr" indent="0" marL="0">
+              <a:buNone/>
+            </a:pPr>
+            <a:r>
+              <a:rPr lang="en-US" sz="1250" b="1" dirty="0">
+                <a:solidFill>
+                  <a:srgbClr val="22D3EE"/>
+                </a:solidFill>
+                <a:latin typeface="Calibri" pitchFamily="34" charset="0"/>
+                <a:ea typeface="Calibri" pitchFamily="34" charset="-122"/>
+                <a:cs typeface="Calibri" pitchFamily="34" charset="-120"/>
+              </a:rPr>
+              <a:t>DISCRIMINANTE &gt; 0</a:t>
+            </a:r>
+            <a:endParaRPr lang="en-US" sz="1250" dirty="0"/>
+          </a:p>
+        </p:txBody>
+      </p:sp>
+      <p:sp>
+        <p:nvSpPr>
+          <p:cNvPr id="6" name="Text 4"/>
+          <p:cNvSpPr/>
+          <p:nvPr/>
+        </p:nvSpPr>
+        <p:spPr>
+          <a:xfrm>
+            <a:off x="731520" y="2194560"/>
+            <a:ext cx="3149498" cy="365760"/>
+          </a:xfrm>
+          <a:prstGeom prst="rect">
+            <a:avLst/>
+          </a:prstGeom>
+          <a:noFill/>
+          <a:ln/>
+        </p:spPr>
+        <p:txBody>
+          <a:bodyPr wrap="square" lIns="0" tIns="0" rIns="0" bIns="0" rtlCol="0" anchor="t"/>
+          <a:lstStyle/>
+          <a:p>
+            <a:pPr algn="ctr" indent="0" marL="0">
+              <a:lnSpc>
+                <a:spcPct val="112000"/>
+              </a:lnSpc>
+              <a:buNone/>
+            </a:pPr>
+            <a:r>
+              <a:rPr lang="en-US" sz="1200" dirty="0">
+                <a:solidFill>
+                  <a:srgbClr val="CBD5E1"/>
+                </a:solidFill>
+                <a:latin typeface="Calibri" pitchFamily="34" charset="0"/>
+                <a:ea typeface="Calibri" pitchFamily="34" charset="-122"/>
+                <a:cs typeface="Calibri" pitchFamily="34" charset="-120"/>
+              </a:rPr>
+              <a:t>Raíces reales distintas</a:t>
+            </a:r>
+            <a:endParaRPr lang="en-US" sz="1200" dirty="0"/>
+          </a:p>
+        </p:txBody>
+      </p:sp>
       <p:pic>
         <p:nvPicPr>
-          <p:cNvPr id="5" name="Image 0" descr="build/eq/ce_ex_setup.png">    </p:cNvPr>
+          <p:cNvPr id="7" name="Image 0" descr="build/eq/ce_case_real.png">    </p:cNvPr>
           <p:cNvPicPr>
             <a:picLocks noChangeAspect="1"/>
           </p:cNvPicPr>
@@ -5682,8 +5852,8 @@
         </p:blipFill>
         <p:spPr>
           <a:xfrm>
-            <a:off x="822960" y="2338357"/>
-            <a:ext cx="10545775" cy="809687"/>
+            <a:off x="731520" y="3202938"/>
+            <a:ext cx="3149498" cy="452123"/>
           </a:xfrm>
           <a:prstGeom prst="rect">
             <a:avLst/>
@@ -5692,14 +5862,80 @@
       </p:pic>
       <p:sp>
         <p:nvSpPr>
-          <p:cNvPr id="6" name="Text 3"/>
-          <p:cNvSpPr/>
-          <p:nvPr/>
-        </p:nvSpPr>
-        <p:spPr>
-          <a:xfrm>
-            <a:off x="548640" y="3749040"/>
-            <a:ext cx="11094415" cy="822960"/>
+          <p:cNvPr id="8" name="Shape 5"/>
+          <p:cNvSpPr/>
+          <p:nvPr/>
+        </p:nvSpPr>
+        <p:spPr>
+          <a:xfrm>
+            <a:off x="4338218" y="1691640"/>
+            <a:ext cx="3515258" cy="2926080"/>
+          </a:xfrm>
+          <a:prstGeom prst="roundRect">
+            <a:avLst>
+              <a:gd name="adj" fmla="val 2500"/>
+            </a:avLst>
+          </a:prstGeom>
+          <a:solidFill>
+            <a:srgbClr val="3A2A0E"/>
+          </a:solidFill>
+          <a:ln w="12700">
+            <a:solidFill>
+              <a:srgbClr val="F59E0B"/>
+            </a:solidFill>
+            <a:prstDash val="solid"/>
+          </a:ln>
+        </p:spPr>
+      </p:sp>
+      <p:sp>
+        <p:nvSpPr>
+          <p:cNvPr id="9" name="Text 6"/>
+          <p:cNvSpPr/>
+          <p:nvPr/>
+        </p:nvSpPr>
+        <p:spPr>
+          <a:xfrm>
+            <a:off x="4521098" y="1874520"/>
+            <a:ext cx="3149498" cy="274320"/>
+          </a:xfrm>
+          <a:prstGeom prst="rect">
+            <a:avLst/>
+          </a:prstGeom>
+          <a:noFill/>
+          <a:ln/>
+        </p:spPr>
+        <p:txBody>
+          <a:bodyPr wrap="square" lIns="0" tIns="0" rIns="0" bIns="0" rtlCol="0" anchor="ctr"/>
+          <a:lstStyle/>
+          <a:p>
+            <a:pPr algn="ctr" indent="0" marL="0">
+              <a:buNone/>
+            </a:pPr>
+            <a:r>
+              <a:rPr lang="en-US" sz="1250" b="1" dirty="0">
+                <a:solidFill>
+                  <a:srgbClr val="FBBF24"/>
+                </a:solidFill>
+                <a:latin typeface="Calibri" pitchFamily="34" charset="0"/>
+                <a:ea typeface="Calibri" pitchFamily="34" charset="-122"/>
+                <a:cs typeface="Calibri" pitchFamily="34" charset="-120"/>
+              </a:rPr>
+              <a:t>DISCRIMINANTE = 0</a:t>
+            </a:r>
+            <a:endParaRPr lang="en-US" sz="1250" dirty="0"/>
+          </a:p>
+        </p:txBody>
+      </p:sp>
+      <p:sp>
+        <p:nvSpPr>
+          <p:cNvPr id="10" name="Text 7"/>
+          <p:cNvSpPr/>
+          <p:nvPr/>
+        </p:nvSpPr>
+        <p:spPr>
+          <a:xfrm>
+            <a:off x="4521098" y="2194560"/>
+            <a:ext cx="3149498" cy="365760"/>
           </a:xfrm>
           <a:prstGeom prst="rect">
             <a:avLst/>
@@ -5711,14 +5947,14 @@
           <a:bodyPr wrap="square" lIns="0" tIns="0" rIns="0" bIns="0" rtlCol="0" anchor="t"/>
           <a:lstStyle/>
           <a:p>
-            <a:pPr algn="l" indent="0" marL="0">
+            <a:pPr algn="ctr" indent="0" marL="0">
               <a:lnSpc>
                 <a:spcPct val="112000"/>
               </a:lnSpc>
               <a:buNone/>
             </a:pPr>
             <a:r>
-              <a:rPr lang="en-US" sz="1500" dirty="0">
+              <a:rPr lang="en-US" sz="1200" dirty="0">
                 <a:solidFill>
                   <a:srgbClr val="CBD5E1"/>
                 </a:solidFill>
@@ -5726,15 +5962,240 @@
                 <a:ea typeface="Calibri" pitchFamily="34" charset="-122"/>
                 <a:cs typeface="Calibri" pitchFamily="34" charset="-120"/>
               </a:rPr>
-              <a:t>Encuentren la ecuación auxiliar, sus raíces, y la solución particular. Resuélvanlo en su cuaderno — la solución está en la siguiente diapositiva.</a:t>
-            </a:r>
-            <a:endParaRPr lang="en-US" sz="1500" dirty="0"/>
-          </a:p>
-        </p:txBody>
-      </p:sp>
-      <p:sp>
-        <p:nvSpPr>
-          <p:cNvPr id="7" name="Text 4"/>
+              <a:t>Raíz repetida</a:t>
+            </a:r>
+            <a:endParaRPr lang="en-US" sz="1200" dirty="0"/>
+          </a:p>
+        </p:txBody>
+      </p:sp>
+      <p:pic>
+        <p:nvPicPr>
+          <p:cNvPr id="11" name="Image 1" descr="build/eq/ce_case_repeated.png">    </p:cNvPr>
+          <p:cNvPicPr>
+            <a:picLocks noChangeAspect="1"/>
+          </p:cNvPicPr>
+          <p:nvPr/>
+        </p:nvPicPr>
+        <p:blipFill>
+          <a:blip r:embed="rId2"/>
+          <a:stretch>
+            <a:fillRect/>
+          </a:stretch>
+        </p:blipFill>
+        <p:spPr>
+          <a:xfrm>
+            <a:off x="4521098" y="3211360"/>
+            <a:ext cx="3149498" cy="435280"/>
+          </a:xfrm>
+          <a:prstGeom prst="rect">
+            <a:avLst/>
+          </a:prstGeom>
+        </p:spPr>
+      </p:pic>
+      <p:sp>
+        <p:nvSpPr>
+          <p:cNvPr id="12" name="Shape 8"/>
+          <p:cNvSpPr/>
+          <p:nvPr/>
+        </p:nvSpPr>
+        <p:spPr>
+          <a:xfrm>
+            <a:off x="8127797" y="1691640"/>
+            <a:ext cx="3515258" cy="2926080"/>
+          </a:xfrm>
+          <a:prstGeom prst="roundRect">
+            <a:avLst>
+              <a:gd name="adj" fmla="val 2500"/>
+            </a:avLst>
+          </a:prstGeom>
+          <a:solidFill>
+            <a:srgbClr val="2E2350"/>
+          </a:solidFill>
+          <a:ln w="12700">
+            <a:solidFill>
+              <a:srgbClr val="8B5CF6"/>
+            </a:solidFill>
+            <a:prstDash val="solid"/>
+          </a:ln>
+        </p:spPr>
+      </p:sp>
+      <p:sp>
+        <p:nvSpPr>
+          <p:cNvPr id="13" name="Text 9"/>
+          <p:cNvSpPr/>
+          <p:nvPr/>
+        </p:nvSpPr>
+        <p:spPr>
+          <a:xfrm>
+            <a:off x="8310677" y="1874520"/>
+            <a:ext cx="3149498" cy="274320"/>
+          </a:xfrm>
+          <a:prstGeom prst="rect">
+            <a:avLst/>
+          </a:prstGeom>
+          <a:noFill/>
+          <a:ln/>
+        </p:spPr>
+        <p:txBody>
+          <a:bodyPr wrap="square" lIns="0" tIns="0" rIns="0" bIns="0" rtlCol="0" anchor="ctr"/>
+          <a:lstStyle/>
+          <a:p>
+            <a:pPr algn="ctr" indent="0" marL="0">
+              <a:buNone/>
+            </a:pPr>
+            <a:r>
+              <a:rPr lang="en-US" sz="1250" b="1" dirty="0">
+                <a:solidFill>
+                  <a:srgbClr val="A78BFA"/>
+                </a:solidFill>
+                <a:latin typeface="Calibri" pitchFamily="34" charset="0"/>
+                <a:ea typeface="Calibri" pitchFamily="34" charset="-122"/>
+                <a:cs typeface="Calibri" pitchFamily="34" charset="-120"/>
+              </a:rPr>
+              <a:t>DISCRIMINANTE &lt; 0</a:t>
+            </a:r>
+            <a:endParaRPr lang="en-US" sz="1250" dirty="0"/>
+          </a:p>
+        </p:txBody>
+      </p:sp>
+      <p:sp>
+        <p:nvSpPr>
+          <p:cNvPr id="14" name="Text 10"/>
+          <p:cNvSpPr/>
+          <p:nvPr/>
+        </p:nvSpPr>
+        <p:spPr>
+          <a:xfrm>
+            <a:off x="8310677" y="2194560"/>
+            <a:ext cx="3149498" cy="365760"/>
+          </a:xfrm>
+          <a:prstGeom prst="rect">
+            <a:avLst/>
+          </a:prstGeom>
+          <a:noFill/>
+          <a:ln/>
+        </p:spPr>
+        <p:txBody>
+          <a:bodyPr wrap="square" lIns="0" tIns="0" rIns="0" bIns="0" rtlCol="0" anchor="t"/>
+          <a:lstStyle/>
+          <a:p>
+            <a:pPr algn="ctr" indent="0" marL="0">
+              <a:lnSpc>
+                <a:spcPct val="112000"/>
+              </a:lnSpc>
+              <a:buNone/>
+            </a:pPr>
+            <a:r>
+              <a:rPr lang="en-US" sz="1200" dirty="0">
+                <a:solidFill>
+                  <a:srgbClr val="CBD5E1"/>
+                </a:solidFill>
+                <a:latin typeface="Calibri" pitchFamily="34" charset="0"/>
+                <a:ea typeface="Calibri" pitchFamily="34" charset="-122"/>
+                <a:cs typeface="Calibri" pitchFamily="34" charset="-120"/>
+              </a:rPr>
+              <a:t>Raíces complejas conjugadas</a:t>
+            </a:r>
+            <a:endParaRPr lang="en-US" sz="1200" dirty="0"/>
+          </a:p>
+        </p:txBody>
+      </p:sp>
+      <p:pic>
+        <p:nvPicPr>
+          <p:cNvPr id="15" name="Image 2" descr="build/eq/ce_case_complex.png">    </p:cNvPr>
+          <p:cNvPicPr>
+            <a:picLocks noChangeAspect="1"/>
+          </p:cNvPicPr>
+          <p:nvPr/>
+        </p:nvPicPr>
+        <p:blipFill>
+          <a:blip r:embed="rId3"/>
+          <a:stretch>
+            <a:fillRect/>
+          </a:stretch>
+        </p:blipFill>
+        <p:spPr>
+          <a:xfrm>
+            <a:off x="8310677" y="3295805"/>
+            <a:ext cx="3149498" cy="266391"/>
+          </a:xfrm>
+          <a:prstGeom prst="rect">
+            <a:avLst/>
+          </a:prstGeom>
+        </p:spPr>
+      </p:pic>
+      <p:sp>
+        <p:nvSpPr>
+          <p:cNvPr id="16" name="Shape 11"/>
+          <p:cNvSpPr/>
+          <p:nvPr/>
+        </p:nvSpPr>
+        <p:spPr>
+          <a:xfrm>
+            <a:off x="548640" y="4846320"/>
+            <a:ext cx="11094415" cy="685800"/>
+          </a:xfrm>
+          <a:prstGeom prst="roundRect">
+            <a:avLst>
+              <a:gd name="adj" fmla="val 10667"/>
+            </a:avLst>
+          </a:prstGeom>
+          <a:solidFill>
+            <a:srgbClr val="142B1F"/>
+          </a:solidFill>
+          <a:ln w="12700">
+            <a:solidFill>
+              <a:srgbClr val="34D399"/>
+            </a:solidFill>
+            <a:prstDash val="solid"/>
+          </a:ln>
+        </p:spPr>
+      </p:sp>
+      <p:sp>
+        <p:nvSpPr>
+          <p:cNvPr id="17" name="Text 12"/>
+          <p:cNvSpPr/>
+          <p:nvPr/>
+        </p:nvSpPr>
+        <p:spPr>
+          <a:xfrm>
+            <a:off x="777240" y="4846320"/>
+            <a:ext cx="10637215" cy="685800"/>
+          </a:xfrm>
+          <a:prstGeom prst="rect">
+            <a:avLst/>
+          </a:prstGeom>
+          <a:noFill/>
+          <a:ln/>
+        </p:spPr>
+        <p:txBody>
+          <a:bodyPr wrap="square" lIns="0" tIns="0" rIns="0" bIns="0" rtlCol="0" anchor="ctr"/>
+          <a:lstStyle/>
+          <a:p>
+            <a:pPr algn="l" indent="0" marL="0">
+              <a:lnSpc>
+                <a:spcPct val="115000"/>
+              </a:lnSpc>
+              <a:buNone/>
+            </a:pPr>
+            <a:r>
+              <a:rPr lang="en-US" sz="1350" b="1" dirty="0">
+                <a:solidFill>
+                  <a:srgbClr val="34D399"/>
+                </a:solidFill>
+                <a:latin typeface="Calibri" pitchFamily="34" charset="0"/>
+                <a:ea typeface="Calibri" pitchFamily="34" charset="-122"/>
+                <a:cs typeface="Calibri" pitchFamily="34" charset="-120"/>
+              </a:rPr>
+              <a:t>Comparen estas tres fórmulas con las de la Diapositiva 8 — misma estructura: solo cambian eʳˣ→xᵐ y x→ln x.</a:t>
+            </a:r>
+            <a:endParaRPr lang="en-US" sz="1350" dirty="0"/>
+          </a:p>
+        </p:txBody>
+      </p:sp>
+      <p:sp>
+        <p:nvSpPr>
+          <p:cNvPr id="18" name="Text 13"/>
           <p:cNvSpPr/>
           <p:nvPr/>
         </p:nvSpPr>
@@ -5773,7 +6234,7 @@
       </p:sp>
       <p:sp>
         <p:nvSpPr>
-          <p:cNvPr id="8" name="Text 5"/>
+          <p:cNvPr id="19" name="Text 14"/>
           <p:cNvSpPr/>
           <p:nvPr/>
         </p:nvSpPr>
@@ -5914,7 +6375,7 @@
                 <a:ea typeface="Calibri" pitchFamily="34" charset="-122"/>
                 <a:cs typeface="Calibri" pitchFamily="34" charset="-120"/>
               </a:rPr>
-              <a:t>Cauchy-Euler — Ejemplo (Solución)</a:t>
+              <a:t>Cauchy-Euler — Ejemplo (Planteamiento)</a:t>
             </a:r>
             <a:endParaRPr lang="en-US" sz="2900" dirty="0"/>
           </a:p>
@@ -5928,62 +6389,28 @@
         </p:nvSpPr>
         <p:spPr>
           <a:xfrm>
-            <a:off x="548640" y="1691640"/>
-            <a:ext cx="11094415" cy="3566160"/>
+            <a:off x="548640" y="2103120"/>
+            <a:ext cx="11094415" cy="1280160"/>
           </a:xfrm>
           <a:prstGeom prst="roundRect">
             <a:avLst>
-              <a:gd name="adj" fmla="val 2564"/>
+              <a:gd name="adj" fmla="val 5714"/>
             </a:avLst>
           </a:prstGeom>
           <a:solidFill>
-            <a:srgbClr val="1E293B"/>
+            <a:srgbClr val="0E3A44"/>
           </a:solidFill>
-          <a:ln/>
-        </p:spPr>
-      </p:sp>
-      <p:sp>
-        <p:nvSpPr>
-          <p:cNvPr id="5" name="Text 3"/>
-          <p:cNvSpPr/>
-          <p:nvPr/>
-        </p:nvSpPr>
-        <p:spPr>
-          <a:xfrm>
-            <a:off x="822960" y="1828800"/>
-            <a:ext cx="10545775" cy="274320"/>
-          </a:xfrm>
-          <a:prstGeom prst="rect">
-            <a:avLst/>
-          </a:prstGeom>
-          <a:noFill/>
-          <a:ln/>
-        </p:spPr>
-        <p:txBody>
-          <a:bodyPr wrap="square" lIns="0" tIns="0" rIns="0" bIns="0" rtlCol="0" anchor="t"/>
-          <a:lstStyle/>
-          <a:p>
-            <a:pPr algn="l" indent="0" marL="0">
-              <a:buNone/>
-            </a:pPr>
-            <a:r>
-              <a:rPr lang="en-US" sz="1300" b="1" dirty="0">
-                <a:solidFill>
-                  <a:srgbClr val="22D3EE"/>
-                </a:solidFill>
-                <a:latin typeface="Calibri" pitchFamily="34" charset="0"/>
-                <a:ea typeface="Calibri" pitchFamily="34" charset="-122"/>
-                <a:cs typeface="Calibri" pitchFamily="34" charset="-120"/>
-              </a:rPr>
-              <a:t>ECUACIÓN AUXILIAR Y RAÍCES</a:t>
-            </a:r>
-            <a:endParaRPr lang="en-US" sz="1300" dirty="0"/>
-          </a:p>
-        </p:txBody>
+          <a:ln w="12700">
+            <a:solidFill>
+              <a:srgbClr val="06B6D4"/>
+            </a:solidFill>
+            <a:prstDash val="solid"/>
+          </a:ln>
+        </p:spPr>
       </p:sp>
       <p:pic>
         <p:nvPicPr>
-          <p:cNvPr id="6" name="Image 0" descr="build/eq/ce_ex_steps.png">    </p:cNvPr>
+          <p:cNvPr id="5" name="Image 0" descr="build/eq/ce_ex_setup.png">    </p:cNvPr>
           <p:cNvPicPr>
             <a:picLocks noChangeAspect="1"/>
           </p:cNvPicPr>
@@ -5997,8 +6424,8 @@
         </p:blipFill>
         <p:spPr>
           <a:xfrm>
-            <a:off x="2169404" y="2148840"/>
-            <a:ext cx="7852886" cy="502920"/>
+            <a:off x="822960" y="2338357"/>
+            <a:ext cx="10545775" cy="809687"/>
           </a:xfrm>
           <a:prstGeom prst="rect">
             <a:avLst/>
@@ -6007,14 +6434,14 @@
       </p:pic>
       <p:sp>
         <p:nvSpPr>
-          <p:cNvPr id="7" name="Text 4"/>
-          <p:cNvSpPr/>
-          <p:nvPr/>
-        </p:nvSpPr>
-        <p:spPr>
-          <a:xfrm>
-            <a:off x="822960" y="2834640"/>
-            <a:ext cx="10545775" cy="777240"/>
+          <p:cNvPr id="6" name="Text 3"/>
+          <p:cNvSpPr/>
+          <p:nvPr/>
+        </p:nvSpPr>
+        <p:spPr>
+          <a:xfrm>
+            <a:off x="548640" y="3749040"/>
+            <a:ext cx="11094415" cy="822960"/>
           </a:xfrm>
           <a:prstGeom prst="rect">
             <a:avLst/>
@@ -6033,7 +6460,7 @@
               <a:buNone/>
             </a:pPr>
             <a:r>
-              <a:rPr lang="en-US" sz="1300" dirty="0">
+              <a:rPr lang="en-US" sz="1500" dirty="0">
                 <a:solidFill>
                   <a:srgbClr val="CBD5E1"/>
                 </a:solidFill>
@@ -6041,39 +6468,15 @@
                 <a:ea typeface="Calibri" pitchFamily="34" charset="-122"/>
                 <a:cs typeface="Calibri" pitchFamily="34" charset="-120"/>
               </a:rPr>
-              <a:t>Con raíces complejas m=α±βi (α=0, β=2): y=xᵅ[C₁cos(β ln x)+C₂sin(β ln x)]. Evaluando en x=1 (ln 1=0) con y(1)=1, y'(1)=4: C₁=1, C₂=2.</a:t>
-            </a:r>
-            <a:endParaRPr lang="en-US" sz="1300" dirty="0"/>
-          </a:p>
-        </p:txBody>
-      </p:sp>
-      <p:pic>
-        <p:nvPicPr>
-          <p:cNvPr id="8" name="Image 1" descr="build/eq/ce_ex_sol.png">    </p:cNvPr>
-          <p:cNvPicPr>
-            <a:picLocks noChangeAspect="1"/>
-          </p:cNvPicPr>
-          <p:nvPr/>
-        </p:nvPicPr>
-        <p:blipFill>
-          <a:blip r:embed="rId2"/>
-          <a:stretch>
-            <a:fillRect/>
-          </a:stretch>
-        </p:blipFill>
-        <p:spPr>
-          <a:xfrm>
-            <a:off x="3492445" y="3703320"/>
-            <a:ext cx="5206805" cy="548640"/>
-          </a:xfrm>
-          <a:prstGeom prst="rect">
-            <a:avLst/>
-          </a:prstGeom>
-        </p:spPr>
-      </p:pic>
-      <p:sp>
-        <p:nvSpPr>
-          <p:cNvPr id="9" name="Text 5"/>
+              <a:t>Encuentren la ecuación auxiliar, sus raíces, y la solución particular. Resuélvanlo en su cuaderno — la solución está en la siguiente diapositiva.</a:t>
+            </a:r>
+            <a:endParaRPr lang="en-US" sz="1500" dirty="0"/>
+          </a:p>
+        </p:txBody>
+      </p:sp>
+      <p:sp>
+        <p:nvSpPr>
+          <p:cNvPr id="7" name="Text 4"/>
           <p:cNvSpPr/>
           <p:nvPr/>
         </p:nvSpPr>
@@ -6112,7 +6515,7 @@
       </p:sp>
       <p:sp>
         <p:nvSpPr>
-          <p:cNvPr id="10" name="Text 6"/>
+          <p:cNvPr id="8" name="Text 5"/>
           <p:cNvSpPr/>
           <p:nvPr/>
         </p:nvSpPr>
@@ -6214,7 +6617,7 @@
                 <a:ea typeface="Calibri" pitchFamily="34" charset="-122"/>
                 <a:cs typeface="Calibri" pitchFamily="34" charset="-120"/>
               </a:rPr>
-              <a:t>EL MÉTODO DEL ANULADOR</a:t>
+              <a:t>PIZARRÓN</a:t>
             </a:r>
             <a:endParaRPr lang="en-US" sz="1300" dirty="0"/>
           </a:p>
@@ -6253,7 +6656,7 @@
                 <a:ea typeface="Calibri" pitchFamily="34" charset="-122"/>
                 <a:cs typeface="Calibri" pitchFamily="34" charset="-120"/>
               </a:rPr>
-              <a:t>¿Por Qué No Basta con Adivinar?</a:t>
+              <a:t>Cauchy-Euler — Ejemplo (Solución)</a:t>
             </a:r>
             <a:endParaRPr lang="en-US" sz="2900" dirty="0"/>
           </a:p>
@@ -6268,27 +6671,61 @@
         <p:spPr>
           <a:xfrm>
             <a:off x="548640" y="1691640"/>
-            <a:ext cx="11094415" cy="1051560"/>
+            <a:ext cx="11094415" cy="3566160"/>
           </a:xfrm>
           <a:prstGeom prst="roundRect">
             <a:avLst>
-              <a:gd name="adj" fmla="val 6957"/>
+              <a:gd name="adj" fmla="val 2564"/>
             </a:avLst>
           </a:prstGeom>
           <a:solidFill>
-            <a:srgbClr val="0E3A44"/>
+            <a:srgbClr val="1E293B"/>
           </a:solidFill>
-          <a:ln w="12700">
-            <a:solidFill>
-              <a:srgbClr val="06B6D4"/>
-            </a:solidFill>
-            <a:prstDash val="solid"/>
-          </a:ln>
-        </p:spPr>
+          <a:ln/>
+        </p:spPr>
+      </p:sp>
+      <p:sp>
+        <p:nvSpPr>
+          <p:cNvPr id="5" name="Text 3"/>
+          <p:cNvSpPr/>
+          <p:nvPr/>
+        </p:nvSpPr>
+        <p:spPr>
+          <a:xfrm>
+            <a:off x="822960" y="1828800"/>
+            <a:ext cx="10545775" cy="274320"/>
+          </a:xfrm>
+          <a:prstGeom prst="rect">
+            <a:avLst/>
+          </a:prstGeom>
+          <a:noFill/>
+          <a:ln/>
+        </p:spPr>
+        <p:txBody>
+          <a:bodyPr wrap="square" lIns="0" tIns="0" rIns="0" bIns="0" rtlCol="0" anchor="t"/>
+          <a:lstStyle/>
+          <a:p>
+            <a:pPr algn="l" indent="0" marL="0">
+              <a:buNone/>
+            </a:pPr>
+            <a:r>
+              <a:rPr lang="en-US" sz="1300" b="1" dirty="0">
+                <a:solidFill>
+                  <a:srgbClr val="22D3EE"/>
+                </a:solidFill>
+                <a:latin typeface="Calibri" pitchFamily="34" charset="0"/>
+                <a:ea typeface="Calibri" pitchFamily="34" charset="-122"/>
+                <a:cs typeface="Calibri" pitchFamily="34" charset="-120"/>
+              </a:rPr>
+              <a:t>ECUACIÓN AUXILIAR Y RAÍCES</a:t>
+            </a:r>
+            <a:endParaRPr lang="en-US" sz="1300" dirty="0"/>
+          </a:p>
+        </p:txBody>
       </p:sp>
       <p:pic>
         <p:nvPicPr>
-          <p:cNvPr id="5" name="Image 0" descr="build/eq/nonhomog_general.png">    </p:cNvPr>
+          <p:cNvPr id="6" name="Image 0" descr="build/eq/ce_ex_steps.png">    </p:cNvPr>
           <p:cNvPicPr>
             <a:picLocks noChangeAspect="1"/>
           </p:cNvPicPr>
@@ -6302,8 +6739,8 @@
         </p:blipFill>
         <p:spPr>
           <a:xfrm>
-            <a:off x="3259603" y="1828800"/>
-            <a:ext cx="5672488" cy="777240"/>
+            <a:off x="2169404" y="2148840"/>
+            <a:ext cx="7852886" cy="502920"/>
           </a:xfrm>
           <a:prstGeom prst="rect">
             <a:avLst/>
@@ -6312,14 +6749,14 @@
       </p:pic>
       <p:sp>
         <p:nvSpPr>
-          <p:cNvPr id="6" name="Text 3"/>
-          <p:cNvSpPr/>
-          <p:nvPr/>
-        </p:nvSpPr>
-        <p:spPr>
-          <a:xfrm>
-            <a:off x="548640" y="3017520"/>
-            <a:ext cx="11094415" cy="822960"/>
+          <p:cNvPr id="7" name="Text 4"/>
+          <p:cNvSpPr/>
+          <p:nvPr/>
+        </p:nvSpPr>
+        <p:spPr>
+          <a:xfrm>
+            <a:off x="822960" y="2834640"/>
+            <a:ext cx="10545775" cy="777240"/>
           </a:xfrm>
           <a:prstGeom prst="rect">
             <a:avLst/>
@@ -6338,7 +6775,7 @@
               <a:buNone/>
             </a:pPr>
             <a:r>
-              <a:rPr lang="en-US" sz="1500" dirty="0">
+              <a:rPr lang="en-US" sz="1300" dirty="0">
                 <a:solidFill>
                   <a:srgbClr val="CBD5E1"/>
                 </a:solidFill>
@@ -6346,84 +6783,39 @@
                 <a:ea typeface="Calibri" pitchFamily="34" charset="-122"/>
                 <a:cs typeface="Calibri" pitchFamily="34" charset="-120"/>
               </a:rPr>
-              <a:t>Ya saben construir yᶜ. Falta yₚ. Podrían adivinar su forma a ojo —polinomio para polinomio, exponencial para exponencial— pero adivinar falla en cuanto el forzamiento se complica.</a:t>
-            </a:r>
-            <a:endParaRPr lang="en-US" sz="1500" dirty="0"/>
-          </a:p>
-        </p:txBody>
-      </p:sp>
-      <p:sp>
-        <p:nvSpPr>
-          <p:cNvPr id="7" name="Shape 4"/>
-          <p:cNvSpPr/>
-          <p:nvPr/>
-        </p:nvSpPr>
-        <p:spPr>
-          <a:xfrm>
-            <a:off x="548640" y="3977640"/>
-            <a:ext cx="11094415" cy="1051560"/>
-          </a:xfrm>
-          <a:prstGeom prst="roundRect">
-            <a:avLst>
-              <a:gd name="adj" fmla="val 6957"/>
-            </a:avLst>
-          </a:prstGeom>
-          <a:solidFill>
-            <a:srgbClr val="2E2350"/>
-          </a:solidFill>
-          <a:ln w="12700">
-            <a:solidFill>
-              <a:srgbClr val="8B5CF6"/>
-            </a:solidFill>
-            <a:prstDash val="solid"/>
-          </a:ln>
-        </p:spPr>
-      </p:sp>
-      <p:sp>
-        <p:nvSpPr>
-          <p:cNvPr id="8" name="Text 5"/>
-          <p:cNvSpPr/>
-          <p:nvPr/>
-        </p:nvSpPr>
-        <p:spPr>
-          <a:xfrm>
-            <a:off x="777240" y="3977640"/>
-            <a:ext cx="10637215" cy="1051560"/>
-          </a:xfrm>
-          <a:prstGeom prst="rect">
-            <a:avLst/>
-          </a:prstGeom>
-          <a:noFill/>
-          <a:ln/>
-        </p:spPr>
-        <p:txBody>
-          <a:bodyPr wrap="square" lIns="0" tIns="0" rIns="0" bIns="0" rtlCol="0" anchor="ctr"/>
-          <a:lstStyle/>
-          <a:p>
-            <a:pPr algn="l" indent="0" marL="0">
-              <a:lnSpc>
-                <a:spcPct val="115000"/>
-              </a:lnSpc>
-              <a:buNone/>
-            </a:pPr>
-            <a:r>
-              <a:rPr lang="en-US" sz="1400" b="1" dirty="0">
-                <a:solidFill>
-                  <a:srgbClr val="A78BFA"/>
-                </a:solidFill>
-                <a:latin typeface="Calibri" pitchFamily="34" charset="0"/>
-                <a:ea typeface="Calibri" pitchFamily="34" charset="-122"/>
-                <a:cs typeface="Calibri" pitchFamily="34" charset="-120"/>
-              </a:rPr>
-              <a:t>El método del anulador convierte ese tanteo en álgebra pura: tratamos D=d/dx como un símbolo algebraico, y buscamos un operador que ANIQUILE —convierta en cero— la función g(x) del lado derecho.</a:t>
-            </a:r>
-            <a:endParaRPr lang="en-US" sz="1400" dirty="0"/>
-          </a:p>
-        </p:txBody>
-      </p:sp>
-      <p:sp>
-        <p:nvSpPr>
-          <p:cNvPr id="9" name="Text 6"/>
+              <a:t>Con raíces complejas m=α±βi (α=0, β=2): y=xᵅ[C₁cos(β ln x)+C₂sin(β ln x)]. Evaluando en x=1 (ln 1=0) con y(1)=1, y'(1)=4: C₁=1, C₂=2.</a:t>
+            </a:r>
+            <a:endParaRPr lang="en-US" sz="1300" dirty="0"/>
+          </a:p>
+        </p:txBody>
+      </p:sp>
+      <p:pic>
+        <p:nvPicPr>
+          <p:cNvPr id="8" name="Image 1" descr="build/eq/ce_ex_sol.png">    </p:cNvPr>
+          <p:cNvPicPr>
+            <a:picLocks noChangeAspect="1"/>
+          </p:cNvPicPr>
+          <p:nvPr/>
+        </p:nvPicPr>
+        <p:blipFill>
+          <a:blip r:embed="rId2"/>
+          <a:stretch>
+            <a:fillRect/>
+          </a:stretch>
+        </p:blipFill>
+        <p:spPr>
+          <a:xfrm>
+            <a:off x="3492445" y="3703320"/>
+            <a:ext cx="5206805" cy="548640"/>
+          </a:xfrm>
+          <a:prstGeom prst="rect">
+            <a:avLst/>
+          </a:prstGeom>
+        </p:spPr>
+      </p:pic>
+      <p:sp>
+        <p:nvSpPr>
+          <p:cNvPr id="9" name="Text 5"/>
           <p:cNvSpPr/>
           <p:nvPr/>
         </p:nvSpPr>
@@ -6462,7 +6854,7 @@
       </p:sp>
       <p:sp>
         <p:nvSpPr>
-          <p:cNvPr id="10" name="Text 7"/>
+          <p:cNvPr id="10" name="Text 6"/>
           <p:cNvSpPr/>
           <p:nvPr/>
         </p:nvSpPr>
@@ -6564,7 +6956,7 @@
                 <a:ea typeface="Calibri" pitchFamily="34" charset="-122"/>
                 <a:cs typeface="Calibri" pitchFamily="34" charset="-120"/>
               </a:rPr>
-              <a:t>TRES BLOQUES BÁSICOS</a:t>
+              <a:t>EL MÉTODO DEL ANULADOR</a:t>
             </a:r>
             <a:endParaRPr lang="en-US" sz="1300" dirty="0"/>
           </a:p>
@@ -6603,7 +6995,7 @@
                 <a:ea typeface="Calibri" pitchFamily="34" charset="-122"/>
                 <a:cs typeface="Calibri" pitchFamily="34" charset="-120"/>
               </a:rPr>
-              <a:t>Operadores D y la Tabla de Anuladores</a:t>
+              <a:t>¿Por Qué No Basta con Adivinar?</a:t>
             </a:r>
             <a:endParaRPr lang="en-US" sz="2900" dirty="0"/>
           </a:p>
@@ -6618,11 +7010,11 @@
         <p:spPr>
           <a:xfrm>
             <a:off x="548640" y="1691640"/>
-            <a:ext cx="11094415" cy="868680"/>
+            <a:ext cx="11094415" cy="1051560"/>
           </a:xfrm>
           <a:prstGeom prst="roundRect">
             <a:avLst>
-              <a:gd name="adj" fmla="val 8421"/>
+              <a:gd name="adj" fmla="val 6957"/>
             </a:avLst>
           </a:prstGeom>
           <a:solidFill>
@@ -6636,40 +7028,67 @@
           </a:ln>
         </p:spPr>
       </p:sp>
-      <p:sp>
-        <p:nvSpPr>
-          <p:cNvPr id="5" name="Text 3"/>
-          <p:cNvSpPr/>
-          <p:nvPr/>
-        </p:nvSpPr>
-        <p:spPr>
-          <a:xfrm>
-            <a:off x="868680" y="1691640"/>
-            <a:ext cx="6656649" cy="868680"/>
-          </a:xfrm>
-          <a:prstGeom prst="rect">
-            <a:avLst/>
-          </a:prstGeom>
-          <a:noFill/>
-          <a:ln/>
-        </p:spPr>
-        <p:txBody>
-          <a:bodyPr wrap="square" lIns="0" tIns="0" rIns="0" bIns="0" rtlCol="0" anchor="ctr"/>
-          <a:lstStyle/>
-          <a:p>
-            <a:pPr indent="0" marL="0">
+      <p:pic>
+        <p:nvPicPr>
+          <p:cNvPr id="5" name="Image 0" descr="build/eq/nonhomog_general.png">    </p:cNvPr>
+          <p:cNvPicPr>
+            <a:picLocks noChangeAspect="1"/>
+          </p:cNvPicPr>
+          <p:nvPr/>
+        </p:nvPicPr>
+        <p:blipFill>
+          <a:blip r:embed="rId1"/>
+          <a:stretch>
+            <a:fillRect/>
+          </a:stretch>
+        </p:blipFill>
+        <p:spPr>
+          <a:xfrm>
+            <a:off x="3259603" y="1828800"/>
+            <a:ext cx="5672488" cy="777240"/>
+          </a:xfrm>
+          <a:prstGeom prst="rect">
+            <a:avLst/>
+          </a:prstGeom>
+        </p:spPr>
+      </p:pic>
+      <p:sp>
+        <p:nvSpPr>
+          <p:cNvPr id="6" name="Text 3"/>
+          <p:cNvSpPr/>
+          <p:nvPr/>
+        </p:nvSpPr>
+        <p:spPr>
+          <a:xfrm>
+            <a:off x="548640" y="3017520"/>
+            <a:ext cx="11094415" cy="822960"/>
+          </a:xfrm>
+          <a:prstGeom prst="rect">
+            <a:avLst/>
+          </a:prstGeom>
+          <a:noFill/>
+          <a:ln/>
+        </p:spPr>
+        <p:txBody>
+          <a:bodyPr wrap="square" lIns="0" tIns="0" rIns="0" bIns="0" rtlCol="0" anchor="t"/>
+          <a:lstStyle/>
+          <a:p>
+            <a:pPr algn="l" indent="0" marL="0">
+              <a:lnSpc>
+                <a:spcPct val="112000"/>
+              </a:lnSpc>
               <a:buNone/>
             </a:pPr>
             <a:r>
               <a:rPr lang="en-US" sz="1500" dirty="0">
                 <a:solidFill>
-                  <a:srgbClr val="F8FAFC"/>
-                </a:solidFill>
-                <a:latin typeface="Calibri" pitchFamily="34" charset="0"/>
-                <a:ea typeface="Calibri" pitchFamily="34" charset="-122"/>
-                <a:cs typeface="Calibri" pitchFamily="34" charset="-120"/>
-              </a:rPr>
-              <a:t>Polinomio de grado k (hasta xᵏ)</a:t>
+                  <a:srgbClr val="CBD5E1"/>
+                </a:solidFill>
+                <a:latin typeface="Calibri" pitchFamily="34" charset="0"/>
+                <a:ea typeface="Calibri" pitchFamily="34" charset="-122"/>
+                <a:cs typeface="Calibri" pitchFamily="34" charset="-120"/>
+              </a:rPr>
+              <a:t>Ya saben construir yᶜ. Falta yₚ. Podrían adivinar su forma a ojo —polinomio para polinomio, exponencial para exponencial— pero adivinar falla en cuanto el forzamiento se complica.</a:t>
             </a:r>
             <a:endParaRPr lang="en-US" sz="1500" dirty="0"/>
           </a:p>
@@ -6677,165 +7096,26 @@
       </p:sp>
       <p:sp>
         <p:nvSpPr>
-          <p:cNvPr id="6" name="Text 4"/>
-          <p:cNvSpPr/>
-          <p:nvPr/>
-        </p:nvSpPr>
-        <p:spPr>
-          <a:xfrm>
-            <a:off x="7205289" y="1691640"/>
-            <a:ext cx="4117726" cy="868680"/>
-          </a:xfrm>
-          <a:prstGeom prst="rect">
-            <a:avLst/>
-          </a:prstGeom>
-          <a:noFill/>
-          <a:ln/>
-        </p:spPr>
-        <p:txBody>
-          <a:bodyPr wrap="square" lIns="0" tIns="0" rIns="0" bIns="0" rtlCol="0" anchor="ctr"/>
-          <a:lstStyle/>
-          <a:p>
-            <a:pPr algn="r" indent="0" marL="0">
-              <a:buNone/>
-            </a:pPr>
-            <a:r>
-              <a:rPr lang="en-US" sz="1900" b="1" dirty="0">
-                <a:solidFill>
-                  <a:srgbClr val="22D3EE"/>
-                </a:solidFill>
-                <a:latin typeface="Calibri" pitchFamily="34" charset="0"/>
-                <a:ea typeface="Calibri" pitchFamily="34" charset="-122"/>
-                <a:cs typeface="Calibri" pitchFamily="34" charset="-120"/>
-              </a:rPr>
-              <a:t>Dᵏ⁺¹</a:t>
-            </a:r>
-            <a:endParaRPr lang="en-US" sz="1900" dirty="0"/>
-          </a:p>
-        </p:txBody>
-      </p:sp>
-      <p:sp>
-        <p:nvSpPr>
-          <p:cNvPr id="7" name="Shape 5"/>
-          <p:cNvSpPr/>
-          <p:nvPr/>
-        </p:nvSpPr>
-        <p:spPr>
-          <a:xfrm>
-            <a:off x="548640" y="2743200"/>
-            <a:ext cx="11094415" cy="868680"/>
+          <p:cNvPr id="7" name="Shape 4"/>
+          <p:cNvSpPr/>
+          <p:nvPr/>
+        </p:nvSpPr>
+        <p:spPr>
+          <a:xfrm>
+            <a:off x="548640" y="3977640"/>
+            <a:ext cx="11094415" cy="1051560"/>
           </a:xfrm>
           <a:prstGeom prst="roundRect">
             <a:avLst>
-              <a:gd name="adj" fmla="val 8421"/>
+              <a:gd name="adj" fmla="val 6957"/>
             </a:avLst>
           </a:prstGeom>
           <a:solidFill>
-            <a:srgbClr val="1E293B"/>
-          </a:solidFill>
-          <a:ln/>
-        </p:spPr>
-      </p:sp>
-      <p:sp>
-        <p:nvSpPr>
-          <p:cNvPr id="8" name="Text 6"/>
-          <p:cNvSpPr/>
-          <p:nvPr/>
-        </p:nvSpPr>
-        <p:spPr>
-          <a:xfrm>
-            <a:off x="868680" y="2743200"/>
-            <a:ext cx="6656649" cy="868680"/>
-          </a:xfrm>
-          <a:prstGeom prst="rect">
-            <a:avLst/>
-          </a:prstGeom>
-          <a:noFill/>
-          <a:ln/>
-        </p:spPr>
-        <p:txBody>
-          <a:bodyPr wrap="square" lIns="0" tIns="0" rIns="0" bIns="0" rtlCol="0" anchor="ctr"/>
-          <a:lstStyle/>
-          <a:p>
-            <a:pPr indent="0" marL="0">
-              <a:buNone/>
-            </a:pPr>
-            <a:r>
-              <a:rPr lang="en-US" sz="1500" dirty="0">
-                <a:solidFill>
-                  <a:srgbClr val="F8FAFC"/>
-                </a:solidFill>
-                <a:latin typeface="Calibri" pitchFamily="34" charset="0"/>
-                <a:ea typeface="Calibri" pitchFamily="34" charset="-122"/>
-                <a:cs typeface="Calibri" pitchFamily="34" charset="-120"/>
-              </a:rPr>
-              <a:t>Exponencial eʳˣ</a:t>
-            </a:r>
-            <a:endParaRPr lang="en-US" sz="1500" dirty="0"/>
-          </a:p>
-        </p:txBody>
-      </p:sp>
-      <p:sp>
-        <p:nvSpPr>
-          <p:cNvPr id="9" name="Text 7"/>
-          <p:cNvSpPr/>
-          <p:nvPr/>
-        </p:nvSpPr>
-        <p:spPr>
-          <a:xfrm>
-            <a:off x="7205289" y="2743200"/>
-            <a:ext cx="4117726" cy="868680"/>
-          </a:xfrm>
-          <a:prstGeom prst="rect">
-            <a:avLst/>
-          </a:prstGeom>
-          <a:noFill/>
-          <a:ln/>
-        </p:spPr>
-        <p:txBody>
-          <a:bodyPr wrap="square" lIns="0" tIns="0" rIns="0" bIns="0" rtlCol="0" anchor="ctr"/>
-          <a:lstStyle/>
-          <a:p>
-            <a:pPr algn="r" indent="0" marL="0">
-              <a:buNone/>
-            </a:pPr>
-            <a:r>
-              <a:rPr lang="en-US" sz="1900" b="1" dirty="0">
-                <a:solidFill>
-                  <a:srgbClr val="22D3EE"/>
-                </a:solidFill>
-                <a:latin typeface="Calibri" pitchFamily="34" charset="0"/>
-                <a:ea typeface="Calibri" pitchFamily="34" charset="-122"/>
-                <a:cs typeface="Calibri" pitchFamily="34" charset="-120"/>
-              </a:rPr>
-              <a:t>(D−r)</a:t>
-            </a:r>
-            <a:endParaRPr lang="en-US" sz="1900" dirty="0"/>
-          </a:p>
-        </p:txBody>
-      </p:sp>
-      <p:sp>
-        <p:nvSpPr>
-          <p:cNvPr id="10" name="Shape 8"/>
-          <p:cNvSpPr/>
-          <p:nvPr/>
-        </p:nvSpPr>
-        <p:spPr>
-          <a:xfrm>
-            <a:off x="548640" y="3794760"/>
-            <a:ext cx="11094415" cy="868680"/>
-          </a:xfrm>
-          <a:prstGeom prst="roundRect">
-            <a:avLst>
-              <a:gd name="adj" fmla="val 8421"/>
-            </a:avLst>
-          </a:prstGeom>
-          <a:solidFill>
-            <a:srgbClr val="0E3A44"/>
+            <a:srgbClr val="2E2350"/>
           </a:solidFill>
           <a:ln w="12700">
             <a:solidFill>
-              <a:srgbClr val="06B6D4"/>
+              <a:srgbClr val="8B5CF6"/>
             </a:solidFill>
             <a:prstDash val="solid"/>
           </a:ln>
@@ -6843,119 +7123,14 @@
       </p:sp>
       <p:sp>
         <p:nvSpPr>
-          <p:cNvPr id="11" name="Text 9"/>
-          <p:cNvSpPr/>
-          <p:nvPr/>
-        </p:nvSpPr>
-        <p:spPr>
-          <a:xfrm>
-            <a:off x="868680" y="3794760"/>
-            <a:ext cx="6656649" cy="868680"/>
-          </a:xfrm>
-          <a:prstGeom prst="rect">
-            <a:avLst/>
-          </a:prstGeom>
-          <a:noFill/>
-          <a:ln/>
-        </p:spPr>
-        <p:txBody>
-          <a:bodyPr wrap="square" lIns="0" tIns="0" rIns="0" bIns="0" rtlCol="0" anchor="ctr"/>
-          <a:lstStyle/>
-          <a:p>
-            <a:pPr indent="0" marL="0">
-              <a:buNone/>
-            </a:pPr>
-            <a:r>
-              <a:rPr lang="en-US" sz="1500" dirty="0">
-                <a:solidFill>
-                  <a:srgbClr val="F8FAFC"/>
-                </a:solidFill>
-                <a:latin typeface="Calibri" pitchFamily="34" charset="0"/>
-                <a:ea typeface="Calibri" pitchFamily="34" charset="-122"/>
-                <a:cs typeface="Calibri" pitchFamily="34" charset="-120"/>
-              </a:rPr>
-              <a:t>eᵅˣcos βx  o  eᵅˣsin βx</a:t>
-            </a:r>
-            <a:endParaRPr lang="en-US" sz="1500" dirty="0"/>
-          </a:p>
-        </p:txBody>
-      </p:sp>
-      <p:sp>
-        <p:nvSpPr>
-          <p:cNvPr id="12" name="Text 10"/>
-          <p:cNvSpPr/>
-          <p:nvPr/>
-        </p:nvSpPr>
-        <p:spPr>
-          <a:xfrm>
-            <a:off x="7205289" y="3794760"/>
-            <a:ext cx="4117726" cy="868680"/>
-          </a:xfrm>
-          <a:prstGeom prst="rect">
-            <a:avLst/>
-          </a:prstGeom>
-          <a:noFill/>
-          <a:ln/>
-        </p:spPr>
-        <p:txBody>
-          <a:bodyPr wrap="square" lIns="0" tIns="0" rIns="0" bIns="0" rtlCol="0" anchor="ctr"/>
-          <a:lstStyle/>
-          <a:p>
-            <a:pPr algn="r" indent="0" marL="0">
-              <a:buNone/>
-            </a:pPr>
-            <a:r>
-              <a:rPr lang="en-US" sz="1900" b="1" dirty="0">
-                <a:solidFill>
-                  <a:srgbClr val="22D3EE"/>
-                </a:solidFill>
-                <a:latin typeface="Calibri" pitchFamily="34" charset="0"/>
-                <a:ea typeface="Calibri" pitchFamily="34" charset="-122"/>
-                <a:cs typeface="Calibri" pitchFamily="34" charset="-120"/>
-              </a:rPr>
-              <a:t>D²−2αD+(α²+β²)</a:t>
-            </a:r>
-            <a:endParaRPr lang="en-US" sz="1900" dirty="0"/>
-          </a:p>
-        </p:txBody>
-      </p:sp>
-      <p:sp>
-        <p:nvSpPr>
-          <p:cNvPr id="13" name="Shape 11"/>
-          <p:cNvSpPr/>
-          <p:nvPr/>
-        </p:nvSpPr>
-        <p:spPr>
-          <a:xfrm>
-            <a:off x="548640" y="4892040"/>
-            <a:ext cx="11094415" cy="960120"/>
-          </a:xfrm>
-          <a:prstGeom prst="roundRect">
-            <a:avLst>
-              <a:gd name="adj" fmla="val 7619"/>
-            </a:avLst>
-          </a:prstGeom>
-          <a:solidFill>
-            <a:srgbClr val="142B1F"/>
-          </a:solidFill>
-          <a:ln w="12700">
-            <a:solidFill>
-              <a:srgbClr val="34D399"/>
-            </a:solidFill>
-            <a:prstDash val="solid"/>
-          </a:ln>
-        </p:spPr>
-      </p:sp>
-      <p:sp>
-        <p:nvSpPr>
-          <p:cNvPr id="14" name="Text 12"/>
-          <p:cNvSpPr/>
-          <p:nvPr/>
-        </p:nvSpPr>
-        <p:spPr>
-          <a:xfrm>
-            <a:off x="777240" y="4892040"/>
-            <a:ext cx="10637215" cy="960120"/>
+          <p:cNvPr id="8" name="Text 5"/>
+          <p:cNvSpPr/>
+          <p:nvPr/>
+        </p:nvSpPr>
+        <p:spPr>
+          <a:xfrm>
+            <a:off x="777240" y="3977640"/>
+            <a:ext cx="10637215" cy="1051560"/>
           </a:xfrm>
           <a:prstGeom prst="rect">
             <a:avLst/>
@@ -6974,23 +7149,23 @@
               <a:buNone/>
             </a:pPr>
             <a:r>
-              <a:rPr lang="en-US" sz="1350" b="1" dirty="0">
-                <a:solidFill>
-                  <a:srgbClr val="34D399"/>
-                </a:solidFill>
-                <a:latin typeface="Calibri" pitchFamily="34" charset="0"/>
-                <a:ea typeface="Calibri" pitchFamily="34" charset="-122"/>
-                <a:cs typeface="Calibri" pitchFamily="34" charset="-120"/>
-              </a:rPr>
-              <a:t>Para una suma de términos, multiplican —componen— los operadores de cada uno. Aquí regresa la superposición para no homogéneas de la Sesión 9: cada anulador se encarga de su propio término.</a:t>
-            </a:r>
-            <a:endParaRPr lang="en-US" sz="1350" dirty="0"/>
-          </a:p>
-        </p:txBody>
-      </p:sp>
-      <p:sp>
-        <p:nvSpPr>
-          <p:cNvPr id="15" name="Text 13"/>
+              <a:rPr lang="en-US" sz="1400" b="1" dirty="0">
+                <a:solidFill>
+                  <a:srgbClr val="A78BFA"/>
+                </a:solidFill>
+                <a:latin typeface="Calibri" pitchFamily="34" charset="0"/>
+                <a:ea typeface="Calibri" pitchFamily="34" charset="-122"/>
+                <a:cs typeface="Calibri" pitchFamily="34" charset="-120"/>
+              </a:rPr>
+              <a:t>El método del anulador convierte ese tanteo en álgebra pura: tratamos D=d/dx como un símbolo algebraico, y buscamos un operador que ANIQUILE —convierta en cero— la función g(x) del lado derecho.</a:t>
+            </a:r>
+            <a:endParaRPr lang="en-US" sz="1400" dirty="0"/>
+          </a:p>
+        </p:txBody>
+      </p:sp>
+      <p:sp>
+        <p:nvSpPr>
+          <p:cNvPr id="9" name="Text 6"/>
           <p:cNvSpPr/>
           <p:nvPr/>
         </p:nvSpPr>
@@ -7029,7 +7204,7 @@
       </p:sp>
       <p:sp>
         <p:nvSpPr>
-          <p:cNvPr id="16" name="Text 14"/>
+          <p:cNvPr id="10" name="Text 7"/>
           <p:cNvSpPr/>
           <p:nvPr/>
         </p:nvSpPr>
@@ -7494,7 +7669,7 @@
                 <a:ea typeface="Calibri" pitchFamily="34" charset="-122"/>
                 <a:cs typeface="Calibri" pitchFamily="34" charset="-120"/>
               </a:rPr>
-              <a:t>EL ALGORITMO COMPLETO</a:t>
+              <a:t>TRES BLOQUES BÁSICOS</a:t>
             </a:r>
             <a:endParaRPr lang="en-US" sz="1300" dirty="0"/>
           </a:p>
@@ -7533,7 +7708,7 @@
                 <a:ea typeface="Calibri" pitchFamily="34" charset="-122"/>
                 <a:cs typeface="Calibri" pitchFamily="34" charset="-120"/>
               </a:rPr>
-              <a:t>El Algoritmo del Anulador, Paso a Paso</a:t>
+              <a:t>Operadores D y la Tabla de Anuladores</a:t>
             </a:r>
             <a:endParaRPr lang="en-US" sz="2900" dirty="0"/>
           </a:p>
@@ -7547,12 +7722,117 @@
         </p:nvSpPr>
         <p:spPr>
           <a:xfrm>
-            <a:off x="548640" y="1600200"/>
-            <a:ext cx="5387188" cy="1783080"/>
+            <a:off x="548640" y="1691640"/>
+            <a:ext cx="11094415" cy="868680"/>
           </a:xfrm>
           <a:prstGeom prst="roundRect">
             <a:avLst>
-              <a:gd name="adj" fmla="val 5128"/>
+              <a:gd name="adj" fmla="val 8421"/>
+            </a:avLst>
+          </a:prstGeom>
+          <a:solidFill>
+            <a:srgbClr val="0E3A44"/>
+          </a:solidFill>
+          <a:ln w="12700">
+            <a:solidFill>
+              <a:srgbClr val="06B6D4"/>
+            </a:solidFill>
+            <a:prstDash val="solid"/>
+          </a:ln>
+        </p:spPr>
+      </p:sp>
+      <p:sp>
+        <p:nvSpPr>
+          <p:cNvPr id="5" name="Text 3"/>
+          <p:cNvSpPr/>
+          <p:nvPr/>
+        </p:nvSpPr>
+        <p:spPr>
+          <a:xfrm>
+            <a:off x="868680" y="1691640"/>
+            <a:ext cx="6656649" cy="868680"/>
+          </a:xfrm>
+          <a:prstGeom prst="rect">
+            <a:avLst/>
+          </a:prstGeom>
+          <a:noFill/>
+          <a:ln/>
+        </p:spPr>
+        <p:txBody>
+          <a:bodyPr wrap="square" lIns="0" tIns="0" rIns="0" bIns="0" rtlCol="0" anchor="ctr"/>
+          <a:lstStyle/>
+          <a:p>
+            <a:pPr indent="0" marL="0">
+              <a:buNone/>
+            </a:pPr>
+            <a:r>
+              <a:rPr lang="en-US" sz="1500" dirty="0">
+                <a:solidFill>
+                  <a:srgbClr val="F8FAFC"/>
+                </a:solidFill>
+                <a:latin typeface="Calibri" pitchFamily="34" charset="0"/>
+                <a:ea typeface="Calibri" pitchFamily="34" charset="-122"/>
+                <a:cs typeface="Calibri" pitchFamily="34" charset="-120"/>
+              </a:rPr>
+              <a:t>Polinomio de grado k (hasta xᵏ)</a:t>
+            </a:r>
+            <a:endParaRPr lang="en-US" sz="1500" dirty="0"/>
+          </a:p>
+        </p:txBody>
+      </p:sp>
+      <p:sp>
+        <p:nvSpPr>
+          <p:cNvPr id="6" name="Text 4"/>
+          <p:cNvSpPr/>
+          <p:nvPr/>
+        </p:nvSpPr>
+        <p:spPr>
+          <a:xfrm>
+            <a:off x="7205289" y="1691640"/>
+            <a:ext cx="4117726" cy="868680"/>
+          </a:xfrm>
+          <a:prstGeom prst="rect">
+            <a:avLst/>
+          </a:prstGeom>
+          <a:noFill/>
+          <a:ln/>
+        </p:spPr>
+        <p:txBody>
+          <a:bodyPr wrap="square" lIns="0" tIns="0" rIns="0" bIns="0" rtlCol="0" anchor="ctr"/>
+          <a:lstStyle/>
+          <a:p>
+            <a:pPr algn="r" indent="0" marL="0">
+              <a:buNone/>
+            </a:pPr>
+            <a:r>
+              <a:rPr lang="en-US" sz="1900" b="1" dirty="0">
+                <a:solidFill>
+                  <a:srgbClr val="22D3EE"/>
+                </a:solidFill>
+                <a:latin typeface="Calibri" pitchFamily="34" charset="0"/>
+                <a:ea typeface="Calibri" pitchFamily="34" charset="-122"/>
+                <a:cs typeface="Calibri" pitchFamily="34" charset="-120"/>
+              </a:rPr>
+              <a:t>Dᵏ⁺¹</a:t>
+            </a:r>
+            <a:endParaRPr lang="en-US" sz="1900" dirty="0"/>
+          </a:p>
+        </p:txBody>
+      </p:sp>
+      <p:sp>
+        <p:nvSpPr>
+          <p:cNvPr id="7" name="Shape 5"/>
+          <p:cNvSpPr/>
+          <p:nvPr/>
+        </p:nvSpPr>
+        <p:spPr>
+          <a:xfrm>
+            <a:off x="548640" y="2743200"/>
+            <a:ext cx="11094415" cy="868680"/>
+          </a:xfrm>
+          <a:prstGeom prst="roundRect">
+            <a:avLst>
+              <a:gd name="adj" fmla="val 8421"/>
             </a:avLst>
           </a:prstGeom>
           <a:solidFill>
@@ -7563,24 +7843,104 @@
       </p:sp>
       <p:sp>
         <p:nvSpPr>
-          <p:cNvPr id="5" name="Shape 3"/>
-          <p:cNvSpPr/>
-          <p:nvPr/>
-        </p:nvSpPr>
-        <p:spPr>
-          <a:xfrm>
-            <a:off x="777240" y="1783080"/>
-            <a:ext cx="384048" cy="384048"/>
-          </a:xfrm>
-          <a:prstGeom prst="ellipse">
-            <a:avLst/>
+          <p:cNvPr id="8" name="Text 6"/>
+          <p:cNvSpPr/>
+          <p:nvPr/>
+        </p:nvSpPr>
+        <p:spPr>
+          <a:xfrm>
+            <a:off x="868680" y="2743200"/>
+            <a:ext cx="6656649" cy="868680"/>
+          </a:xfrm>
+          <a:prstGeom prst="rect">
+            <a:avLst/>
+          </a:prstGeom>
+          <a:noFill/>
+          <a:ln/>
+        </p:spPr>
+        <p:txBody>
+          <a:bodyPr wrap="square" lIns="0" tIns="0" rIns="0" bIns="0" rtlCol="0" anchor="ctr"/>
+          <a:lstStyle/>
+          <a:p>
+            <a:pPr indent="0" marL="0">
+              <a:buNone/>
+            </a:pPr>
+            <a:r>
+              <a:rPr lang="en-US" sz="1500" dirty="0">
+                <a:solidFill>
+                  <a:srgbClr val="F8FAFC"/>
+                </a:solidFill>
+                <a:latin typeface="Calibri" pitchFamily="34" charset="0"/>
+                <a:ea typeface="Calibri" pitchFamily="34" charset="-122"/>
+                <a:cs typeface="Calibri" pitchFamily="34" charset="-120"/>
+              </a:rPr>
+              <a:t>Exponencial eʳˣ</a:t>
+            </a:r>
+            <a:endParaRPr lang="en-US" sz="1500" dirty="0"/>
+          </a:p>
+        </p:txBody>
+      </p:sp>
+      <p:sp>
+        <p:nvSpPr>
+          <p:cNvPr id="9" name="Text 7"/>
+          <p:cNvSpPr/>
+          <p:nvPr/>
+        </p:nvSpPr>
+        <p:spPr>
+          <a:xfrm>
+            <a:off x="7205289" y="2743200"/>
+            <a:ext cx="4117726" cy="868680"/>
+          </a:xfrm>
+          <a:prstGeom prst="rect">
+            <a:avLst/>
+          </a:prstGeom>
+          <a:noFill/>
+          <a:ln/>
+        </p:spPr>
+        <p:txBody>
+          <a:bodyPr wrap="square" lIns="0" tIns="0" rIns="0" bIns="0" rtlCol="0" anchor="ctr"/>
+          <a:lstStyle/>
+          <a:p>
+            <a:pPr algn="r" indent="0" marL="0">
+              <a:buNone/>
+            </a:pPr>
+            <a:r>
+              <a:rPr lang="en-US" sz="1900" b="1" dirty="0">
+                <a:solidFill>
+                  <a:srgbClr val="22D3EE"/>
+                </a:solidFill>
+                <a:latin typeface="Calibri" pitchFamily="34" charset="0"/>
+                <a:ea typeface="Calibri" pitchFamily="34" charset="-122"/>
+                <a:cs typeface="Calibri" pitchFamily="34" charset="-120"/>
+              </a:rPr>
+              <a:t>(D−r)</a:t>
+            </a:r>
+            <a:endParaRPr lang="en-US" sz="1900" dirty="0"/>
+          </a:p>
+        </p:txBody>
+      </p:sp>
+      <p:sp>
+        <p:nvSpPr>
+          <p:cNvPr id="10" name="Shape 8"/>
+          <p:cNvSpPr/>
+          <p:nvPr/>
+        </p:nvSpPr>
+        <p:spPr>
+          <a:xfrm>
+            <a:off x="548640" y="3794760"/>
+            <a:ext cx="11094415" cy="868680"/>
+          </a:xfrm>
+          <a:prstGeom prst="roundRect">
+            <a:avLst>
+              <a:gd name="adj" fmla="val 8421"/>
+            </a:avLst>
           </a:prstGeom>
           <a:solidFill>
-            <a:srgbClr val="0B0F19"/>
+            <a:srgbClr val="0E3A44"/>
           </a:solidFill>
-          <a:ln w="25400">
+          <a:ln w="12700">
             <a:solidFill>
-              <a:srgbClr val="22D3EE"/>
+              <a:srgbClr val="06B6D4"/>
             </a:solidFill>
             <a:prstDash val="solid"/>
           </a:ln>
@@ -7588,30 +7948,69 @@
       </p:sp>
       <p:sp>
         <p:nvSpPr>
-          <p:cNvPr id="6" name="Text 4"/>
-          <p:cNvSpPr/>
-          <p:nvPr/>
-        </p:nvSpPr>
-        <p:spPr>
-          <a:xfrm>
-            <a:off x="777240" y="1783080"/>
-            <a:ext cx="384048" cy="384048"/>
-          </a:xfrm>
-          <a:prstGeom prst="rect">
-            <a:avLst/>
-          </a:prstGeom>
-          <a:noFill/>
-          <a:ln/>
-        </p:spPr>
-        <p:txBody>
-          <a:bodyPr wrap="square" lIns="0" tIns="0" rIns="0" bIns="0" rtlCol="0" anchor="ctr"/>
-          <a:lstStyle/>
-          <a:p>
-            <a:pPr algn="ctr" indent="0" marL="0">
-              <a:buNone/>
-            </a:pPr>
-            <a:r>
-              <a:rPr lang="en-US" sz="1600" b="1" dirty="0">
+          <p:cNvPr id="11" name="Text 9"/>
+          <p:cNvSpPr/>
+          <p:nvPr/>
+        </p:nvSpPr>
+        <p:spPr>
+          <a:xfrm>
+            <a:off x="868680" y="3794760"/>
+            <a:ext cx="6656649" cy="868680"/>
+          </a:xfrm>
+          <a:prstGeom prst="rect">
+            <a:avLst/>
+          </a:prstGeom>
+          <a:noFill/>
+          <a:ln/>
+        </p:spPr>
+        <p:txBody>
+          <a:bodyPr wrap="square" lIns="0" tIns="0" rIns="0" bIns="0" rtlCol="0" anchor="ctr"/>
+          <a:lstStyle/>
+          <a:p>
+            <a:pPr indent="0" marL="0">
+              <a:buNone/>
+            </a:pPr>
+            <a:r>
+              <a:rPr lang="en-US" sz="1500" dirty="0">
+                <a:solidFill>
+                  <a:srgbClr val="F8FAFC"/>
+                </a:solidFill>
+                <a:latin typeface="Calibri" pitchFamily="34" charset="0"/>
+                <a:ea typeface="Calibri" pitchFamily="34" charset="-122"/>
+                <a:cs typeface="Calibri" pitchFamily="34" charset="-120"/>
+              </a:rPr>
+              <a:t>eᵅˣcos βx  o  eᵅˣsin βx</a:t>
+            </a:r>
+            <a:endParaRPr lang="en-US" sz="1500" dirty="0"/>
+          </a:p>
+        </p:txBody>
+      </p:sp>
+      <p:sp>
+        <p:nvSpPr>
+          <p:cNvPr id="12" name="Text 10"/>
+          <p:cNvSpPr/>
+          <p:nvPr/>
+        </p:nvSpPr>
+        <p:spPr>
+          <a:xfrm>
+            <a:off x="7205289" y="3794760"/>
+            <a:ext cx="4117726" cy="868680"/>
+          </a:xfrm>
+          <a:prstGeom prst="rect">
+            <a:avLst/>
+          </a:prstGeom>
+          <a:noFill/>
+          <a:ln/>
+        </p:spPr>
+        <p:txBody>
+          <a:bodyPr wrap="square" lIns="0" tIns="0" rIns="0" bIns="0" rtlCol="0" anchor="ctr"/>
+          <a:lstStyle/>
+          <a:p>
+            <a:pPr algn="r" indent="0" marL="0">
+              <a:buNone/>
+            </a:pPr>
+            <a:r>
+              <a:rPr lang="en-US" sz="1900" b="1" dirty="0">
                 <a:solidFill>
                   <a:srgbClr val="22D3EE"/>
                 </a:solidFill>
@@ -7619,138 +8018,34 @@
                 <a:ea typeface="Calibri" pitchFamily="34" charset="-122"/>
                 <a:cs typeface="Calibri" pitchFamily="34" charset="-120"/>
               </a:rPr>
-              <a:t>1</a:t>
-            </a:r>
-            <a:endParaRPr lang="en-US" sz="1600" dirty="0"/>
-          </a:p>
-        </p:txBody>
-      </p:sp>
-      <p:sp>
-        <p:nvSpPr>
-          <p:cNvPr id="7" name="Text 5"/>
-          <p:cNvSpPr/>
-          <p:nvPr/>
-        </p:nvSpPr>
-        <p:spPr>
-          <a:xfrm>
-            <a:off x="1325880" y="1783080"/>
-            <a:ext cx="4381348" cy="502920"/>
-          </a:xfrm>
-          <a:prstGeom prst="rect">
-            <a:avLst/>
-          </a:prstGeom>
-          <a:noFill/>
-          <a:ln/>
-        </p:spPr>
-        <p:txBody>
-          <a:bodyPr wrap="square" lIns="0" tIns="0" rIns="0" bIns="0" rtlCol="0" anchor="ctr"/>
-          <a:lstStyle/>
-          <a:p>
-            <a:pPr indent="0" marL="0">
-              <a:lnSpc>
-                <a:spcPct val="105000"/>
-              </a:lnSpc>
-              <a:buNone/>
-            </a:pPr>
-            <a:r>
-              <a:rPr lang="en-US" sz="1500" b="1" dirty="0">
-                <a:solidFill>
-                  <a:srgbClr val="F8FAFC"/>
-                </a:solidFill>
-                <a:latin typeface="Calibri" pitchFamily="34" charset="0"/>
-                <a:ea typeface="Calibri" pitchFamily="34" charset="-122"/>
-                <a:cs typeface="Calibri" pitchFamily="34" charset="-120"/>
-              </a:rPr>
-              <a:t>Encuentren yᶜ</a:t>
-            </a:r>
-            <a:endParaRPr lang="en-US" sz="1500" dirty="0"/>
-          </a:p>
-        </p:txBody>
-      </p:sp>
-      <p:sp>
-        <p:nvSpPr>
-          <p:cNvPr id="8" name="Text 6"/>
-          <p:cNvSpPr/>
-          <p:nvPr/>
-        </p:nvSpPr>
-        <p:spPr>
-          <a:xfrm>
-            <a:off x="822960" y="2468880"/>
-            <a:ext cx="4838548" cy="731520"/>
-          </a:xfrm>
-          <a:prstGeom prst="rect">
-            <a:avLst/>
-          </a:prstGeom>
-          <a:noFill/>
-          <a:ln/>
-        </p:spPr>
-        <p:txBody>
-          <a:bodyPr wrap="square" lIns="0" tIns="0" rIns="0" bIns="0" rtlCol="0" anchor="t"/>
-          <a:lstStyle/>
-          <a:p>
-            <a:pPr algn="l" indent="0" marL="0">
-              <a:lnSpc>
-                <a:spcPct val="112000"/>
-              </a:lnSpc>
-              <a:buNone/>
-            </a:pPr>
-            <a:r>
-              <a:rPr lang="en-US" sz="1250" dirty="0">
-                <a:solidFill>
-                  <a:srgbClr val="CBD5E1"/>
-                </a:solidFill>
-                <a:latin typeface="Calibri" pitchFamily="34" charset="0"/>
-                <a:ea typeface="Calibri" pitchFamily="34" charset="-122"/>
-                <a:cs typeface="Calibri" pitchFamily="34" charset="-120"/>
-              </a:rPr>
-              <a:t>La solución de la homogénea asociada — ya saben hacerlo.</a:t>
-            </a:r>
-            <a:endParaRPr lang="en-US" sz="1250" dirty="0"/>
-          </a:p>
-        </p:txBody>
-      </p:sp>
-      <p:sp>
-        <p:nvSpPr>
-          <p:cNvPr id="9" name="Shape 7"/>
-          <p:cNvSpPr/>
-          <p:nvPr/>
-        </p:nvSpPr>
-        <p:spPr>
-          <a:xfrm>
-            <a:off x="6255868" y="1600200"/>
-            <a:ext cx="5387188" cy="1783080"/>
+              <a:t>D²−2αD+(α²+β²)</a:t>
+            </a:r>
+            <a:endParaRPr lang="en-US" sz="1900" dirty="0"/>
+          </a:p>
+        </p:txBody>
+      </p:sp>
+      <p:sp>
+        <p:nvSpPr>
+          <p:cNvPr id="13" name="Shape 11"/>
+          <p:cNvSpPr/>
+          <p:nvPr/>
+        </p:nvSpPr>
+        <p:spPr>
+          <a:xfrm>
+            <a:off x="548640" y="4892040"/>
+            <a:ext cx="11094415" cy="960120"/>
           </a:xfrm>
           <a:prstGeom prst="roundRect">
             <a:avLst>
-              <a:gd name="adj" fmla="val 5128"/>
+              <a:gd name="adj" fmla="val 7619"/>
             </a:avLst>
           </a:prstGeom>
           <a:solidFill>
-            <a:srgbClr val="1E293B"/>
+            <a:srgbClr val="142B1F"/>
           </a:solidFill>
-          <a:ln/>
-        </p:spPr>
-      </p:sp>
-      <p:sp>
-        <p:nvSpPr>
-          <p:cNvPr id="10" name="Shape 8"/>
-          <p:cNvSpPr/>
-          <p:nvPr/>
-        </p:nvSpPr>
-        <p:spPr>
-          <a:xfrm>
-            <a:off x="6484468" y="1783080"/>
-            <a:ext cx="384048" cy="384048"/>
-          </a:xfrm>
-          <a:prstGeom prst="ellipse">
-            <a:avLst/>
-          </a:prstGeom>
-          <a:solidFill>
-            <a:srgbClr val="0B0F19"/>
-          </a:solidFill>
-          <a:ln w="25400">
+          <a:ln w="12700">
             <a:solidFill>
-              <a:srgbClr val="22D3EE"/>
+              <a:srgbClr val="34D399"/>
             </a:solidFill>
             <a:prstDash val="solid"/>
           </a:ln>
@@ -7758,470 +8053,49 @@
       </p:sp>
       <p:sp>
         <p:nvSpPr>
-          <p:cNvPr id="11" name="Text 9"/>
-          <p:cNvSpPr/>
-          <p:nvPr/>
-        </p:nvSpPr>
-        <p:spPr>
-          <a:xfrm>
-            <a:off x="6484468" y="1783080"/>
-            <a:ext cx="384048" cy="384048"/>
-          </a:xfrm>
-          <a:prstGeom prst="rect">
-            <a:avLst/>
-          </a:prstGeom>
-          <a:noFill/>
-          <a:ln/>
-        </p:spPr>
-        <p:txBody>
-          <a:bodyPr wrap="square" lIns="0" tIns="0" rIns="0" bIns="0" rtlCol="0" anchor="ctr"/>
-          <a:lstStyle/>
-          <a:p>
-            <a:pPr algn="ctr" indent="0" marL="0">
-              <a:buNone/>
-            </a:pPr>
-            <a:r>
-              <a:rPr lang="en-US" sz="1600" b="1" dirty="0">
-                <a:solidFill>
-                  <a:srgbClr val="22D3EE"/>
-                </a:solidFill>
-                <a:latin typeface="Calibri" pitchFamily="34" charset="0"/>
-                <a:ea typeface="Calibri" pitchFamily="34" charset="-122"/>
-                <a:cs typeface="Calibri" pitchFamily="34" charset="-120"/>
-              </a:rPr>
-              <a:t>2</a:t>
-            </a:r>
-            <a:endParaRPr lang="en-US" sz="1600" dirty="0"/>
-          </a:p>
-        </p:txBody>
-      </p:sp>
-      <p:sp>
-        <p:nvSpPr>
-          <p:cNvPr id="12" name="Text 10"/>
-          <p:cNvSpPr/>
-          <p:nvPr/>
-        </p:nvSpPr>
-        <p:spPr>
-          <a:xfrm>
-            <a:off x="7033108" y="1783080"/>
-            <a:ext cx="4381348" cy="502920"/>
-          </a:xfrm>
-          <a:prstGeom prst="rect">
-            <a:avLst/>
-          </a:prstGeom>
-          <a:noFill/>
-          <a:ln/>
-        </p:spPr>
-        <p:txBody>
-          <a:bodyPr wrap="square" lIns="0" tIns="0" rIns="0" bIns="0" rtlCol="0" anchor="ctr"/>
-          <a:lstStyle/>
-          <a:p>
-            <a:pPr indent="0" marL="0">
-              <a:lnSpc>
-                <a:spcPct val="105000"/>
-              </a:lnSpc>
-              <a:buNone/>
-            </a:pPr>
-            <a:r>
-              <a:rPr lang="en-US" sz="1500" b="1" dirty="0">
-                <a:solidFill>
-                  <a:srgbClr val="F8FAFC"/>
-                </a:solidFill>
-                <a:latin typeface="Calibri" pitchFamily="34" charset="0"/>
-                <a:ea typeface="Calibri" pitchFamily="34" charset="-122"/>
-                <a:cs typeface="Calibri" pitchFamily="34" charset="-120"/>
-              </a:rPr>
-              <a:t>Anulen g(x)</a:t>
-            </a:r>
-            <a:endParaRPr lang="en-US" sz="1500" dirty="0"/>
-          </a:p>
-        </p:txBody>
-      </p:sp>
-      <p:sp>
-        <p:nvSpPr>
-          <p:cNvPr id="13" name="Text 11"/>
-          <p:cNvSpPr/>
-          <p:nvPr/>
-        </p:nvSpPr>
-        <p:spPr>
-          <a:xfrm>
-            <a:off x="6530188" y="2468880"/>
-            <a:ext cx="4838548" cy="731520"/>
-          </a:xfrm>
-          <a:prstGeom prst="rect">
-            <a:avLst/>
-          </a:prstGeom>
-          <a:noFill/>
-          <a:ln/>
-        </p:spPr>
-        <p:txBody>
-          <a:bodyPr wrap="square" lIns="0" tIns="0" rIns="0" bIns="0" rtlCol="0" anchor="t"/>
+          <p:cNvPr id="14" name="Text 12"/>
+          <p:cNvSpPr/>
+          <p:nvPr/>
+        </p:nvSpPr>
+        <p:spPr>
+          <a:xfrm>
+            <a:off x="777240" y="4892040"/>
+            <a:ext cx="10637215" cy="960120"/>
+          </a:xfrm>
+          <a:prstGeom prst="rect">
+            <a:avLst/>
+          </a:prstGeom>
+          <a:noFill/>
+          <a:ln/>
+        </p:spPr>
+        <p:txBody>
+          <a:bodyPr wrap="square" lIns="0" tIns="0" rIns="0" bIns="0" rtlCol="0" anchor="ctr"/>
           <a:lstStyle/>
           <a:p>
             <a:pPr algn="l" indent="0" marL="0">
               <a:lnSpc>
-                <a:spcPct val="112000"/>
+                <a:spcPct val="115000"/>
               </a:lnSpc>
               <a:buNone/>
             </a:pPr>
             <a:r>
-              <a:rPr lang="en-US" sz="1250" dirty="0">
-                <a:solidFill>
-                  <a:srgbClr val="CBD5E1"/>
-                </a:solidFill>
-                <a:latin typeface="Calibri" pitchFamily="34" charset="0"/>
-                <a:ea typeface="Calibri" pitchFamily="34" charset="-122"/>
-                <a:cs typeface="Calibri" pitchFamily="34" charset="-120"/>
-              </a:rPr>
-              <a:t>Encuentren un operador anulador y apliquenlo a AMBOS lados de la ecuación completa.</a:t>
-            </a:r>
-            <a:endParaRPr lang="en-US" sz="1250" dirty="0"/>
-          </a:p>
-        </p:txBody>
-      </p:sp>
-      <p:sp>
-        <p:nvSpPr>
-          <p:cNvPr id="14" name="Shape 12"/>
-          <p:cNvSpPr/>
-          <p:nvPr/>
-        </p:nvSpPr>
-        <p:spPr>
-          <a:xfrm>
-            <a:off x="548640" y="3657600"/>
-            <a:ext cx="5387188" cy="1783080"/>
-          </a:xfrm>
-          <a:prstGeom prst="roundRect">
-            <a:avLst>
-              <a:gd name="adj" fmla="val 5128"/>
-            </a:avLst>
-          </a:prstGeom>
-          <a:solidFill>
-            <a:srgbClr val="1E293B"/>
-          </a:solidFill>
-          <a:ln/>
-        </p:spPr>
-      </p:sp>
-      <p:sp>
-        <p:nvSpPr>
-          <p:cNvPr id="15" name="Shape 13"/>
-          <p:cNvSpPr/>
-          <p:nvPr/>
-        </p:nvSpPr>
-        <p:spPr>
-          <a:xfrm>
-            <a:off x="777240" y="3840480"/>
-            <a:ext cx="384048" cy="384048"/>
-          </a:xfrm>
-          <a:prstGeom prst="ellipse">
-            <a:avLst/>
-          </a:prstGeom>
-          <a:solidFill>
-            <a:srgbClr val="0B0F19"/>
-          </a:solidFill>
-          <a:ln w="25400">
-            <a:solidFill>
-              <a:srgbClr val="22D3EE"/>
-            </a:solidFill>
-            <a:prstDash val="solid"/>
-          </a:ln>
-        </p:spPr>
-      </p:sp>
-      <p:sp>
-        <p:nvSpPr>
-          <p:cNvPr id="16" name="Text 14"/>
-          <p:cNvSpPr/>
-          <p:nvPr/>
-        </p:nvSpPr>
-        <p:spPr>
-          <a:xfrm>
-            <a:off x="777240" y="3840480"/>
-            <a:ext cx="384048" cy="384048"/>
-          </a:xfrm>
-          <a:prstGeom prst="rect">
-            <a:avLst/>
-          </a:prstGeom>
-          <a:noFill/>
-          <a:ln/>
-        </p:spPr>
-        <p:txBody>
-          <a:bodyPr wrap="square" lIns="0" tIns="0" rIns="0" bIns="0" rtlCol="0" anchor="ctr"/>
-          <a:lstStyle/>
-          <a:p>
-            <a:pPr algn="ctr" indent="0" marL="0">
-              <a:buNone/>
-            </a:pPr>
-            <a:r>
-              <a:rPr lang="en-US" sz="1600" b="1" dirty="0">
-                <a:solidFill>
-                  <a:srgbClr val="22D3EE"/>
-                </a:solidFill>
-                <a:latin typeface="Calibri" pitchFamily="34" charset="0"/>
-                <a:ea typeface="Calibri" pitchFamily="34" charset="-122"/>
-                <a:cs typeface="Calibri" pitchFamily="34" charset="-120"/>
-              </a:rPr>
-              <a:t>3</a:t>
-            </a:r>
-            <a:endParaRPr lang="en-US" sz="1600" dirty="0"/>
-          </a:p>
-        </p:txBody>
-      </p:sp>
-      <p:sp>
-        <p:nvSpPr>
-          <p:cNvPr id="17" name="Text 15"/>
-          <p:cNvSpPr/>
-          <p:nvPr/>
-        </p:nvSpPr>
-        <p:spPr>
-          <a:xfrm>
-            <a:off x="1325880" y="3840480"/>
-            <a:ext cx="4381348" cy="502920"/>
-          </a:xfrm>
-          <a:prstGeom prst="rect">
-            <a:avLst/>
-          </a:prstGeom>
-          <a:noFill/>
-          <a:ln/>
-        </p:spPr>
-        <p:txBody>
-          <a:bodyPr wrap="square" lIns="0" tIns="0" rIns="0" bIns="0" rtlCol="0" anchor="ctr"/>
-          <a:lstStyle/>
-          <a:p>
-            <a:pPr indent="0" marL="0">
-              <a:lnSpc>
-                <a:spcPct val="105000"/>
-              </a:lnSpc>
-              <a:buNone/>
-            </a:pPr>
-            <a:r>
-              <a:rPr lang="en-US" sz="1500" b="1" dirty="0">
-                <a:solidFill>
-                  <a:srgbClr val="F8FAFC"/>
-                </a:solidFill>
-                <a:latin typeface="Calibri" pitchFamily="34" charset="0"/>
-                <a:ea typeface="Calibri" pitchFamily="34" charset="-122"/>
-                <a:cs typeface="Calibri" pitchFamily="34" charset="-120"/>
-              </a:rPr>
-              <a:t>Resuelvan y eliminen</a:t>
-            </a:r>
-            <a:endParaRPr lang="en-US" sz="1500" dirty="0"/>
-          </a:p>
-        </p:txBody>
-      </p:sp>
-      <p:sp>
-        <p:nvSpPr>
-          <p:cNvPr id="18" name="Text 16"/>
-          <p:cNvSpPr/>
-          <p:nvPr/>
-        </p:nvSpPr>
-        <p:spPr>
-          <a:xfrm>
-            <a:off x="822960" y="4526280"/>
-            <a:ext cx="4838548" cy="731520"/>
-          </a:xfrm>
-          <a:prstGeom prst="rect">
-            <a:avLst/>
-          </a:prstGeom>
-          <a:noFill/>
-          <a:ln/>
-        </p:spPr>
-        <p:txBody>
-          <a:bodyPr wrap="square" lIns="0" tIns="0" rIns="0" bIns="0" rtlCol="0" anchor="t"/>
-          <a:lstStyle/>
-          <a:p>
-            <a:pPr algn="l" indent="0" marL="0">
-              <a:lnSpc>
-                <a:spcPct val="112000"/>
-              </a:lnSpc>
-              <a:buNone/>
-            </a:pPr>
-            <a:r>
-              <a:rPr lang="en-US" sz="1250" dirty="0">
-                <a:solidFill>
-                  <a:srgbClr val="CBD5E1"/>
-                </a:solidFill>
-                <a:latin typeface="Calibri" pitchFamily="34" charset="0"/>
-                <a:ea typeface="Calibri" pitchFamily="34" charset="-122"/>
-                <a:cs typeface="Calibri" pitchFamily="34" charset="-120"/>
-              </a:rPr>
-              <a:t>Resuelvan la ecuación de orden mayor; eliminen los términos que ya están en yᶜ.</a:t>
-            </a:r>
-            <a:endParaRPr lang="en-US" sz="1250" dirty="0"/>
-          </a:p>
-        </p:txBody>
-      </p:sp>
-      <p:sp>
-        <p:nvSpPr>
-          <p:cNvPr id="19" name="Shape 17"/>
-          <p:cNvSpPr/>
-          <p:nvPr/>
-        </p:nvSpPr>
-        <p:spPr>
-          <a:xfrm>
-            <a:off x="6255868" y="3657600"/>
-            <a:ext cx="5387188" cy="1783080"/>
-          </a:xfrm>
-          <a:prstGeom prst="roundRect">
-            <a:avLst>
-              <a:gd name="adj" fmla="val 5128"/>
-            </a:avLst>
-          </a:prstGeom>
-          <a:solidFill>
-            <a:srgbClr val="1E293B"/>
-          </a:solidFill>
-          <a:ln/>
-        </p:spPr>
-      </p:sp>
-      <p:sp>
-        <p:nvSpPr>
-          <p:cNvPr id="20" name="Shape 18"/>
-          <p:cNvSpPr/>
-          <p:nvPr/>
-        </p:nvSpPr>
-        <p:spPr>
-          <a:xfrm>
-            <a:off x="6484468" y="3840480"/>
-            <a:ext cx="384048" cy="384048"/>
-          </a:xfrm>
-          <a:prstGeom prst="ellipse">
-            <a:avLst/>
-          </a:prstGeom>
-          <a:solidFill>
-            <a:srgbClr val="0B0F19"/>
-          </a:solidFill>
-          <a:ln w="25400">
-            <a:solidFill>
-              <a:srgbClr val="22D3EE"/>
-            </a:solidFill>
-            <a:prstDash val="solid"/>
-          </a:ln>
-        </p:spPr>
-      </p:sp>
-      <p:sp>
-        <p:nvSpPr>
-          <p:cNvPr id="21" name="Text 19"/>
-          <p:cNvSpPr/>
-          <p:nvPr/>
-        </p:nvSpPr>
-        <p:spPr>
-          <a:xfrm>
-            <a:off x="6484468" y="3840480"/>
-            <a:ext cx="384048" cy="384048"/>
-          </a:xfrm>
-          <a:prstGeom prst="rect">
-            <a:avLst/>
-          </a:prstGeom>
-          <a:noFill/>
-          <a:ln/>
-        </p:spPr>
-        <p:txBody>
-          <a:bodyPr wrap="square" lIns="0" tIns="0" rIns="0" bIns="0" rtlCol="0" anchor="ctr"/>
-          <a:lstStyle/>
-          <a:p>
-            <a:pPr algn="ctr" indent="0" marL="0">
-              <a:buNone/>
-            </a:pPr>
-            <a:r>
-              <a:rPr lang="en-US" sz="1600" b="1" dirty="0">
-                <a:solidFill>
-                  <a:srgbClr val="22D3EE"/>
-                </a:solidFill>
-                <a:latin typeface="Calibri" pitchFamily="34" charset="0"/>
-                <a:ea typeface="Calibri" pitchFamily="34" charset="-122"/>
-                <a:cs typeface="Calibri" pitchFamily="34" charset="-120"/>
-              </a:rPr>
-              <a:t>4</a:t>
-            </a:r>
-            <a:endParaRPr lang="en-US" sz="1600" dirty="0"/>
-          </a:p>
-        </p:txBody>
-      </p:sp>
-      <p:sp>
-        <p:nvSpPr>
-          <p:cNvPr id="22" name="Text 20"/>
-          <p:cNvSpPr/>
-          <p:nvPr/>
-        </p:nvSpPr>
-        <p:spPr>
-          <a:xfrm>
-            <a:off x="7033108" y="3840480"/>
-            <a:ext cx="4381348" cy="502920"/>
-          </a:xfrm>
-          <a:prstGeom prst="rect">
-            <a:avLst/>
-          </a:prstGeom>
-          <a:noFill/>
-          <a:ln/>
-        </p:spPr>
-        <p:txBody>
-          <a:bodyPr wrap="square" lIns="0" tIns="0" rIns="0" bIns="0" rtlCol="0" anchor="ctr"/>
-          <a:lstStyle/>
-          <a:p>
-            <a:pPr indent="0" marL="0">
-              <a:lnSpc>
-                <a:spcPct val="105000"/>
-              </a:lnSpc>
-              <a:buNone/>
-            </a:pPr>
-            <a:r>
-              <a:rPr lang="en-US" sz="1500" b="1" dirty="0">
-                <a:solidFill>
-                  <a:srgbClr val="F8FAFC"/>
-                </a:solidFill>
-                <a:latin typeface="Calibri" pitchFamily="34" charset="0"/>
-                <a:ea typeface="Calibri" pitchFamily="34" charset="-122"/>
-                <a:cs typeface="Calibri" pitchFamily="34" charset="-120"/>
-              </a:rPr>
-              <a:t>Sustituyan y despejen</a:t>
-            </a:r>
-            <a:endParaRPr lang="en-US" sz="1500" dirty="0"/>
-          </a:p>
-        </p:txBody>
-      </p:sp>
-      <p:sp>
-        <p:nvSpPr>
-          <p:cNvPr id="23" name="Text 21"/>
-          <p:cNvSpPr/>
-          <p:nvPr/>
-        </p:nvSpPr>
-        <p:spPr>
-          <a:xfrm>
-            <a:off x="6530188" y="4526280"/>
-            <a:ext cx="4838548" cy="731520"/>
-          </a:xfrm>
-          <a:prstGeom prst="rect">
-            <a:avLst/>
-          </a:prstGeom>
-          <a:noFill/>
-          <a:ln/>
-        </p:spPr>
-        <p:txBody>
-          <a:bodyPr wrap="square" lIns="0" tIns="0" rIns="0" bIns="0" rtlCol="0" anchor="t"/>
-          <a:lstStyle/>
-          <a:p>
-            <a:pPr algn="l" indent="0" marL="0">
-              <a:lnSpc>
-                <a:spcPct val="112000"/>
-              </a:lnSpc>
-              <a:buNone/>
-            </a:pPr>
-            <a:r>
-              <a:rPr lang="en-US" sz="1250" dirty="0">
-                <a:solidFill>
-                  <a:srgbClr val="CBD5E1"/>
-                </a:solidFill>
-                <a:latin typeface="Calibri" pitchFamily="34" charset="0"/>
-                <a:ea typeface="Calibri" pitchFamily="34" charset="-122"/>
-                <a:cs typeface="Calibri" pitchFamily="34" charset="-120"/>
-              </a:rPr>
-              <a:t>Sustituyan la forma restante (yₚ) en la ecuación ORIGINAL para hallar los coeficientes.</a:t>
-            </a:r>
-            <a:endParaRPr lang="en-US" sz="1250" dirty="0"/>
-          </a:p>
-        </p:txBody>
-      </p:sp>
-      <p:sp>
-        <p:nvSpPr>
-          <p:cNvPr id="24" name="Text 22"/>
+              <a:rPr lang="en-US" sz="1350" b="1" dirty="0">
+                <a:solidFill>
+                  <a:srgbClr val="34D399"/>
+                </a:solidFill>
+                <a:latin typeface="Calibri" pitchFamily="34" charset="0"/>
+                <a:ea typeface="Calibri" pitchFamily="34" charset="-122"/>
+                <a:cs typeface="Calibri" pitchFamily="34" charset="-120"/>
+              </a:rPr>
+              <a:t>Para una suma de términos, multiplican —componen— los operadores de cada uno. Aquí regresa la superposición para no homogéneas de la Sesión 9: cada anulador se encarga de su propio término.</a:t>
+            </a:r>
+            <a:endParaRPr lang="en-US" sz="1350" dirty="0"/>
+          </a:p>
+        </p:txBody>
+      </p:sp>
+      <p:sp>
+        <p:nvSpPr>
+          <p:cNvPr id="15" name="Text 13"/>
           <p:cNvSpPr/>
           <p:nvPr/>
         </p:nvSpPr>
@@ -8260,7 +8134,7 @@
       </p:sp>
       <p:sp>
         <p:nvSpPr>
-          <p:cNvPr id="25" name="Text 23"/>
+          <p:cNvPr id="16" name="Text 14"/>
           <p:cNvSpPr/>
           <p:nvPr/>
         </p:nvSpPr>
@@ -8362,7 +8236,7 @@
                 <a:ea typeface="Calibri" pitchFamily="34" charset="-122"/>
                 <a:cs typeface="Calibri" pitchFamily="34" charset="-120"/>
               </a:rPr>
-              <a:t>PIZARRÓN</a:t>
+              <a:t>EL ALGORITMO COMPLETO</a:t>
             </a:r>
             <a:endParaRPr lang="en-US" sz="1300" dirty="0"/>
           </a:p>
@@ -8401,7 +8275,7 @@
                 <a:ea typeface="Calibri" pitchFamily="34" charset="-122"/>
                 <a:cs typeface="Calibri" pitchFamily="34" charset="-120"/>
               </a:rPr>
-              <a:t>Ejemplo — Anulador (Planteamiento)</a:t>
+              <a:t>El Algoritmo del Anulador, Paso a Paso</a:t>
             </a:r>
             <a:endParaRPr lang="en-US" sz="2900" dirty="0"/>
           </a:p>
@@ -8415,197 +8289,136 @@
         </p:nvSpPr>
         <p:spPr>
           <a:xfrm>
-            <a:off x="548640" y="1691640"/>
-            <a:ext cx="11094415" cy="1188720"/>
+            <a:off x="548640" y="1600200"/>
+            <a:ext cx="5387188" cy="1783080"/>
           </a:xfrm>
           <a:prstGeom prst="roundRect">
             <a:avLst>
-              <a:gd name="adj" fmla="val 6154"/>
+              <a:gd name="adj" fmla="val 5128"/>
             </a:avLst>
           </a:prstGeom>
           <a:solidFill>
-            <a:srgbClr val="0E3A44"/>
+            <a:srgbClr val="1E293B"/>
           </a:solidFill>
-          <a:ln w="12700">
+          <a:ln/>
+        </p:spPr>
+      </p:sp>
+      <p:sp>
+        <p:nvSpPr>
+          <p:cNvPr id="5" name="Shape 3"/>
+          <p:cNvSpPr/>
+          <p:nvPr/>
+        </p:nvSpPr>
+        <p:spPr>
+          <a:xfrm>
+            <a:off x="777240" y="1783080"/>
+            <a:ext cx="384048" cy="384048"/>
+          </a:xfrm>
+          <a:prstGeom prst="ellipse">
+            <a:avLst/>
+          </a:prstGeom>
+          <a:solidFill>
+            <a:srgbClr val="0B0F19"/>
+          </a:solidFill>
+          <a:ln w="25400">
             <a:solidFill>
-              <a:srgbClr val="06B6D4"/>
+              <a:srgbClr val="22D3EE"/>
             </a:solidFill>
             <a:prstDash val="solid"/>
           </a:ln>
         </p:spPr>
       </p:sp>
-      <p:pic>
-        <p:nvPicPr>
-          <p:cNvPr id="5" name="Image 0" descr="build/eq/an_setup.png">    </p:cNvPr>
-          <p:cNvPicPr>
-            <a:picLocks noChangeAspect="1"/>
-          </p:cNvPicPr>
-          <p:nvPr/>
-        </p:nvPicPr>
-        <p:blipFill>
-          <a:blip r:embed="rId1"/>
-          <a:stretch>
-            <a:fillRect/>
-          </a:stretch>
-        </p:blipFill>
-        <p:spPr>
-          <a:xfrm>
-            <a:off x="3278262" y="1828800"/>
-            <a:ext cx="5635171" cy="914400"/>
-          </a:xfrm>
-          <a:prstGeom prst="rect">
-            <a:avLst/>
-          </a:prstGeom>
-        </p:spPr>
-      </p:pic>
-      <p:sp>
-        <p:nvSpPr>
-          <p:cNvPr id="6" name="Shape 3"/>
-          <p:cNvSpPr/>
-          <p:nvPr/>
-        </p:nvSpPr>
-        <p:spPr>
-          <a:xfrm>
-            <a:off x="548640" y="3063240"/>
-            <a:ext cx="11094415" cy="777240"/>
-          </a:xfrm>
-          <a:prstGeom prst="roundRect">
-            <a:avLst>
-              <a:gd name="adj" fmla="val 9412"/>
-            </a:avLst>
-          </a:prstGeom>
-          <a:solidFill>
-            <a:srgbClr val="3A2A0E"/>
-          </a:solidFill>
-          <a:ln w="12700">
-            <a:solidFill>
-              <a:srgbClr val="F59E0B"/>
-            </a:solidFill>
-            <a:prstDash val="solid"/>
-          </a:ln>
-        </p:spPr>
-      </p:sp>
-      <p:sp>
-        <p:nvSpPr>
-          <p:cNvPr id="7" name="Text 4"/>
-          <p:cNvSpPr/>
-          <p:nvPr/>
-        </p:nvSpPr>
-        <p:spPr>
-          <a:xfrm>
-            <a:off x="777240" y="3063240"/>
-            <a:ext cx="10637215" cy="777240"/>
-          </a:xfrm>
-          <a:prstGeom prst="rect">
-            <a:avLst/>
-          </a:prstGeom>
-          <a:noFill/>
-          <a:ln/>
-        </p:spPr>
-        <p:txBody>
-          <a:bodyPr wrap="square" lIns="0" tIns="0" rIns="0" bIns="0" rtlCol="0" anchor="ctr"/>
-          <a:lstStyle/>
-          <a:p>
-            <a:pPr algn="l" indent="0" marL="0">
+      <p:sp>
+        <p:nvSpPr>
+          <p:cNvPr id="6" name="Text 4"/>
+          <p:cNvSpPr/>
+          <p:nvPr/>
+        </p:nvSpPr>
+        <p:spPr>
+          <a:xfrm>
+            <a:off x="777240" y="1783080"/>
+            <a:ext cx="384048" cy="384048"/>
+          </a:xfrm>
+          <a:prstGeom prst="rect">
+            <a:avLst/>
+          </a:prstGeom>
+          <a:noFill/>
+          <a:ln/>
+        </p:spPr>
+        <p:txBody>
+          <a:bodyPr wrap="square" lIns="0" tIns="0" rIns="0" bIns="0" rtlCol="0" anchor="ctr"/>
+          <a:lstStyle/>
+          <a:p>
+            <a:pPr algn="ctr" indent="0" marL="0">
+              <a:buNone/>
+            </a:pPr>
+            <a:r>
+              <a:rPr lang="en-US" sz="1600" b="1" dirty="0">
+                <a:solidFill>
+                  <a:srgbClr val="22D3EE"/>
+                </a:solidFill>
+                <a:latin typeface="Calibri" pitchFamily="34" charset="0"/>
+                <a:ea typeface="Calibri" pitchFamily="34" charset="-122"/>
+                <a:cs typeface="Calibri" pitchFamily="34" charset="-120"/>
+              </a:rPr>
+              <a:t>1</a:t>
+            </a:r>
+            <a:endParaRPr lang="en-US" sz="1600" dirty="0"/>
+          </a:p>
+        </p:txBody>
+      </p:sp>
+      <p:sp>
+        <p:nvSpPr>
+          <p:cNvPr id="7" name="Text 5"/>
+          <p:cNvSpPr/>
+          <p:nvPr/>
+        </p:nvSpPr>
+        <p:spPr>
+          <a:xfrm>
+            <a:off x="1325880" y="1783080"/>
+            <a:ext cx="4381348" cy="502920"/>
+          </a:xfrm>
+          <a:prstGeom prst="rect">
+            <a:avLst/>
+          </a:prstGeom>
+          <a:noFill/>
+          <a:ln/>
+        </p:spPr>
+        <p:txBody>
+          <a:bodyPr wrap="square" lIns="0" tIns="0" rIns="0" bIns="0" rtlCol="0" anchor="ctr"/>
+          <a:lstStyle/>
+          <a:p>
+            <a:pPr indent="0" marL="0">
               <a:lnSpc>
-                <a:spcPct val="115000"/>
+                <a:spcPct val="105000"/>
               </a:lnSpc>
               <a:buNone/>
             </a:pPr>
             <a:r>
-              <a:rPr lang="en-US" sz="1350" b="1" dirty="0">
-                <a:solidFill>
-                  <a:srgbClr val="FBBF24"/>
-                </a:solidFill>
-                <a:latin typeface="Calibri" pitchFamily="34" charset="0"/>
-                <a:ea typeface="Calibri" pitchFamily="34" charset="-122"/>
-                <a:cs typeface="Calibri" pitchFamily="34" charset="-120"/>
-              </a:rPr>
-              <a:t>¿Cuál es yᶜ? [característica (r−2)(r+1)=0 ⟹ yᶜ=C₁e²ˣ+C₂e⁻ˣ]</a:t>
-            </a:r>
-            <a:endParaRPr lang="en-US" sz="1350" dirty="0"/>
-          </a:p>
-        </p:txBody>
-      </p:sp>
-      <p:sp>
-        <p:nvSpPr>
-          <p:cNvPr id="8" name="Shape 5"/>
-          <p:cNvSpPr/>
-          <p:nvPr/>
-        </p:nvSpPr>
-        <p:spPr>
-          <a:xfrm>
-            <a:off x="548640" y="3931920"/>
-            <a:ext cx="11094415" cy="777240"/>
-          </a:xfrm>
-          <a:prstGeom prst="roundRect">
-            <a:avLst>
-              <a:gd name="adj" fmla="val 9412"/>
-            </a:avLst>
-          </a:prstGeom>
-          <a:solidFill>
-            <a:srgbClr val="3A2A0E"/>
-          </a:solidFill>
-          <a:ln w="12700">
-            <a:solidFill>
-              <a:srgbClr val="F59E0B"/>
-            </a:solidFill>
-            <a:prstDash val="solid"/>
-          </a:ln>
-        </p:spPr>
-      </p:sp>
-      <p:sp>
-        <p:nvSpPr>
-          <p:cNvPr id="9" name="Text 6"/>
-          <p:cNvSpPr/>
-          <p:nvPr/>
-        </p:nvSpPr>
-        <p:spPr>
-          <a:xfrm>
-            <a:off x="777240" y="3931920"/>
-            <a:ext cx="10637215" cy="777240"/>
-          </a:xfrm>
-          <a:prstGeom prst="rect">
-            <a:avLst/>
-          </a:prstGeom>
-          <a:noFill/>
-          <a:ln/>
-        </p:spPr>
-        <p:txBody>
-          <a:bodyPr wrap="square" lIns="0" tIns="0" rIns="0" bIns="0" rtlCol="0" anchor="ctr"/>
-          <a:lstStyle/>
-          <a:p>
-            <a:pPr algn="l" indent="0" marL="0">
-              <a:lnSpc>
-                <a:spcPct val="115000"/>
-              </a:lnSpc>
-              <a:buNone/>
-            </a:pPr>
-            <a:r>
-              <a:rPr lang="en-US" sz="1350" b="1" dirty="0">
-                <a:solidFill>
-                  <a:srgbClr val="FBBF24"/>
-                </a:solidFill>
-                <a:latin typeface="Calibri" pitchFamily="34" charset="0"/>
-                <a:ea typeface="Calibri" pitchFamily="34" charset="-122"/>
-                <a:cs typeface="Calibri" pitchFamily="34" charset="-120"/>
-              </a:rPr>
-              <a:t>¿Qué operador aniquila 4x²? [D³, porque x² es un polinomio de grado 2]</a:t>
-            </a:r>
-            <a:endParaRPr lang="en-US" sz="1350" dirty="0"/>
-          </a:p>
-        </p:txBody>
-      </p:sp>
-      <p:sp>
-        <p:nvSpPr>
-          <p:cNvPr id="10" name="Text 7"/>
-          <p:cNvSpPr/>
-          <p:nvPr/>
-        </p:nvSpPr>
-        <p:spPr>
-          <a:xfrm>
-            <a:off x="548640" y="4846320"/>
-            <a:ext cx="11094415" cy="822960"/>
+              <a:rPr lang="en-US" sz="1500" b="1" dirty="0">
+                <a:solidFill>
+                  <a:srgbClr val="F8FAFC"/>
+                </a:solidFill>
+                <a:latin typeface="Calibri" pitchFamily="34" charset="0"/>
+                <a:ea typeface="Calibri" pitchFamily="34" charset="-122"/>
+                <a:cs typeface="Calibri" pitchFamily="34" charset="-120"/>
+              </a:rPr>
+              <a:t>Encuentren yᶜ</a:t>
+            </a:r>
+            <a:endParaRPr lang="en-US" sz="1500" dirty="0"/>
+          </a:p>
+        </p:txBody>
+      </p:sp>
+      <p:sp>
+        <p:nvSpPr>
+          <p:cNvPr id="8" name="Text 6"/>
+          <p:cNvSpPr/>
+          <p:nvPr/>
+        </p:nvSpPr>
+        <p:spPr>
+          <a:xfrm>
+            <a:off x="822960" y="2468880"/>
+            <a:ext cx="4838548" cy="731520"/>
           </a:xfrm>
           <a:prstGeom prst="rect">
             <a:avLst/>
@@ -8624,7 +8437,7 @@
               <a:buNone/>
             </a:pPr>
             <a:r>
-              <a:rPr lang="en-US" sz="1350" dirty="0">
+              <a:rPr lang="en-US" sz="1250" dirty="0">
                 <a:solidFill>
                   <a:srgbClr val="CBD5E1"/>
                 </a:solidFill>
@@ -8632,15 +8445,525 @@
                 <a:ea typeface="Calibri" pitchFamily="34" charset="-122"/>
                 <a:cs typeface="Calibri" pitchFamily="34" charset="-120"/>
               </a:rPr>
-              <a:t>Apliquen D³ a ambos lados, identifiquen qué términos ya están en yᶜ, y propongan la forma de yₚ con coeficientes por determinar. Resuélvanlo en su cuaderno — la solución está en la siguiente diapositiva.</a:t>
-            </a:r>
-            <a:endParaRPr lang="en-US" sz="1350" dirty="0"/>
-          </a:p>
-        </p:txBody>
-      </p:sp>
-      <p:sp>
-        <p:nvSpPr>
-          <p:cNvPr id="11" name="Text 8"/>
+              <a:t>La solución de la homogénea asociada — ya saben hacerlo.</a:t>
+            </a:r>
+            <a:endParaRPr lang="en-US" sz="1250" dirty="0"/>
+          </a:p>
+        </p:txBody>
+      </p:sp>
+      <p:sp>
+        <p:nvSpPr>
+          <p:cNvPr id="9" name="Shape 7"/>
+          <p:cNvSpPr/>
+          <p:nvPr/>
+        </p:nvSpPr>
+        <p:spPr>
+          <a:xfrm>
+            <a:off x="6255868" y="1600200"/>
+            <a:ext cx="5387188" cy="1783080"/>
+          </a:xfrm>
+          <a:prstGeom prst="roundRect">
+            <a:avLst>
+              <a:gd name="adj" fmla="val 5128"/>
+            </a:avLst>
+          </a:prstGeom>
+          <a:solidFill>
+            <a:srgbClr val="1E293B"/>
+          </a:solidFill>
+          <a:ln/>
+        </p:spPr>
+      </p:sp>
+      <p:sp>
+        <p:nvSpPr>
+          <p:cNvPr id="10" name="Shape 8"/>
+          <p:cNvSpPr/>
+          <p:nvPr/>
+        </p:nvSpPr>
+        <p:spPr>
+          <a:xfrm>
+            <a:off x="6484468" y="1783080"/>
+            <a:ext cx="384048" cy="384048"/>
+          </a:xfrm>
+          <a:prstGeom prst="ellipse">
+            <a:avLst/>
+          </a:prstGeom>
+          <a:solidFill>
+            <a:srgbClr val="0B0F19"/>
+          </a:solidFill>
+          <a:ln w="25400">
+            <a:solidFill>
+              <a:srgbClr val="22D3EE"/>
+            </a:solidFill>
+            <a:prstDash val="solid"/>
+          </a:ln>
+        </p:spPr>
+      </p:sp>
+      <p:sp>
+        <p:nvSpPr>
+          <p:cNvPr id="11" name="Text 9"/>
+          <p:cNvSpPr/>
+          <p:nvPr/>
+        </p:nvSpPr>
+        <p:spPr>
+          <a:xfrm>
+            <a:off x="6484468" y="1783080"/>
+            <a:ext cx="384048" cy="384048"/>
+          </a:xfrm>
+          <a:prstGeom prst="rect">
+            <a:avLst/>
+          </a:prstGeom>
+          <a:noFill/>
+          <a:ln/>
+        </p:spPr>
+        <p:txBody>
+          <a:bodyPr wrap="square" lIns="0" tIns="0" rIns="0" bIns="0" rtlCol="0" anchor="ctr"/>
+          <a:lstStyle/>
+          <a:p>
+            <a:pPr algn="ctr" indent="0" marL="0">
+              <a:buNone/>
+            </a:pPr>
+            <a:r>
+              <a:rPr lang="en-US" sz="1600" b="1" dirty="0">
+                <a:solidFill>
+                  <a:srgbClr val="22D3EE"/>
+                </a:solidFill>
+                <a:latin typeface="Calibri" pitchFamily="34" charset="0"/>
+                <a:ea typeface="Calibri" pitchFamily="34" charset="-122"/>
+                <a:cs typeface="Calibri" pitchFamily="34" charset="-120"/>
+              </a:rPr>
+              <a:t>2</a:t>
+            </a:r>
+            <a:endParaRPr lang="en-US" sz="1600" dirty="0"/>
+          </a:p>
+        </p:txBody>
+      </p:sp>
+      <p:sp>
+        <p:nvSpPr>
+          <p:cNvPr id="12" name="Text 10"/>
+          <p:cNvSpPr/>
+          <p:nvPr/>
+        </p:nvSpPr>
+        <p:spPr>
+          <a:xfrm>
+            <a:off x="7033108" y="1783080"/>
+            <a:ext cx="4381348" cy="502920"/>
+          </a:xfrm>
+          <a:prstGeom prst="rect">
+            <a:avLst/>
+          </a:prstGeom>
+          <a:noFill/>
+          <a:ln/>
+        </p:spPr>
+        <p:txBody>
+          <a:bodyPr wrap="square" lIns="0" tIns="0" rIns="0" bIns="0" rtlCol="0" anchor="ctr"/>
+          <a:lstStyle/>
+          <a:p>
+            <a:pPr indent="0" marL="0">
+              <a:lnSpc>
+                <a:spcPct val="105000"/>
+              </a:lnSpc>
+              <a:buNone/>
+            </a:pPr>
+            <a:r>
+              <a:rPr lang="en-US" sz="1500" b="1" dirty="0">
+                <a:solidFill>
+                  <a:srgbClr val="F8FAFC"/>
+                </a:solidFill>
+                <a:latin typeface="Calibri" pitchFamily="34" charset="0"/>
+                <a:ea typeface="Calibri" pitchFamily="34" charset="-122"/>
+                <a:cs typeface="Calibri" pitchFamily="34" charset="-120"/>
+              </a:rPr>
+              <a:t>Anulen g(x)</a:t>
+            </a:r>
+            <a:endParaRPr lang="en-US" sz="1500" dirty="0"/>
+          </a:p>
+        </p:txBody>
+      </p:sp>
+      <p:sp>
+        <p:nvSpPr>
+          <p:cNvPr id="13" name="Text 11"/>
+          <p:cNvSpPr/>
+          <p:nvPr/>
+        </p:nvSpPr>
+        <p:spPr>
+          <a:xfrm>
+            <a:off x="6530188" y="2468880"/>
+            <a:ext cx="4838548" cy="731520"/>
+          </a:xfrm>
+          <a:prstGeom prst="rect">
+            <a:avLst/>
+          </a:prstGeom>
+          <a:noFill/>
+          <a:ln/>
+        </p:spPr>
+        <p:txBody>
+          <a:bodyPr wrap="square" lIns="0" tIns="0" rIns="0" bIns="0" rtlCol="0" anchor="t"/>
+          <a:lstStyle/>
+          <a:p>
+            <a:pPr algn="l" indent="0" marL="0">
+              <a:lnSpc>
+                <a:spcPct val="112000"/>
+              </a:lnSpc>
+              <a:buNone/>
+            </a:pPr>
+            <a:r>
+              <a:rPr lang="en-US" sz="1250" dirty="0">
+                <a:solidFill>
+                  <a:srgbClr val="CBD5E1"/>
+                </a:solidFill>
+                <a:latin typeface="Calibri" pitchFamily="34" charset="0"/>
+                <a:ea typeface="Calibri" pitchFamily="34" charset="-122"/>
+                <a:cs typeface="Calibri" pitchFamily="34" charset="-120"/>
+              </a:rPr>
+              <a:t>Encuentren un operador anulador y apliquenlo a AMBOS lados de la ecuación completa.</a:t>
+            </a:r>
+            <a:endParaRPr lang="en-US" sz="1250" dirty="0"/>
+          </a:p>
+        </p:txBody>
+      </p:sp>
+      <p:sp>
+        <p:nvSpPr>
+          <p:cNvPr id="14" name="Shape 12"/>
+          <p:cNvSpPr/>
+          <p:nvPr/>
+        </p:nvSpPr>
+        <p:spPr>
+          <a:xfrm>
+            <a:off x="548640" y="3657600"/>
+            <a:ext cx="5387188" cy="1783080"/>
+          </a:xfrm>
+          <a:prstGeom prst="roundRect">
+            <a:avLst>
+              <a:gd name="adj" fmla="val 5128"/>
+            </a:avLst>
+          </a:prstGeom>
+          <a:solidFill>
+            <a:srgbClr val="1E293B"/>
+          </a:solidFill>
+          <a:ln/>
+        </p:spPr>
+      </p:sp>
+      <p:sp>
+        <p:nvSpPr>
+          <p:cNvPr id="15" name="Shape 13"/>
+          <p:cNvSpPr/>
+          <p:nvPr/>
+        </p:nvSpPr>
+        <p:spPr>
+          <a:xfrm>
+            <a:off x="777240" y="3840480"/>
+            <a:ext cx="384048" cy="384048"/>
+          </a:xfrm>
+          <a:prstGeom prst="ellipse">
+            <a:avLst/>
+          </a:prstGeom>
+          <a:solidFill>
+            <a:srgbClr val="0B0F19"/>
+          </a:solidFill>
+          <a:ln w="25400">
+            <a:solidFill>
+              <a:srgbClr val="22D3EE"/>
+            </a:solidFill>
+            <a:prstDash val="solid"/>
+          </a:ln>
+        </p:spPr>
+      </p:sp>
+      <p:sp>
+        <p:nvSpPr>
+          <p:cNvPr id="16" name="Text 14"/>
+          <p:cNvSpPr/>
+          <p:nvPr/>
+        </p:nvSpPr>
+        <p:spPr>
+          <a:xfrm>
+            <a:off x="777240" y="3840480"/>
+            <a:ext cx="384048" cy="384048"/>
+          </a:xfrm>
+          <a:prstGeom prst="rect">
+            <a:avLst/>
+          </a:prstGeom>
+          <a:noFill/>
+          <a:ln/>
+        </p:spPr>
+        <p:txBody>
+          <a:bodyPr wrap="square" lIns="0" tIns="0" rIns="0" bIns="0" rtlCol="0" anchor="ctr"/>
+          <a:lstStyle/>
+          <a:p>
+            <a:pPr algn="ctr" indent="0" marL="0">
+              <a:buNone/>
+            </a:pPr>
+            <a:r>
+              <a:rPr lang="en-US" sz="1600" b="1" dirty="0">
+                <a:solidFill>
+                  <a:srgbClr val="22D3EE"/>
+                </a:solidFill>
+                <a:latin typeface="Calibri" pitchFamily="34" charset="0"/>
+                <a:ea typeface="Calibri" pitchFamily="34" charset="-122"/>
+                <a:cs typeface="Calibri" pitchFamily="34" charset="-120"/>
+              </a:rPr>
+              <a:t>3</a:t>
+            </a:r>
+            <a:endParaRPr lang="en-US" sz="1600" dirty="0"/>
+          </a:p>
+        </p:txBody>
+      </p:sp>
+      <p:sp>
+        <p:nvSpPr>
+          <p:cNvPr id="17" name="Text 15"/>
+          <p:cNvSpPr/>
+          <p:nvPr/>
+        </p:nvSpPr>
+        <p:spPr>
+          <a:xfrm>
+            <a:off x="1325880" y="3840480"/>
+            <a:ext cx="4381348" cy="502920"/>
+          </a:xfrm>
+          <a:prstGeom prst="rect">
+            <a:avLst/>
+          </a:prstGeom>
+          <a:noFill/>
+          <a:ln/>
+        </p:spPr>
+        <p:txBody>
+          <a:bodyPr wrap="square" lIns="0" tIns="0" rIns="0" bIns="0" rtlCol="0" anchor="ctr"/>
+          <a:lstStyle/>
+          <a:p>
+            <a:pPr indent="0" marL="0">
+              <a:lnSpc>
+                <a:spcPct val="105000"/>
+              </a:lnSpc>
+              <a:buNone/>
+            </a:pPr>
+            <a:r>
+              <a:rPr lang="en-US" sz="1500" b="1" dirty="0">
+                <a:solidFill>
+                  <a:srgbClr val="F8FAFC"/>
+                </a:solidFill>
+                <a:latin typeface="Calibri" pitchFamily="34" charset="0"/>
+                <a:ea typeface="Calibri" pitchFamily="34" charset="-122"/>
+                <a:cs typeface="Calibri" pitchFamily="34" charset="-120"/>
+              </a:rPr>
+              <a:t>Resuelvan y eliminen</a:t>
+            </a:r>
+            <a:endParaRPr lang="en-US" sz="1500" dirty="0"/>
+          </a:p>
+        </p:txBody>
+      </p:sp>
+      <p:sp>
+        <p:nvSpPr>
+          <p:cNvPr id="18" name="Text 16"/>
+          <p:cNvSpPr/>
+          <p:nvPr/>
+        </p:nvSpPr>
+        <p:spPr>
+          <a:xfrm>
+            <a:off x="822960" y="4526280"/>
+            <a:ext cx="4838548" cy="731520"/>
+          </a:xfrm>
+          <a:prstGeom prst="rect">
+            <a:avLst/>
+          </a:prstGeom>
+          <a:noFill/>
+          <a:ln/>
+        </p:spPr>
+        <p:txBody>
+          <a:bodyPr wrap="square" lIns="0" tIns="0" rIns="0" bIns="0" rtlCol="0" anchor="t"/>
+          <a:lstStyle/>
+          <a:p>
+            <a:pPr algn="l" indent="0" marL="0">
+              <a:lnSpc>
+                <a:spcPct val="112000"/>
+              </a:lnSpc>
+              <a:buNone/>
+            </a:pPr>
+            <a:r>
+              <a:rPr lang="en-US" sz="1250" dirty="0">
+                <a:solidFill>
+                  <a:srgbClr val="CBD5E1"/>
+                </a:solidFill>
+                <a:latin typeface="Calibri" pitchFamily="34" charset="0"/>
+                <a:ea typeface="Calibri" pitchFamily="34" charset="-122"/>
+                <a:cs typeface="Calibri" pitchFamily="34" charset="-120"/>
+              </a:rPr>
+              <a:t>Resuelvan la ecuación de orden mayor; eliminen los términos que ya están en yᶜ.</a:t>
+            </a:r>
+            <a:endParaRPr lang="en-US" sz="1250" dirty="0"/>
+          </a:p>
+        </p:txBody>
+      </p:sp>
+      <p:sp>
+        <p:nvSpPr>
+          <p:cNvPr id="19" name="Shape 17"/>
+          <p:cNvSpPr/>
+          <p:nvPr/>
+        </p:nvSpPr>
+        <p:spPr>
+          <a:xfrm>
+            <a:off x="6255868" y="3657600"/>
+            <a:ext cx="5387188" cy="1783080"/>
+          </a:xfrm>
+          <a:prstGeom prst="roundRect">
+            <a:avLst>
+              <a:gd name="adj" fmla="val 5128"/>
+            </a:avLst>
+          </a:prstGeom>
+          <a:solidFill>
+            <a:srgbClr val="1E293B"/>
+          </a:solidFill>
+          <a:ln/>
+        </p:spPr>
+      </p:sp>
+      <p:sp>
+        <p:nvSpPr>
+          <p:cNvPr id="20" name="Shape 18"/>
+          <p:cNvSpPr/>
+          <p:nvPr/>
+        </p:nvSpPr>
+        <p:spPr>
+          <a:xfrm>
+            <a:off x="6484468" y="3840480"/>
+            <a:ext cx="384048" cy="384048"/>
+          </a:xfrm>
+          <a:prstGeom prst="ellipse">
+            <a:avLst/>
+          </a:prstGeom>
+          <a:solidFill>
+            <a:srgbClr val="0B0F19"/>
+          </a:solidFill>
+          <a:ln w="25400">
+            <a:solidFill>
+              <a:srgbClr val="22D3EE"/>
+            </a:solidFill>
+            <a:prstDash val="solid"/>
+          </a:ln>
+        </p:spPr>
+      </p:sp>
+      <p:sp>
+        <p:nvSpPr>
+          <p:cNvPr id="21" name="Text 19"/>
+          <p:cNvSpPr/>
+          <p:nvPr/>
+        </p:nvSpPr>
+        <p:spPr>
+          <a:xfrm>
+            <a:off x="6484468" y="3840480"/>
+            <a:ext cx="384048" cy="384048"/>
+          </a:xfrm>
+          <a:prstGeom prst="rect">
+            <a:avLst/>
+          </a:prstGeom>
+          <a:noFill/>
+          <a:ln/>
+        </p:spPr>
+        <p:txBody>
+          <a:bodyPr wrap="square" lIns="0" tIns="0" rIns="0" bIns="0" rtlCol="0" anchor="ctr"/>
+          <a:lstStyle/>
+          <a:p>
+            <a:pPr algn="ctr" indent="0" marL="0">
+              <a:buNone/>
+            </a:pPr>
+            <a:r>
+              <a:rPr lang="en-US" sz="1600" b="1" dirty="0">
+                <a:solidFill>
+                  <a:srgbClr val="22D3EE"/>
+                </a:solidFill>
+                <a:latin typeface="Calibri" pitchFamily="34" charset="0"/>
+                <a:ea typeface="Calibri" pitchFamily="34" charset="-122"/>
+                <a:cs typeface="Calibri" pitchFamily="34" charset="-120"/>
+              </a:rPr>
+              <a:t>4</a:t>
+            </a:r>
+            <a:endParaRPr lang="en-US" sz="1600" dirty="0"/>
+          </a:p>
+        </p:txBody>
+      </p:sp>
+      <p:sp>
+        <p:nvSpPr>
+          <p:cNvPr id="22" name="Text 20"/>
+          <p:cNvSpPr/>
+          <p:nvPr/>
+        </p:nvSpPr>
+        <p:spPr>
+          <a:xfrm>
+            <a:off x="7033108" y="3840480"/>
+            <a:ext cx="4381348" cy="502920"/>
+          </a:xfrm>
+          <a:prstGeom prst="rect">
+            <a:avLst/>
+          </a:prstGeom>
+          <a:noFill/>
+          <a:ln/>
+        </p:spPr>
+        <p:txBody>
+          <a:bodyPr wrap="square" lIns="0" tIns="0" rIns="0" bIns="0" rtlCol="0" anchor="ctr"/>
+          <a:lstStyle/>
+          <a:p>
+            <a:pPr indent="0" marL="0">
+              <a:lnSpc>
+                <a:spcPct val="105000"/>
+              </a:lnSpc>
+              <a:buNone/>
+            </a:pPr>
+            <a:r>
+              <a:rPr lang="en-US" sz="1500" b="1" dirty="0">
+                <a:solidFill>
+                  <a:srgbClr val="F8FAFC"/>
+                </a:solidFill>
+                <a:latin typeface="Calibri" pitchFamily="34" charset="0"/>
+                <a:ea typeface="Calibri" pitchFamily="34" charset="-122"/>
+                <a:cs typeface="Calibri" pitchFamily="34" charset="-120"/>
+              </a:rPr>
+              <a:t>Sustituyan y despejen</a:t>
+            </a:r>
+            <a:endParaRPr lang="en-US" sz="1500" dirty="0"/>
+          </a:p>
+        </p:txBody>
+      </p:sp>
+      <p:sp>
+        <p:nvSpPr>
+          <p:cNvPr id="23" name="Text 21"/>
+          <p:cNvSpPr/>
+          <p:nvPr/>
+        </p:nvSpPr>
+        <p:spPr>
+          <a:xfrm>
+            <a:off x="6530188" y="4526280"/>
+            <a:ext cx="4838548" cy="731520"/>
+          </a:xfrm>
+          <a:prstGeom prst="rect">
+            <a:avLst/>
+          </a:prstGeom>
+          <a:noFill/>
+          <a:ln/>
+        </p:spPr>
+        <p:txBody>
+          <a:bodyPr wrap="square" lIns="0" tIns="0" rIns="0" bIns="0" rtlCol="0" anchor="t"/>
+          <a:lstStyle/>
+          <a:p>
+            <a:pPr algn="l" indent="0" marL="0">
+              <a:lnSpc>
+                <a:spcPct val="112000"/>
+              </a:lnSpc>
+              <a:buNone/>
+            </a:pPr>
+            <a:r>
+              <a:rPr lang="en-US" sz="1250" dirty="0">
+                <a:solidFill>
+                  <a:srgbClr val="CBD5E1"/>
+                </a:solidFill>
+                <a:latin typeface="Calibri" pitchFamily="34" charset="0"/>
+                <a:ea typeface="Calibri" pitchFamily="34" charset="-122"/>
+                <a:cs typeface="Calibri" pitchFamily="34" charset="-120"/>
+              </a:rPr>
+              <a:t>Sustituyan la forma restante (yₚ) en la ecuación ORIGINAL para hallar los coeficientes.</a:t>
+            </a:r>
+            <a:endParaRPr lang="en-US" sz="1250" dirty="0"/>
+          </a:p>
+        </p:txBody>
+      </p:sp>
+      <p:sp>
+        <p:nvSpPr>
+          <p:cNvPr id="24" name="Text 22"/>
           <p:cNvSpPr/>
           <p:nvPr/>
         </p:nvSpPr>
@@ -8679,7 +9002,7 @@
       </p:sp>
       <p:sp>
         <p:nvSpPr>
-          <p:cNvPr id="12" name="Text 9"/>
+          <p:cNvPr id="25" name="Text 23"/>
           <p:cNvSpPr/>
           <p:nvPr/>
         </p:nvSpPr>
@@ -8820,7 +9143,7 @@
                 <a:ea typeface="Calibri" pitchFamily="34" charset="-122"/>
                 <a:cs typeface="Calibri" pitchFamily="34" charset="-120"/>
               </a:rPr>
-              <a:t>Ejemplo — Anulador (Solución)</a:t>
+              <a:t>Ejemplo — Anulador (Planteamiento)</a:t>
             </a:r>
             <a:endParaRPr lang="en-US" sz="2900" dirty="0"/>
           </a:p>
@@ -8834,62 +9157,28 @@
         </p:nvSpPr>
         <p:spPr>
           <a:xfrm>
-            <a:off x="548640" y="1645920"/>
-            <a:ext cx="11094415" cy="4023360"/>
+            <a:off x="548640" y="1691640"/>
+            <a:ext cx="11094415" cy="1188720"/>
           </a:xfrm>
           <a:prstGeom prst="roundRect">
             <a:avLst>
-              <a:gd name="adj" fmla="val 2273"/>
+              <a:gd name="adj" fmla="val 6154"/>
             </a:avLst>
           </a:prstGeom>
           <a:solidFill>
-            <a:srgbClr val="1E293B"/>
+            <a:srgbClr val="0E3A44"/>
           </a:solidFill>
-          <a:ln/>
-        </p:spPr>
-      </p:sp>
-      <p:sp>
-        <p:nvSpPr>
-          <p:cNvPr id="5" name="Text 3"/>
-          <p:cNvSpPr/>
-          <p:nvPr/>
-        </p:nvSpPr>
-        <p:spPr>
-          <a:xfrm>
-            <a:off x="822960" y="1783080"/>
-            <a:ext cx="10545775" cy="274320"/>
-          </a:xfrm>
-          <a:prstGeom prst="rect">
-            <a:avLst/>
-          </a:prstGeom>
-          <a:noFill/>
-          <a:ln/>
-        </p:spPr>
-        <p:txBody>
-          <a:bodyPr wrap="square" lIns="0" tIns="0" rIns="0" bIns="0" rtlCol="0" anchor="t"/>
-          <a:lstStyle/>
-          <a:p>
-            <a:pPr algn="l" indent="0" marL="0">
-              <a:buNone/>
-            </a:pPr>
-            <a:r>
-              <a:rPr lang="en-US" sz="1300" b="1" dirty="0">
-                <a:solidFill>
-                  <a:srgbClr val="22D3EE"/>
-                </a:solidFill>
-                <a:latin typeface="Calibri" pitchFamily="34" charset="0"/>
-                <a:ea typeface="Calibri" pitchFamily="34" charset="-122"/>
-                <a:cs typeface="Calibri" pitchFamily="34" charset="-120"/>
-              </a:rPr>
-              <a:t>RECAPITULANDO yᶜ</a:t>
-            </a:r>
-            <a:endParaRPr lang="en-US" sz="1300" dirty="0"/>
-          </a:p>
-        </p:txBody>
+          <a:ln w="12700">
+            <a:solidFill>
+              <a:srgbClr val="06B6D4"/>
+            </a:solidFill>
+            <a:prstDash val="solid"/>
+          </a:ln>
+        </p:spPr>
       </p:sp>
       <p:pic>
         <p:nvPicPr>
-          <p:cNvPr id="6" name="Image 0" descr="build/eq/an_yc.png">    </p:cNvPr>
+          <p:cNvPr id="5" name="Image 0" descr="build/eq/an_setup.png">    </p:cNvPr>
           <p:cNvPicPr>
             <a:picLocks noChangeAspect="1"/>
           </p:cNvPicPr>
@@ -8903,8 +9192,8 @@
         </p:blipFill>
         <p:spPr>
           <a:xfrm>
-            <a:off x="822960" y="2103120"/>
-            <a:ext cx="3194761" cy="502920"/>
+            <a:off x="3278262" y="1828800"/>
+            <a:ext cx="5635171" cy="914400"/>
           </a:xfrm>
           <a:prstGeom prst="rect">
             <a:avLst/>
@@ -8913,77 +9202,152 @@
       </p:pic>
       <p:sp>
         <p:nvSpPr>
+          <p:cNvPr id="6" name="Shape 3"/>
+          <p:cNvSpPr/>
+          <p:nvPr/>
+        </p:nvSpPr>
+        <p:spPr>
+          <a:xfrm>
+            <a:off x="548640" y="3063240"/>
+            <a:ext cx="11094415" cy="777240"/>
+          </a:xfrm>
+          <a:prstGeom prst="roundRect">
+            <a:avLst>
+              <a:gd name="adj" fmla="val 9412"/>
+            </a:avLst>
+          </a:prstGeom>
+          <a:solidFill>
+            <a:srgbClr val="3A2A0E"/>
+          </a:solidFill>
+          <a:ln w="12700">
+            <a:solidFill>
+              <a:srgbClr val="F59E0B"/>
+            </a:solidFill>
+            <a:prstDash val="solid"/>
+          </a:ln>
+        </p:spPr>
+      </p:sp>
+      <p:sp>
+        <p:nvSpPr>
           <p:cNvPr id="7" name="Text 4"/>
           <p:cNvSpPr/>
           <p:nvPr/>
         </p:nvSpPr>
         <p:spPr>
           <a:xfrm>
-            <a:off x="4389120" y="1783080"/>
-            <a:ext cx="6979615" cy="274320"/>
-          </a:xfrm>
-          <a:prstGeom prst="rect">
-            <a:avLst/>
-          </a:prstGeom>
-          <a:noFill/>
-          <a:ln/>
-        </p:spPr>
-        <p:txBody>
-          <a:bodyPr wrap="square" lIns="0" tIns="0" rIns="0" bIns="0" rtlCol="0" anchor="t"/>
+            <a:off x="777240" y="3063240"/>
+            <a:ext cx="10637215" cy="777240"/>
+          </a:xfrm>
+          <a:prstGeom prst="rect">
+            <a:avLst/>
+          </a:prstGeom>
+          <a:noFill/>
+          <a:ln/>
+        </p:spPr>
+        <p:txBody>
+          <a:bodyPr wrap="square" lIns="0" tIns="0" rIns="0" bIns="0" rtlCol="0" anchor="ctr"/>
           <a:lstStyle/>
           <a:p>
             <a:pPr algn="l" indent="0" marL="0">
-              <a:buNone/>
-            </a:pPr>
-            <a:r>
-              <a:rPr lang="en-US" sz="1300" b="1" dirty="0">
-                <a:solidFill>
-                  <a:srgbClr val="22D3EE"/>
-                </a:solidFill>
-                <a:latin typeface="Calibri" pitchFamily="34" charset="0"/>
-                <a:ea typeface="Calibri" pitchFamily="34" charset="-122"/>
-                <a:cs typeface="Calibri" pitchFamily="34" charset="-120"/>
-              </a:rPr>
-              <a:t>FORMA DE yₚ (SIN LOS TÉRMINOS YA EN yᶜ)</a:t>
-            </a:r>
-            <a:endParaRPr lang="en-US" sz="1300" dirty="0"/>
-          </a:p>
-        </p:txBody>
-      </p:sp>
-      <p:pic>
-        <p:nvPicPr>
-          <p:cNvPr id="8" name="Image 1" descr="build/eq/an_yp_form.png">    </p:cNvPr>
-          <p:cNvPicPr>
-            <a:picLocks noChangeAspect="1"/>
-          </p:cNvPicPr>
-          <p:nvPr/>
-        </p:nvPicPr>
-        <p:blipFill>
-          <a:blip r:embed="rId2"/>
-          <a:stretch>
-            <a:fillRect/>
-          </a:stretch>
-        </p:blipFill>
-        <p:spPr>
-          <a:xfrm>
-            <a:off x="4389120" y="2103120"/>
-            <a:ext cx="3051761" cy="502920"/>
-          </a:xfrm>
-          <a:prstGeom prst="rect">
-            <a:avLst/>
-          </a:prstGeom>
-        </p:spPr>
-      </p:pic>
-      <p:sp>
-        <p:nvSpPr>
-          <p:cNvPr id="9" name="Text 5"/>
-          <p:cNvSpPr/>
-          <p:nvPr/>
-        </p:nvSpPr>
-        <p:spPr>
-          <a:xfrm>
-            <a:off x="822960" y="2788920"/>
-            <a:ext cx="10545775" cy="502920"/>
+              <a:lnSpc>
+                <a:spcPct val="115000"/>
+              </a:lnSpc>
+              <a:buNone/>
+            </a:pPr>
+            <a:r>
+              <a:rPr lang="en-US" sz="1350" b="1" dirty="0">
+                <a:solidFill>
+                  <a:srgbClr val="FBBF24"/>
+                </a:solidFill>
+                <a:latin typeface="Calibri" pitchFamily="34" charset="0"/>
+                <a:ea typeface="Calibri" pitchFamily="34" charset="-122"/>
+                <a:cs typeface="Calibri" pitchFamily="34" charset="-120"/>
+              </a:rPr>
+              <a:t>¿Cuál es yᶜ? [característica (r−2)(r+1)=0 ⟹ yᶜ=C₁e²ˣ+C₂e⁻ˣ]</a:t>
+            </a:r>
+            <a:endParaRPr lang="en-US" sz="1350" dirty="0"/>
+          </a:p>
+        </p:txBody>
+      </p:sp>
+      <p:sp>
+        <p:nvSpPr>
+          <p:cNvPr id="8" name="Shape 5"/>
+          <p:cNvSpPr/>
+          <p:nvPr/>
+        </p:nvSpPr>
+        <p:spPr>
+          <a:xfrm>
+            <a:off x="548640" y="3931920"/>
+            <a:ext cx="11094415" cy="777240"/>
+          </a:xfrm>
+          <a:prstGeom prst="roundRect">
+            <a:avLst>
+              <a:gd name="adj" fmla="val 9412"/>
+            </a:avLst>
+          </a:prstGeom>
+          <a:solidFill>
+            <a:srgbClr val="3A2A0E"/>
+          </a:solidFill>
+          <a:ln w="12700">
+            <a:solidFill>
+              <a:srgbClr val="F59E0B"/>
+            </a:solidFill>
+            <a:prstDash val="solid"/>
+          </a:ln>
+        </p:spPr>
+      </p:sp>
+      <p:sp>
+        <p:nvSpPr>
+          <p:cNvPr id="9" name="Text 6"/>
+          <p:cNvSpPr/>
+          <p:nvPr/>
+        </p:nvSpPr>
+        <p:spPr>
+          <a:xfrm>
+            <a:off x="777240" y="3931920"/>
+            <a:ext cx="10637215" cy="777240"/>
+          </a:xfrm>
+          <a:prstGeom prst="rect">
+            <a:avLst/>
+          </a:prstGeom>
+          <a:noFill/>
+          <a:ln/>
+        </p:spPr>
+        <p:txBody>
+          <a:bodyPr wrap="square" lIns="0" tIns="0" rIns="0" bIns="0" rtlCol="0" anchor="ctr"/>
+          <a:lstStyle/>
+          <a:p>
+            <a:pPr algn="l" indent="0" marL="0">
+              <a:lnSpc>
+                <a:spcPct val="115000"/>
+              </a:lnSpc>
+              <a:buNone/>
+            </a:pPr>
+            <a:r>
+              <a:rPr lang="en-US" sz="1350" b="1" dirty="0">
+                <a:solidFill>
+                  <a:srgbClr val="FBBF24"/>
+                </a:solidFill>
+                <a:latin typeface="Calibri" pitchFamily="34" charset="0"/>
+                <a:ea typeface="Calibri" pitchFamily="34" charset="-122"/>
+                <a:cs typeface="Calibri" pitchFamily="34" charset="-120"/>
+              </a:rPr>
+              <a:t>¿Qué operador aniquila 4x²? [D³, porque x² es un polinomio de grado 2]</a:t>
+            </a:r>
+            <a:endParaRPr lang="en-US" sz="1350" dirty="0"/>
+          </a:p>
+        </p:txBody>
+      </p:sp>
+      <p:sp>
+        <p:nvSpPr>
+          <p:cNvPr id="10" name="Text 7"/>
+          <p:cNvSpPr/>
+          <p:nvPr/>
+        </p:nvSpPr>
+        <p:spPr>
+          <a:xfrm>
+            <a:off x="548640" y="4846320"/>
+            <a:ext cx="11094415" cy="822960"/>
           </a:xfrm>
           <a:prstGeom prst="rect">
             <a:avLst/>
@@ -9010,186 +9374,15 @@
                 <a:ea typeface="Calibri" pitchFamily="34" charset="-122"/>
                 <a:cs typeface="Calibri" pitchFamily="34" charset="-120"/>
               </a:rPr>
-              <a:t>Sustituyendo en la ecuación original y agrupando por potencias de x: de x², −2C=4; de x¹, −2C−2B=0; de x⁰, 2C−B−2A=0.</a:t>
+              <a:t>Apliquen D³ a ambos lados, identifiquen qué términos ya están en yᶜ, y propongan la forma de yₚ con coeficientes por determinar. Resuélvanlo en su cuaderno — la solución está en la siguiente diapositiva.</a:t>
             </a:r>
             <a:endParaRPr lang="en-US" sz="1350" dirty="0"/>
           </a:p>
         </p:txBody>
       </p:sp>
-      <p:pic>
-        <p:nvPicPr>
-          <p:cNvPr id="10" name="Image 2" descr="build/eq/an_coeffs.png">    </p:cNvPr>
-          <p:cNvPicPr>
-            <a:picLocks noChangeAspect="1"/>
-          </p:cNvPicPr>
-          <p:nvPr/>
-        </p:nvPicPr>
-        <p:blipFill>
-          <a:blip r:embed="rId3"/>
-          <a:stretch>
-            <a:fillRect/>
-          </a:stretch>
-        </p:blipFill>
-        <p:spPr>
-          <a:xfrm>
-            <a:off x="3818523" y="3337560"/>
-            <a:ext cx="4554650" cy="502920"/>
-          </a:xfrm>
-          <a:prstGeom prst="rect">
-            <a:avLst/>
-          </a:prstGeom>
-        </p:spPr>
-      </p:pic>
-      <p:sp>
-        <p:nvSpPr>
-          <p:cNvPr id="11" name="Text 6"/>
-          <p:cNvSpPr/>
-          <p:nvPr/>
-        </p:nvSpPr>
-        <p:spPr>
-          <a:xfrm>
-            <a:off x="822960" y="3977640"/>
-            <a:ext cx="10545775" cy="320040"/>
-          </a:xfrm>
-          <a:prstGeom prst="rect">
-            <a:avLst/>
-          </a:prstGeom>
-          <a:noFill/>
-          <a:ln/>
-        </p:spPr>
-        <p:txBody>
-          <a:bodyPr wrap="square" lIns="0" tIns="0" rIns="0" bIns="0" rtlCol="0" anchor="t"/>
-          <a:lstStyle/>
-          <a:p>
-            <a:pPr algn="l" indent="0" marL="0">
-              <a:lnSpc>
-                <a:spcPct val="112000"/>
-              </a:lnSpc>
-              <a:buNone/>
-            </a:pPr>
-            <a:r>
-              <a:rPr lang="en-US" sz="1400" dirty="0">
-                <a:solidFill>
-                  <a:srgbClr val="CBD5E1"/>
-                </a:solidFill>
-                <a:latin typeface="Calibri" pitchFamily="34" charset="0"/>
-                <a:ea typeface="Calibri" pitchFamily="34" charset="-122"/>
-                <a:cs typeface="Calibri" pitchFamily="34" charset="-120"/>
-              </a:rPr>
-              <a:t>La solución particular:</a:t>
-            </a:r>
-            <a:endParaRPr lang="en-US" sz="1400" dirty="0"/>
-          </a:p>
-        </p:txBody>
-      </p:sp>
-      <p:sp>
-        <p:nvSpPr>
-          <p:cNvPr id="12" name="Text 7"/>
-          <p:cNvSpPr/>
-          <p:nvPr/>
-        </p:nvSpPr>
-        <p:spPr>
-          <a:xfrm>
-            <a:off x="822960" y="4297680"/>
-            <a:ext cx="10545775" cy="411480"/>
-          </a:xfrm>
-          <a:prstGeom prst="rect">
-            <a:avLst/>
-          </a:prstGeom>
-          <a:noFill/>
-          <a:ln/>
-        </p:spPr>
-        <p:txBody>
-          <a:bodyPr wrap="square" lIns="0" tIns="0" rIns="0" bIns="0" rtlCol="0" anchor="t"/>
-          <a:lstStyle/>
-          <a:p>
-            <a:pPr algn="l" indent="0" marL="0">
-              <a:lnSpc>
-                <a:spcPct val="112000"/>
-              </a:lnSpc>
-              <a:buNone/>
-            </a:pPr>
-            <a:r>
-              <a:rPr lang="en-US" sz="2000" b="1" dirty="0">
-                <a:solidFill>
-                  <a:srgbClr val="F8FAFC"/>
-                </a:solidFill>
-                <a:latin typeface="Calibri" pitchFamily="34" charset="0"/>
-                <a:ea typeface="Calibri" pitchFamily="34" charset="-122"/>
-                <a:cs typeface="Calibri" pitchFamily="34" charset="-120"/>
-              </a:rPr>
-              <a:t>yₚ = −3 + 2x − 2x²</a:t>
-            </a:r>
-            <a:endParaRPr lang="en-US" sz="2000" dirty="0"/>
-          </a:p>
-        </p:txBody>
-      </p:sp>
-      <p:sp>
-        <p:nvSpPr>
-          <p:cNvPr id="13" name="Text 8"/>
-          <p:cNvSpPr/>
-          <p:nvPr/>
-        </p:nvSpPr>
-        <p:spPr>
-          <a:xfrm>
-            <a:off x="822960" y="4800600"/>
-            <a:ext cx="10545775" cy="274320"/>
-          </a:xfrm>
-          <a:prstGeom prst="rect">
-            <a:avLst/>
-          </a:prstGeom>
-          <a:noFill/>
-          <a:ln/>
-        </p:spPr>
-        <p:txBody>
-          <a:bodyPr wrap="square" lIns="0" tIns="0" rIns="0" bIns="0" rtlCol="0" anchor="t"/>
-          <a:lstStyle/>
-          <a:p>
-            <a:pPr algn="l" indent="0" marL="0">
-              <a:buNone/>
-            </a:pPr>
-            <a:r>
-              <a:rPr lang="en-US" sz="1300" b="1" dirty="0">
-                <a:solidFill>
-                  <a:srgbClr val="22D3EE"/>
-                </a:solidFill>
-                <a:latin typeface="Calibri" pitchFamily="34" charset="0"/>
-                <a:ea typeface="Calibri" pitchFamily="34" charset="-122"/>
-                <a:cs typeface="Calibri" pitchFamily="34" charset="-120"/>
-              </a:rPr>
-              <a:t>SOLUCIÓN GENERAL COMPLETA</a:t>
-            </a:r>
-            <a:endParaRPr lang="en-US" sz="1300" dirty="0"/>
-          </a:p>
-        </p:txBody>
-      </p:sp>
-      <p:pic>
-        <p:nvPicPr>
-          <p:cNvPr id="14" name="Image 3" descr="build/eq/an_final.png">    </p:cNvPr>
-          <p:cNvPicPr>
-            <a:picLocks noChangeAspect="1"/>
-          </p:cNvPicPr>
-          <p:nvPr/>
-        </p:nvPicPr>
-        <p:blipFill>
-          <a:blip r:embed="rId4"/>
-          <a:stretch>
-            <a:fillRect/>
-          </a:stretch>
-        </p:blipFill>
-        <p:spPr>
-          <a:xfrm>
-            <a:off x="3381080" y="5120640"/>
-            <a:ext cx="5429534" cy="502920"/>
-          </a:xfrm>
-          <a:prstGeom prst="rect">
-            <a:avLst/>
-          </a:prstGeom>
-        </p:spPr>
-      </p:pic>
-      <p:sp>
-        <p:nvSpPr>
-          <p:cNvPr id="15" name="Text 9"/>
+      <p:sp>
+        <p:nvSpPr>
+          <p:cNvPr id="11" name="Text 8"/>
           <p:cNvSpPr/>
           <p:nvPr/>
         </p:nvSpPr>
@@ -9228,7 +9421,7 @@
       </p:sp>
       <p:sp>
         <p:nvSpPr>
-          <p:cNvPr id="16" name="Text 10"/>
+          <p:cNvPr id="12" name="Text 9"/>
           <p:cNvSpPr/>
           <p:nvPr/>
         </p:nvSpPr>
@@ -9330,7 +9523,7 @@
                 <a:ea typeface="Calibri" pitchFamily="34" charset="-122"/>
                 <a:cs typeface="Calibri" pitchFamily="34" charset="-120"/>
               </a:rPr>
-              <a:t>EL CASO REAL — PLANTEAMIENTO</a:t>
+              <a:t>PIZARRÓN</a:t>
             </a:r>
             <a:endParaRPr lang="en-US" sz="1300" dirty="0"/>
           </a:p>
@@ -9369,15 +9562,76 @@
                 <a:ea typeface="Calibri" pitchFamily="34" charset="-122"/>
                 <a:cs typeface="Calibri" pitchFamily="34" charset="-120"/>
               </a:rPr>
-              <a:t>Masa-Resorte-Amortiguador, Ahora Forzado</a:t>
+              <a:t>Ejemplo — Anulador (Solución)</a:t>
             </a:r>
             <a:endParaRPr lang="en-US" sz="2900" dirty="0"/>
+          </a:p>
+        </p:txBody>
+      </p:sp>
+      <p:sp>
+        <p:nvSpPr>
+          <p:cNvPr id="4" name="Shape 2"/>
+          <p:cNvSpPr/>
+          <p:nvPr/>
+        </p:nvSpPr>
+        <p:spPr>
+          <a:xfrm>
+            <a:off x="548640" y="1645920"/>
+            <a:ext cx="11094415" cy="4023360"/>
+          </a:xfrm>
+          <a:prstGeom prst="roundRect">
+            <a:avLst>
+              <a:gd name="adj" fmla="val 2273"/>
+            </a:avLst>
+          </a:prstGeom>
+          <a:solidFill>
+            <a:srgbClr val="1E293B"/>
+          </a:solidFill>
+          <a:ln/>
+        </p:spPr>
+      </p:sp>
+      <p:sp>
+        <p:nvSpPr>
+          <p:cNvPr id="5" name="Text 3"/>
+          <p:cNvSpPr/>
+          <p:nvPr/>
+        </p:nvSpPr>
+        <p:spPr>
+          <a:xfrm>
+            <a:off x="822960" y="1783080"/>
+            <a:ext cx="10545775" cy="274320"/>
+          </a:xfrm>
+          <a:prstGeom prst="rect">
+            <a:avLst/>
+          </a:prstGeom>
+          <a:noFill/>
+          <a:ln/>
+        </p:spPr>
+        <p:txBody>
+          <a:bodyPr wrap="square" lIns="0" tIns="0" rIns="0" bIns="0" rtlCol="0" anchor="t"/>
+          <a:lstStyle/>
+          <a:p>
+            <a:pPr algn="l" indent="0" marL="0">
+              <a:buNone/>
+            </a:pPr>
+            <a:r>
+              <a:rPr lang="en-US" sz="1300" b="1" dirty="0">
+                <a:solidFill>
+                  <a:srgbClr val="22D3EE"/>
+                </a:solidFill>
+                <a:latin typeface="Calibri" pitchFamily="34" charset="0"/>
+                <a:ea typeface="Calibri" pitchFamily="34" charset="-122"/>
+                <a:cs typeface="Calibri" pitchFamily="34" charset="-120"/>
+              </a:rPr>
+              <a:t>RECAPITULANDO yᶜ</a:t>
+            </a:r>
+            <a:endParaRPr lang="en-US" sz="1300" dirty="0"/>
           </a:p>
         </p:txBody>
       </p:sp>
       <p:pic>
         <p:nvPicPr>
-          <p:cNvPr id="4" name="Image 0" descr="build/img/msd_forced.png">    </p:cNvPr>
+          <p:cNvPr id="6" name="Image 0" descr="build/eq/an_yc.png">    </p:cNvPr>
           <p:cNvPicPr>
             <a:picLocks noChangeAspect="1"/>
           </p:cNvPicPr>
@@ -9391,8 +9645,8 @@
         </p:blipFill>
         <p:spPr>
           <a:xfrm>
-            <a:off x="1401072" y="1737360"/>
-            <a:ext cx="4286121" cy="2377440"/>
+            <a:off x="822960" y="2103120"/>
+            <a:ext cx="3194761" cy="502920"/>
           </a:xfrm>
           <a:prstGeom prst="rect">
             <a:avLst/>
@@ -9401,34 +9655,46 @@
       </p:pic>
       <p:sp>
         <p:nvSpPr>
-          <p:cNvPr id="5" name="Shape 2"/>
-          <p:cNvSpPr/>
-          <p:nvPr/>
-        </p:nvSpPr>
-        <p:spPr>
-          <a:xfrm>
-            <a:off x="6859664" y="1600200"/>
-            <a:ext cx="4783391" cy="777240"/>
-          </a:xfrm>
-          <a:prstGeom prst="roundRect">
-            <a:avLst>
-              <a:gd name="adj" fmla="val 9412"/>
-            </a:avLst>
-          </a:prstGeom>
-          <a:solidFill>
-            <a:srgbClr val="0E3A44"/>
-          </a:solidFill>
-          <a:ln w="12700">
-            <a:solidFill>
-              <a:srgbClr val="06B6D4"/>
-            </a:solidFill>
-            <a:prstDash val="solid"/>
-          </a:ln>
-        </p:spPr>
+          <p:cNvPr id="7" name="Text 4"/>
+          <p:cNvSpPr/>
+          <p:nvPr/>
+        </p:nvSpPr>
+        <p:spPr>
+          <a:xfrm>
+            <a:off x="4389120" y="1783080"/>
+            <a:ext cx="6979615" cy="274320"/>
+          </a:xfrm>
+          <a:prstGeom prst="rect">
+            <a:avLst/>
+          </a:prstGeom>
+          <a:noFill/>
+          <a:ln/>
+        </p:spPr>
+        <p:txBody>
+          <a:bodyPr wrap="square" lIns="0" tIns="0" rIns="0" bIns="0" rtlCol="0" anchor="t"/>
+          <a:lstStyle/>
+          <a:p>
+            <a:pPr algn="l" indent="0" marL="0">
+              <a:buNone/>
+            </a:pPr>
+            <a:r>
+              <a:rPr lang="en-US" sz="1300" b="1" dirty="0">
+                <a:solidFill>
+                  <a:srgbClr val="22D3EE"/>
+                </a:solidFill>
+                <a:latin typeface="Calibri" pitchFamily="34" charset="0"/>
+                <a:ea typeface="Calibri" pitchFamily="34" charset="-122"/>
+                <a:cs typeface="Calibri" pitchFamily="34" charset="-120"/>
+              </a:rPr>
+              <a:t>FORMA DE yₚ (SIN LOS TÉRMINOS YA EN yᶜ)</a:t>
+            </a:r>
+            <a:endParaRPr lang="en-US" sz="1300" dirty="0"/>
+          </a:p>
+        </p:txBody>
       </p:sp>
       <p:pic>
         <p:nvPicPr>
-          <p:cNvPr id="6" name="Image 1" descr="build/eq/msd_setup.png">    </p:cNvPr>
+          <p:cNvPr id="8" name="Image 1" descr="build/eq/an_yp_form.png">    </p:cNvPr>
           <p:cNvPicPr>
             <a:picLocks noChangeAspect="1"/>
           </p:cNvPicPr>
@@ -9442,8 +9708,8 @@
         </p:blipFill>
         <p:spPr>
           <a:xfrm>
-            <a:off x="7473102" y="1737360"/>
-            <a:ext cx="3556514" cy="502920"/>
+            <a:off x="4389120" y="2103120"/>
+            <a:ext cx="3051761" cy="502920"/>
           </a:xfrm>
           <a:prstGeom prst="rect">
             <a:avLst/>
@@ -9452,14 +9718,14 @@
       </p:pic>
       <p:sp>
         <p:nvSpPr>
-          <p:cNvPr id="7" name="Text 3"/>
-          <p:cNvSpPr/>
-          <p:nvPr/>
-        </p:nvSpPr>
-        <p:spPr>
-          <a:xfrm>
-            <a:off x="6859664" y="2606040"/>
-            <a:ext cx="4783391" cy="777240"/>
+          <p:cNvPr id="9" name="Text 5"/>
+          <p:cNvSpPr/>
+          <p:nvPr/>
+        </p:nvSpPr>
+        <p:spPr>
+          <a:xfrm>
+            <a:off x="822960" y="2788920"/>
+            <a:ext cx="10545775" cy="502920"/>
           </a:xfrm>
           <a:prstGeom prst="rect">
             <a:avLst/>
@@ -9478,7 +9744,7 @@
               <a:buNone/>
             </a:pPr>
             <a:r>
-              <a:rPr lang="en-US" sz="1300" dirty="0">
+              <a:rPr lang="en-US" sz="1350" dirty="0">
                 <a:solidFill>
                   <a:srgbClr val="CBD5E1"/>
                 </a:solidFill>
@@ -9486,84 +9752,186 @@
                 <a:ea typeface="Calibri" pitchFamily="34" charset="-122"/>
                 <a:cs typeface="Calibri" pitchFamily="34" charset="-120"/>
               </a:rPr>
-              <a:t>Es la misma ecuación característica que en la Diapositiva 13 — ahora con una fuerza constante empujando el sistema.</a:t>
-            </a:r>
-            <a:endParaRPr lang="en-US" sz="1300" dirty="0"/>
-          </a:p>
-        </p:txBody>
-      </p:sp>
-      <p:sp>
-        <p:nvSpPr>
-          <p:cNvPr id="8" name="Shape 4"/>
-          <p:cNvSpPr/>
-          <p:nvPr/>
-        </p:nvSpPr>
-        <p:spPr>
-          <a:xfrm>
-            <a:off x="548640" y="4846320"/>
-            <a:ext cx="11094415" cy="1051560"/>
-          </a:xfrm>
-          <a:prstGeom prst="roundRect">
-            <a:avLst>
-              <a:gd name="adj" fmla="val 6957"/>
-            </a:avLst>
-          </a:prstGeom>
-          <a:solidFill>
-            <a:srgbClr val="2E2350"/>
-          </a:solidFill>
-          <a:ln w="12700">
-            <a:solidFill>
-              <a:srgbClr val="8B5CF6"/>
-            </a:solidFill>
-            <a:prstDash val="solid"/>
-          </a:ln>
-        </p:spPr>
-      </p:sp>
-      <p:sp>
-        <p:nvSpPr>
-          <p:cNvPr id="9" name="Text 5"/>
-          <p:cNvSpPr/>
-          <p:nvPr/>
-        </p:nvSpPr>
-        <p:spPr>
-          <a:xfrm>
-            <a:off x="777240" y="4846320"/>
-            <a:ext cx="10637215" cy="1051560"/>
-          </a:xfrm>
-          <a:prstGeom prst="rect">
-            <a:avLst/>
-          </a:prstGeom>
-          <a:noFill/>
-          <a:ln/>
-        </p:spPr>
-        <p:txBody>
-          <a:bodyPr wrap="square" lIns="0" tIns="0" rIns="0" bIns="0" rtlCol="0" anchor="ctr"/>
+              <a:t>Sustituyendo en la ecuación original y agrupando por potencias de x: de x², −2C=4; de x¹, −2C−2B=0; de x⁰, 2C−B−2A=0.</a:t>
+            </a:r>
+            <a:endParaRPr lang="en-US" sz="1350" dirty="0"/>
+          </a:p>
+        </p:txBody>
+      </p:sp>
+      <p:pic>
+        <p:nvPicPr>
+          <p:cNvPr id="10" name="Image 2" descr="build/eq/an_coeffs.png">    </p:cNvPr>
+          <p:cNvPicPr>
+            <a:picLocks noChangeAspect="1"/>
+          </p:cNvPicPr>
+          <p:nvPr/>
+        </p:nvPicPr>
+        <p:blipFill>
+          <a:blip r:embed="rId3"/>
+          <a:stretch>
+            <a:fillRect/>
+          </a:stretch>
+        </p:blipFill>
+        <p:spPr>
+          <a:xfrm>
+            <a:off x="3818523" y="3337560"/>
+            <a:ext cx="4554650" cy="502920"/>
+          </a:xfrm>
+          <a:prstGeom prst="rect">
+            <a:avLst/>
+          </a:prstGeom>
+        </p:spPr>
+      </p:pic>
+      <p:sp>
+        <p:nvSpPr>
+          <p:cNvPr id="11" name="Text 6"/>
+          <p:cNvSpPr/>
+          <p:nvPr/>
+        </p:nvSpPr>
+        <p:spPr>
+          <a:xfrm>
+            <a:off x="822960" y="3977640"/>
+            <a:ext cx="10545775" cy="320040"/>
+          </a:xfrm>
+          <a:prstGeom prst="rect">
+            <a:avLst/>
+          </a:prstGeom>
+          <a:noFill/>
+          <a:ln/>
+        </p:spPr>
+        <p:txBody>
+          <a:bodyPr wrap="square" lIns="0" tIns="0" rIns="0" bIns="0" rtlCol="0" anchor="t"/>
           <a:lstStyle/>
           <a:p>
             <a:pPr algn="l" indent="0" marL="0">
               <a:lnSpc>
-                <a:spcPct val="115000"/>
+                <a:spcPct val="112000"/>
               </a:lnSpc>
               <a:buNone/>
             </a:pPr>
             <a:r>
-              <a:rPr lang="en-US" sz="1350" b="1" dirty="0">
-                <a:solidFill>
-                  <a:srgbClr val="A78BFA"/>
-                </a:solidFill>
-                <a:latin typeface="Calibri" pitchFamily="34" charset="0"/>
-                <a:ea typeface="Calibri" pitchFamily="34" charset="-122"/>
-                <a:cs typeface="Calibri" pitchFamily="34" charset="-120"/>
-              </a:rPr>
-              <a:t>Encuentren xᶜ, el anulador de la constante, la forma de xₚ, y la solución completa. Resuélvanlo en su cuaderno — la solución está en la siguiente diapositiva.</a:t>
-            </a:r>
-            <a:endParaRPr lang="en-US" sz="1350" dirty="0"/>
-          </a:p>
-        </p:txBody>
-      </p:sp>
-      <p:sp>
-        <p:nvSpPr>
-          <p:cNvPr id="10" name="Text 6"/>
+              <a:rPr lang="en-US" sz="1400" dirty="0">
+                <a:solidFill>
+                  <a:srgbClr val="CBD5E1"/>
+                </a:solidFill>
+                <a:latin typeface="Calibri" pitchFamily="34" charset="0"/>
+                <a:ea typeface="Calibri" pitchFamily="34" charset="-122"/>
+                <a:cs typeface="Calibri" pitchFamily="34" charset="-120"/>
+              </a:rPr>
+              <a:t>La solución particular:</a:t>
+            </a:r>
+            <a:endParaRPr lang="en-US" sz="1400" dirty="0"/>
+          </a:p>
+        </p:txBody>
+      </p:sp>
+      <p:sp>
+        <p:nvSpPr>
+          <p:cNvPr id="12" name="Text 7"/>
+          <p:cNvSpPr/>
+          <p:nvPr/>
+        </p:nvSpPr>
+        <p:spPr>
+          <a:xfrm>
+            <a:off x="822960" y="4297680"/>
+            <a:ext cx="10545775" cy="411480"/>
+          </a:xfrm>
+          <a:prstGeom prst="rect">
+            <a:avLst/>
+          </a:prstGeom>
+          <a:noFill/>
+          <a:ln/>
+        </p:spPr>
+        <p:txBody>
+          <a:bodyPr wrap="square" lIns="0" tIns="0" rIns="0" bIns="0" rtlCol="0" anchor="t"/>
+          <a:lstStyle/>
+          <a:p>
+            <a:pPr algn="l" indent="0" marL="0">
+              <a:lnSpc>
+                <a:spcPct val="112000"/>
+              </a:lnSpc>
+              <a:buNone/>
+            </a:pPr>
+            <a:r>
+              <a:rPr lang="en-US" sz="2000" b="1" dirty="0">
+                <a:solidFill>
+                  <a:srgbClr val="F8FAFC"/>
+                </a:solidFill>
+                <a:latin typeface="Calibri" pitchFamily="34" charset="0"/>
+                <a:ea typeface="Calibri" pitchFamily="34" charset="-122"/>
+                <a:cs typeface="Calibri" pitchFamily="34" charset="-120"/>
+              </a:rPr>
+              <a:t>yₚ = −3 + 2x − 2x²</a:t>
+            </a:r>
+            <a:endParaRPr lang="en-US" sz="2000" dirty="0"/>
+          </a:p>
+        </p:txBody>
+      </p:sp>
+      <p:sp>
+        <p:nvSpPr>
+          <p:cNvPr id="13" name="Text 8"/>
+          <p:cNvSpPr/>
+          <p:nvPr/>
+        </p:nvSpPr>
+        <p:spPr>
+          <a:xfrm>
+            <a:off x="822960" y="4800600"/>
+            <a:ext cx="10545775" cy="274320"/>
+          </a:xfrm>
+          <a:prstGeom prst="rect">
+            <a:avLst/>
+          </a:prstGeom>
+          <a:noFill/>
+          <a:ln/>
+        </p:spPr>
+        <p:txBody>
+          <a:bodyPr wrap="square" lIns="0" tIns="0" rIns="0" bIns="0" rtlCol="0" anchor="t"/>
+          <a:lstStyle/>
+          <a:p>
+            <a:pPr algn="l" indent="0" marL="0">
+              <a:buNone/>
+            </a:pPr>
+            <a:r>
+              <a:rPr lang="en-US" sz="1300" b="1" dirty="0">
+                <a:solidFill>
+                  <a:srgbClr val="22D3EE"/>
+                </a:solidFill>
+                <a:latin typeface="Calibri" pitchFamily="34" charset="0"/>
+                <a:ea typeface="Calibri" pitchFamily="34" charset="-122"/>
+                <a:cs typeface="Calibri" pitchFamily="34" charset="-120"/>
+              </a:rPr>
+              <a:t>SOLUCIÓN GENERAL COMPLETA</a:t>
+            </a:r>
+            <a:endParaRPr lang="en-US" sz="1300" dirty="0"/>
+          </a:p>
+        </p:txBody>
+      </p:sp>
+      <p:pic>
+        <p:nvPicPr>
+          <p:cNvPr id="14" name="Image 3" descr="build/eq/an_final.png">    </p:cNvPr>
+          <p:cNvPicPr>
+            <a:picLocks noChangeAspect="1"/>
+          </p:cNvPicPr>
+          <p:nvPr/>
+        </p:nvPicPr>
+        <p:blipFill>
+          <a:blip r:embed="rId4"/>
+          <a:stretch>
+            <a:fillRect/>
+          </a:stretch>
+        </p:blipFill>
+        <p:spPr>
+          <a:xfrm>
+            <a:off x="3381080" y="5120640"/>
+            <a:ext cx="5429534" cy="502920"/>
+          </a:xfrm>
+          <a:prstGeom prst="rect">
+            <a:avLst/>
+          </a:prstGeom>
+        </p:spPr>
+      </p:pic>
+      <p:sp>
+        <p:nvSpPr>
+          <p:cNvPr id="15" name="Text 9"/>
           <p:cNvSpPr/>
           <p:nvPr/>
         </p:nvSpPr>
@@ -9602,7 +9970,7 @@
       </p:sp>
       <p:sp>
         <p:nvSpPr>
-          <p:cNvPr id="11" name="Text 7"/>
+          <p:cNvPr id="16" name="Text 10"/>
           <p:cNvSpPr/>
           <p:nvPr/>
         </p:nvSpPr>
@@ -9704,7 +10072,7 @@
                 <a:ea typeface="Calibri" pitchFamily="34" charset="-122"/>
                 <a:cs typeface="Calibri" pitchFamily="34" charset="-120"/>
               </a:rPr>
-              <a:t>EL CASO REAL — SOLUCIÓN</a:t>
+              <a:t>EL CASO REAL — PLANTEAMIENTO</a:t>
             </a:r>
             <a:endParaRPr lang="en-US" sz="1300" dirty="0"/>
           </a:p>
@@ -9749,20 +10117,44 @@
           </a:p>
         </p:txBody>
       </p:sp>
-      <p:sp>
-        <p:nvSpPr>
-          <p:cNvPr id="4" name="Shape 2"/>
-          <p:cNvSpPr/>
-          <p:nvPr/>
-        </p:nvSpPr>
-        <p:spPr>
-          <a:xfrm>
-            <a:off x="548640" y="1691640"/>
-            <a:ext cx="11094415" cy="914400"/>
+      <p:pic>
+        <p:nvPicPr>
+          <p:cNvPr id="4" name="Image 0" descr="build/img/msd_forced.png">    </p:cNvPr>
+          <p:cNvPicPr>
+            <a:picLocks noChangeAspect="1"/>
+          </p:cNvPicPr>
+          <p:nvPr/>
+        </p:nvPicPr>
+        <p:blipFill>
+          <a:blip r:embed="rId1"/>
+          <a:stretch>
+            <a:fillRect/>
+          </a:stretch>
+        </p:blipFill>
+        <p:spPr>
+          <a:xfrm>
+            <a:off x="1401072" y="1737360"/>
+            <a:ext cx="4286121" cy="2377440"/>
+          </a:xfrm>
+          <a:prstGeom prst="rect">
+            <a:avLst/>
+          </a:prstGeom>
+        </p:spPr>
+      </p:pic>
+      <p:sp>
+        <p:nvSpPr>
+          <p:cNvPr id="5" name="Shape 2"/>
+          <p:cNvSpPr/>
+          <p:nvPr/>
+        </p:nvSpPr>
+        <p:spPr>
+          <a:xfrm>
+            <a:off x="6859664" y="1600200"/>
+            <a:ext cx="4783391" cy="777240"/>
           </a:xfrm>
           <a:prstGeom prst="roundRect">
             <a:avLst>
-              <a:gd name="adj" fmla="val 8000"/>
+              <a:gd name="adj" fmla="val 9412"/>
             </a:avLst>
           </a:prstGeom>
           <a:solidFill>
@@ -9778,73 +10170,7 @@
       </p:sp>
       <p:pic>
         <p:nvPicPr>
-          <p:cNvPr id="5" name="Image 0" descr="build/eq/msd_xc.png">    </p:cNvPr>
-          <p:cNvPicPr>
-            <a:picLocks noChangeAspect="1"/>
-          </p:cNvPicPr>
-          <p:nvPr/>
-        </p:nvPicPr>
-        <p:blipFill>
-          <a:blip r:embed="rId1"/>
-          <a:stretch>
-            <a:fillRect/>
-          </a:stretch>
-        </p:blipFill>
-        <p:spPr>
-          <a:xfrm>
-            <a:off x="3107326" y="1828800"/>
-            <a:ext cx="5977043" cy="640080"/>
-          </a:xfrm>
-          <a:prstGeom prst="rect">
-            <a:avLst/>
-          </a:prstGeom>
-        </p:spPr>
-      </p:pic>
-      <p:sp>
-        <p:nvSpPr>
-          <p:cNvPr id="6" name="Text 3"/>
-          <p:cNvSpPr/>
-          <p:nvPr/>
-        </p:nvSpPr>
-        <p:spPr>
-          <a:xfrm>
-            <a:off x="548640" y="2788920"/>
-            <a:ext cx="11094415" cy="777240"/>
-          </a:xfrm>
-          <a:prstGeom prst="rect">
-            <a:avLst/>
-          </a:prstGeom>
-          <a:noFill/>
-          <a:ln/>
-        </p:spPr>
-        <p:txBody>
-          <a:bodyPr wrap="square" lIns="0" tIns="0" rIns="0" bIns="0" rtlCol="0" anchor="t"/>
-          <a:lstStyle/>
-          <a:p>
-            <a:pPr algn="l" indent="0" marL="0">
-              <a:lnSpc>
-                <a:spcPct val="112000"/>
-              </a:lnSpc>
-              <a:buNone/>
-            </a:pPr>
-            <a:r>
-              <a:rPr lang="en-US" sz="1450" dirty="0">
-                <a:solidFill>
-                  <a:srgbClr val="CBD5E1"/>
-                </a:solidFill>
-                <a:latin typeface="Calibri" pitchFamily="34" charset="0"/>
-                <a:ea typeface="Calibri" pitchFamily="34" charset="-122"/>
-                <a:cs typeface="Calibri" pitchFamily="34" charset="-120"/>
-              </a:rPr>
-              <a:t>El anulador de la constante 26 es D; aplicando el algoritmo completo, la forma de xₚ es simplemente una constante, y sustituyendo se obtiene xₚ=2. La solución general:</a:t>
-            </a:r>
-            <a:endParaRPr lang="en-US" sz="1450" dirty="0"/>
-          </a:p>
-        </p:txBody>
-      </p:sp>
-      <p:pic>
-        <p:nvPicPr>
-          <p:cNvPr id="7" name="Image 1" descr="build/eq/msd_final.png">    </p:cNvPr>
+          <p:cNvPr id="6" name="Image 1" descr="build/eq/msd_setup.png">    </p:cNvPr>
           <p:cNvPicPr>
             <a:picLocks noChangeAspect="1"/>
           </p:cNvPicPr>
@@ -9858,8 +10184,8 @@
         </p:blipFill>
         <p:spPr>
           <a:xfrm>
-            <a:off x="3151194" y="3611880"/>
-            <a:ext cx="5889308" cy="548640"/>
+            <a:off x="7473102" y="1737360"/>
+            <a:ext cx="3556514" cy="502920"/>
           </a:xfrm>
           <a:prstGeom prst="rect">
             <a:avLst/>
@@ -9868,18 +10194,60 @@
       </p:pic>
       <p:sp>
         <p:nvSpPr>
+          <p:cNvPr id="7" name="Text 3"/>
+          <p:cNvSpPr/>
+          <p:nvPr/>
+        </p:nvSpPr>
+        <p:spPr>
+          <a:xfrm>
+            <a:off x="6859664" y="2606040"/>
+            <a:ext cx="4783391" cy="777240"/>
+          </a:xfrm>
+          <a:prstGeom prst="rect">
+            <a:avLst/>
+          </a:prstGeom>
+          <a:noFill/>
+          <a:ln/>
+        </p:spPr>
+        <p:txBody>
+          <a:bodyPr wrap="square" lIns="0" tIns="0" rIns="0" bIns="0" rtlCol="0" anchor="t"/>
+          <a:lstStyle/>
+          <a:p>
+            <a:pPr algn="l" indent="0" marL="0">
+              <a:lnSpc>
+                <a:spcPct val="112000"/>
+              </a:lnSpc>
+              <a:buNone/>
+            </a:pPr>
+            <a:r>
+              <a:rPr lang="en-US" sz="1300" dirty="0">
+                <a:solidFill>
+                  <a:srgbClr val="CBD5E1"/>
+                </a:solidFill>
+                <a:latin typeface="Calibri" pitchFamily="34" charset="0"/>
+                <a:ea typeface="Calibri" pitchFamily="34" charset="-122"/>
+                <a:cs typeface="Calibri" pitchFamily="34" charset="-120"/>
+              </a:rPr>
+              <a:t>Es la misma ecuación característica que en la Diapositiva 13 — ahora con una fuerza constante empujando el sistema.</a:t>
+            </a:r>
+            <a:endParaRPr lang="en-US" sz="1300" dirty="0"/>
+          </a:p>
+        </p:txBody>
+      </p:sp>
+      <p:sp>
+        <p:nvSpPr>
           <p:cNvPr id="8" name="Shape 4"/>
           <p:cNvSpPr/>
           <p:nvPr/>
         </p:nvSpPr>
         <p:spPr>
           <a:xfrm>
-            <a:off x="548640" y="4343400"/>
-            <a:ext cx="11094415" cy="1600200"/>
+            <a:off x="548640" y="4846320"/>
+            <a:ext cx="11094415" cy="1051560"/>
           </a:xfrm>
           <a:prstGeom prst="roundRect">
             <a:avLst>
-              <a:gd name="adj" fmla="val 4571"/>
+              <a:gd name="adj" fmla="val 6957"/>
             </a:avLst>
           </a:prstGeom>
           <a:solidFill>
@@ -9901,8 +10269,8 @@
         </p:nvSpPr>
         <p:spPr>
           <a:xfrm>
-            <a:off x="777240" y="4343400"/>
-            <a:ext cx="10637215" cy="1600200"/>
+            <a:off x="777240" y="4846320"/>
+            <a:ext cx="10637215" cy="1051560"/>
           </a:xfrm>
           <a:prstGeom prst="rect">
             <a:avLst/>
@@ -9921,7 +10289,7 @@
               <a:buNone/>
             </a:pPr>
             <a:r>
-              <a:rPr lang="en-US" sz="1300" b="1" dirty="0">
+              <a:rPr lang="en-US" sz="1350" b="1" dirty="0">
                 <a:solidFill>
                   <a:srgbClr val="A78BFA"/>
                 </a:solidFill>
@@ -9929,9 +10297,9 @@
                 <a:ea typeface="Calibri" pitchFamily="34" charset="-122"/>
                 <a:cs typeface="Calibri" pitchFamily="34" charset="-120"/>
               </a:rPr>
-              <a:t>Sin importar C₁ y C₂, el término exponencial decae a cero cuando t→∞: el sistema termina asentándose en un NUEVO EQUILIBRIO, desplazado 2 unidades. xᶜ es la respuesta transitoria que se apaga; xₚ es hacia dónde se dirige el sistema a largo plazo.</a:t>
-            </a:r>
-            <a:endParaRPr lang="en-US" sz="1300" dirty="0"/>
+              <a:t>Encuentren xᶜ, el anulador de la constante, la forma de xₚ, y la solución completa. Resuélvanlo en su cuaderno — la solución está en la siguiente diapositiva.</a:t>
+            </a:r>
+            <a:endParaRPr lang="en-US" sz="1350" dirty="0"/>
           </a:p>
         </p:txBody>
       </p:sp>
@@ -10072,13 +10440,13 @@
             <a:r>
               <a:rPr lang="en-US" sz="1300" b="1" spc="150" kern="0" dirty="0">
                 <a:solidFill>
-                  <a:srgbClr val="FBBF24"/>
-                </a:solidFill>
-                <a:latin typeface="Calibri" pitchFamily="34" charset="0"/>
-                <a:ea typeface="Calibri" pitchFamily="34" charset="-122"/>
-                <a:cs typeface="Calibri" pitchFamily="34" charset="-120"/>
-              </a:rPr>
-              <a:t>ANTES DE SEGUIR</a:t>
+                  <a:srgbClr val="22D3EE"/>
+                </a:solidFill>
+                <a:latin typeface="Calibri" pitchFamily="34" charset="0"/>
+                <a:ea typeface="Calibri" pitchFamily="34" charset="-122"/>
+                <a:cs typeface="Calibri" pitchFamily="34" charset="-120"/>
+              </a:rPr>
+              <a:t>EL CASO REAL — SOLUCIÓN</a:t>
             </a:r>
             <a:endParaRPr lang="en-US" sz="1300" dirty="0"/>
           </a:p>
@@ -10117,7 +10485,7 @@
                 <a:ea typeface="Calibri" pitchFamily="34" charset="-122"/>
                 <a:cs typeface="Calibri" pitchFamily="34" charset="-120"/>
               </a:rPr>
-              <a:t>Errores Comunes</a:t>
+              <a:t>Masa-Resorte-Amortiguador, Ahora Forzado</a:t>
             </a:r>
             <a:endParaRPr lang="en-US" sz="2900" dirty="0"/>
           </a:p>
@@ -10131,133 +10499,59 @@
         </p:nvSpPr>
         <p:spPr>
           <a:xfrm>
-            <a:off x="548640" y="1600200"/>
-            <a:ext cx="5387188" cy="1783080"/>
+            <a:off x="548640" y="1691640"/>
+            <a:ext cx="11094415" cy="914400"/>
           </a:xfrm>
           <a:prstGeom prst="roundRect">
             <a:avLst>
-              <a:gd name="adj" fmla="val 4103"/>
+              <a:gd name="adj" fmla="val 8000"/>
             </a:avLst>
           </a:prstGeom>
           <a:solidFill>
-            <a:srgbClr val="3A2A0E"/>
+            <a:srgbClr val="0E3A44"/>
           </a:solidFill>
           <a:ln w="12700">
             <a:solidFill>
-              <a:srgbClr val="F59E0B"/>
+              <a:srgbClr val="06B6D4"/>
             </a:solidFill>
             <a:prstDash val="solid"/>
           </a:ln>
         </p:spPr>
       </p:sp>
-      <p:sp>
-        <p:nvSpPr>
-          <p:cNvPr id="5" name="Shape 3"/>
-          <p:cNvSpPr/>
-          <p:nvPr/>
-        </p:nvSpPr>
-        <p:spPr>
-          <a:xfrm>
-            <a:off x="777240" y="1783080"/>
-            <a:ext cx="457200" cy="457200"/>
-          </a:xfrm>
-          <a:prstGeom prst="rect">
-            <a:avLst/>
-          </a:prstGeom>
-          <a:solidFill>
-            <a:srgbClr val="FBBF24"/>
-          </a:solidFill>
-          <a:ln/>
-        </p:spPr>
-      </p:sp>
-      <p:sp>
-        <p:nvSpPr>
-          <p:cNvPr id="6" name="Text 4"/>
-          <p:cNvSpPr/>
-          <p:nvPr/>
-        </p:nvSpPr>
-        <p:spPr>
-          <a:xfrm>
-            <a:off x="777240" y="1783080"/>
-            <a:ext cx="457200" cy="457200"/>
-          </a:xfrm>
-          <a:prstGeom prst="rect">
-            <a:avLst/>
-          </a:prstGeom>
-          <a:noFill/>
-          <a:ln/>
-        </p:spPr>
-        <p:txBody>
-          <a:bodyPr wrap="square" lIns="0" tIns="0" rIns="0" bIns="0" rtlCol="0" anchor="ctr"/>
-          <a:lstStyle/>
-          <a:p>
-            <a:pPr algn="ctr" indent="0" marL="0">
-              <a:buNone/>
-            </a:pPr>
-            <a:r>
-              <a:rPr lang="en-US" sz="2000" dirty="0">
-                <a:solidFill>
-                  <a:srgbClr val="000000"/>
-                </a:solidFill>
-              </a:rPr>
-              <a:t>⚠</a:t>
-            </a:r>
-            <a:endParaRPr lang="en-US" sz="2000" dirty="0"/>
-          </a:p>
-        </p:txBody>
-      </p:sp>
-      <p:sp>
-        <p:nvSpPr>
-          <p:cNvPr id="7" name="Text 5"/>
-          <p:cNvSpPr/>
-          <p:nvPr/>
-        </p:nvSpPr>
-        <p:spPr>
-          <a:xfrm>
-            <a:off x="1371600" y="1783080"/>
-            <a:ext cx="4335628" cy="502920"/>
-          </a:xfrm>
-          <a:prstGeom prst="rect">
-            <a:avLst/>
-          </a:prstGeom>
-          <a:noFill/>
-          <a:ln/>
-        </p:spPr>
-        <p:txBody>
-          <a:bodyPr wrap="square" lIns="0" tIns="0" rIns="0" bIns="0" rtlCol="0" anchor="ctr"/>
-          <a:lstStyle/>
-          <a:p>
-            <a:pPr indent="0" marL="0">
-              <a:lnSpc>
-                <a:spcPct val="105000"/>
-              </a:lnSpc>
-              <a:buNone/>
-            </a:pPr>
-            <a:r>
-              <a:rPr lang="en-US" sz="1400" b="1" dirty="0">
-                <a:solidFill>
-                  <a:srgbClr val="F8FAFC"/>
-                </a:solidFill>
-                <a:latin typeface="Calibri" pitchFamily="34" charset="0"/>
-                <a:ea typeface="Calibri" pitchFamily="34" charset="-122"/>
-                <a:cs typeface="Calibri" pitchFamily="34" charset="-120"/>
-              </a:rPr>
-              <a:t>Cauchy-Euler no es coeficientes constantes</a:t>
-            </a:r>
-            <a:endParaRPr lang="en-US" sz="1400" dirty="0"/>
-          </a:p>
-        </p:txBody>
-      </p:sp>
-      <p:sp>
-        <p:nvSpPr>
-          <p:cNvPr id="8" name="Text 6"/>
-          <p:cNvSpPr/>
-          <p:nvPr/>
-        </p:nvSpPr>
-        <p:spPr>
-          <a:xfrm>
-            <a:off x="822960" y="2468880"/>
-            <a:ext cx="4838548" cy="731520"/>
+      <p:pic>
+        <p:nvPicPr>
+          <p:cNvPr id="5" name="Image 0" descr="build/eq/msd_xc.png">    </p:cNvPr>
+          <p:cNvPicPr>
+            <a:picLocks noChangeAspect="1"/>
+          </p:cNvPicPr>
+          <p:nvPr/>
+        </p:nvPicPr>
+        <p:blipFill>
+          <a:blip r:embed="rId1"/>
+          <a:stretch>
+            <a:fillRect/>
+          </a:stretch>
+        </p:blipFill>
+        <p:spPr>
+          <a:xfrm>
+            <a:off x="3107326" y="1828800"/>
+            <a:ext cx="5977043" cy="640080"/>
+          </a:xfrm>
+          <a:prstGeom prst="rect">
+            <a:avLst/>
+          </a:prstGeom>
+        </p:spPr>
+      </p:pic>
+      <p:sp>
+        <p:nvSpPr>
+          <p:cNvPr id="6" name="Text 3"/>
+          <p:cNvSpPr/>
+          <p:nvPr/>
+        </p:nvSpPr>
+        <p:spPr>
+          <a:xfrm>
+            <a:off x="548640" y="2788920"/>
+            <a:ext cx="11094415" cy="777240"/>
           </a:xfrm>
           <a:prstGeom prst="rect">
             <a:avLst/>
@@ -10276,7 +10570,7 @@
               <a:buNone/>
             </a:pPr>
             <a:r>
-              <a:rPr lang="en-US" sz="1250" dirty="0">
+              <a:rPr lang="en-US" sz="1450" dirty="0">
                 <a:solidFill>
                   <a:srgbClr val="CBD5E1"/>
                 </a:solidFill>
@@ -10284,34 +10578,58 @@
                 <a:ea typeface="Calibri" pitchFamily="34" charset="-122"/>
                 <a:cs typeface="Calibri" pitchFamily="34" charset="-120"/>
               </a:rPr>
-              <a:t>La sustitución es y=xᵐ, no y=eʳˣ — son ecuaciones distintas, con trucos distintos; no las mezclen.</a:t>
-            </a:r>
-            <a:endParaRPr lang="en-US" sz="1250" dirty="0"/>
-          </a:p>
-        </p:txBody>
-      </p:sp>
-      <p:sp>
-        <p:nvSpPr>
-          <p:cNvPr id="9" name="Shape 7"/>
-          <p:cNvSpPr/>
-          <p:nvPr/>
-        </p:nvSpPr>
-        <p:spPr>
-          <a:xfrm>
-            <a:off x="6255868" y="1600200"/>
-            <a:ext cx="5387188" cy="1783080"/>
+              <a:t>El anulador de la constante 26 es D; aplicando el algoritmo completo, la forma de xₚ es simplemente una constante, y sustituyendo se obtiene xₚ=2. La solución general:</a:t>
+            </a:r>
+            <a:endParaRPr lang="en-US" sz="1450" dirty="0"/>
+          </a:p>
+        </p:txBody>
+      </p:sp>
+      <p:pic>
+        <p:nvPicPr>
+          <p:cNvPr id="7" name="Image 1" descr="build/eq/msd_final.png">    </p:cNvPr>
+          <p:cNvPicPr>
+            <a:picLocks noChangeAspect="1"/>
+          </p:cNvPicPr>
+          <p:nvPr/>
+        </p:nvPicPr>
+        <p:blipFill>
+          <a:blip r:embed="rId2"/>
+          <a:stretch>
+            <a:fillRect/>
+          </a:stretch>
+        </p:blipFill>
+        <p:spPr>
+          <a:xfrm>
+            <a:off x="3151194" y="3611880"/>
+            <a:ext cx="5889308" cy="548640"/>
+          </a:xfrm>
+          <a:prstGeom prst="rect">
+            <a:avLst/>
+          </a:prstGeom>
+        </p:spPr>
+      </p:pic>
+      <p:sp>
+        <p:nvSpPr>
+          <p:cNvPr id="8" name="Shape 4"/>
+          <p:cNvSpPr/>
+          <p:nvPr/>
+        </p:nvSpPr>
+        <p:spPr>
+          <a:xfrm>
+            <a:off x="548640" y="4343400"/>
+            <a:ext cx="11094415" cy="1600200"/>
           </a:xfrm>
           <a:prstGeom prst="roundRect">
             <a:avLst>
-              <a:gd name="adj" fmla="val 4103"/>
+              <a:gd name="adj" fmla="val 4571"/>
             </a:avLst>
           </a:prstGeom>
           <a:solidFill>
-            <a:srgbClr val="3A2A0E"/>
+            <a:srgbClr val="2E2350"/>
           </a:solidFill>
           <a:ln w="12700">
             <a:solidFill>
-              <a:srgbClr val="F59E0B"/>
+              <a:srgbClr val="8B5CF6"/>
             </a:solidFill>
             <a:prstDash val="solid"/>
           </a:ln>
@@ -10319,481 +10637,49 @@
       </p:sp>
       <p:sp>
         <p:nvSpPr>
-          <p:cNvPr id="10" name="Shape 8"/>
-          <p:cNvSpPr/>
-          <p:nvPr/>
-        </p:nvSpPr>
-        <p:spPr>
-          <a:xfrm>
-            <a:off x="6484468" y="1783080"/>
-            <a:ext cx="457200" cy="457200"/>
-          </a:xfrm>
-          <a:prstGeom prst="rect">
-            <a:avLst/>
-          </a:prstGeom>
-          <a:solidFill>
-            <a:srgbClr val="FBBF24"/>
-          </a:solidFill>
-          <a:ln/>
-        </p:spPr>
-      </p:sp>
-      <p:sp>
-        <p:nvSpPr>
-          <p:cNvPr id="11" name="Text 9"/>
-          <p:cNvSpPr/>
-          <p:nvPr/>
-        </p:nvSpPr>
-        <p:spPr>
-          <a:xfrm>
-            <a:off x="6484468" y="1783080"/>
-            <a:ext cx="457200" cy="457200"/>
-          </a:xfrm>
-          <a:prstGeom prst="rect">
-            <a:avLst/>
-          </a:prstGeom>
-          <a:noFill/>
-          <a:ln/>
-        </p:spPr>
-        <p:txBody>
-          <a:bodyPr wrap="square" lIns="0" tIns="0" rIns="0" bIns="0" rtlCol="0" anchor="ctr"/>
-          <a:lstStyle/>
-          <a:p>
-            <a:pPr algn="ctr" indent="0" marL="0">
-              <a:buNone/>
-            </a:pPr>
-            <a:r>
-              <a:rPr lang="en-US" sz="2000" dirty="0">
-                <a:solidFill>
-                  <a:srgbClr val="000000"/>
-                </a:solidFill>
-              </a:rPr>
-              <a:t>⚠</a:t>
-            </a:r>
-            <a:endParaRPr lang="en-US" sz="2000" dirty="0"/>
-          </a:p>
-        </p:txBody>
-      </p:sp>
-      <p:sp>
-        <p:nvSpPr>
-          <p:cNvPr id="12" name="Text 10"/>
-          <p:cNvSpPr/>
-          <p:nvPr/>
-        </p:nvSpPr>
-        <p:spPr>
-          <a:xfrm>
-            <a:off x="7078828" y="1783080"/>
-            <a:ext cx="4335628" cy="502920"/>
-          </a:xfrm>
-          <a:prstGeom prst="rect">
-            <a:avLst/>
-          </a:prstGeom>
-          <a:noFill/>
-          <a:ln/>
-        </p:spPr>
-        <p:txBody>
-          <a:bodyPr wrap="square" lIns="0" tIns="0" rIns="0" bIns="0" rtlCol="0" anchor="ctr"/>
-          <a:lstStyle/>
-          <a:p>
-            <a:pPr indent="0" marL="0">
-              <a:lnSpc>
-                <a:spcPct val="105000"/>
-              </a:lnSpc>
-              <a:buNone/>
-            </a:pPr>
-            <a:r>
-              <a:rPr lang="en-US" sz="1400" b="1" dirty="0">
-                <a:solidFill>
-                  <a:srgbClr val="F8FAFC"/>
-                </a:solidFill>
-                <a:latin typeface="Calibri" pitchFamily="34" charset="0"/>
-                <a:ea typeface="Calibri" pitchFamily="34" charset="-122"/>
-                <a:cs typeface="Calibri" pitchFamily="34" charset="-120"/>
-              </a:rPr>
-              <a:t>Olvidar revisar contra yᶜ</a:t>
-            </a:r>
-            <a:endParaRPr lang="en-US" sz="1400" dirty="0"/>
-          </a:p>
-        </p:txBody>
-      </p:sp>
-      <p:sp>
-        <p:nvSpPr>
-          <p:cNvPr id="13" name="Text 11"/>
-          <p:cNvSpPr/>
-          <p:nvPr/>
-        </p:nvSpPr>
-        <p:spPr>
-          <a:xfrm>
-            <a:off x="6530188" y="2468880"/>
-            <a:ext cx="4838548" cy="731520"/>
-          </a:xfrm>
-          <a:prstGeom prst="rect">
-            <a:avLst/>
-          </a:prstGeom>
-          <a:noFill/>
-          <a:ln/>
-        </p:spPr>
-        <p:txBody>
-          <a:bodyPr wrap="square" lIns="0" tIns="0" rIns="0" bIns="0" rtlCol="0" anchor="t"/>
+          <p:cNvPr id="9" name="Text 5"/>
+          <p:cNvSpPr/>
+          <p:nvPr/>
+        </p:nvSpPr>
+        <p:spPr>
+          <a:xfrm>
+            <a:off x="777240" y="4343400"/>
+            <a:ext cx="10637215" cy="1600200"/>
+          </a:xfrm>
+          <a:prstGeom prst="rect">
+            <a:avLst/>
+          </a:prstGeom>
+          <a:noFill/>
+          <a:ln/>
+        </p:spPr>
+        <p:txBody>
+          <a:bodyPr wrap="square" lIns="0" tIns="0" rIns="0" bIns="0" rtlCol="0" anchor="ctr"/>
           <a:lstStyle/>
           <a:p>
             <a:pPr algn="l" indent="0" marL="0">
               <a:lnSpc>
-                <a:spcPct val="112000"/>
+                <a:spcPct val="115000"/>
               </a:lnSpc>
               <a:buNone/>
             </a:pPr>
             <a:r>
-              <a:rPr lang="en-US" sz="1250" dirty="0">
-                <a:solidFill>
-                  <a:srgbClr val="CBD5E1"/>
-                </a:solidFill>
-                <a:latin typeface="Calibri" pitchFamily="34" charset="0"/>
-                <a:ea typeface="Calibri" pitchFamily="34" charset="-122"/>
-                <a:cs typeface="Calibri" pitchFamily="34" charset="-120"/>
-              </a:rPr>
-              <a:t>Si un término de la solución de orden mayor ya está en yᶜ y no lo eliminan, el sistema de coeficientes no va a tener solución.</a:t>
-            </a:r>
-            <a:endParaRPr lang="en-US" sz="1250" dirty="0"/>
-          </a:p>
-        </p:txBody>
-      </p:sp>
-      <p:sp>
-        <p:nvSpPr>
-          <p:cNvPr id="14" name="Shape 12"/>
-          <p:cNvSpPr/>
-          <p:nvPr/>
-        </p:nvSpPr>
-        <p:spPr>
-          <a:xfrm>
-            <a:off x="548640" y="3657600"/>
-            <a:ext cx="5387188" cy="1783080"/>
-          </a:xfrm>
-          <a:prstGeom prst="roundRect">
-            <a:avLst>
-              <a:gd name="adj" fmla="val 4103"/>
-            </a:avLst>
-          </a:prstGeom>
-          <a:solidFill>
-            <a:srgbClr val="3A2A0E"/>
-          </a:solidFill>
-          <a:ln w="12700">
-            <a:solidFill>
-              <a:srgbClr val="F59E0B"/>
-            </a:solidFill>
-            <a:prstDash val="solid"/>
-          </a:ln>
-        </p:spPr>
-      </p:sp>
-      <p:sp>
-        <p:nvSpPr>
-          <p:cNvPr id="15" name="Shape 13"/>
-          <p:cNvSpPr/>
-          <p:nvPr/>
-        </p:nvSpPr>
-        <p:spPr>
-          <a:xfrm>
-            <a:off x="777240" y="3840480"/>
-            <a:ext cx="457200" cy="457200"/>
-          </a:xfrm>
-          <a:prstGeom prst="rect">
-            <a:avLst/>
-          </a:prstGeom>
-          <a:solidFill>
-            <a:srgbClr val="FBBF24"/>
-          </a:solidFill>
-          <a:ln/>
-        </p:spPr>
-      </p:sp>
-      <p:sp>
-        <p:nvSpPr>
-          <p:cNvPr id="16" name="Text 14"/>
-          <p:cNvSpPr/>
-          <p:nvPr/>
-        </p:nvSpPr>
-        <p:spPr>
-          <a:xfrm>
-            <a:off x="777240" y="3840480"/>
-            <a:ext cx="457200" cy="457200"/>
-          </a:xfrm>
-          <a:prstGeom prst="rect">
-            <a:avLst/>
-          </a:prstGeom>
-          <a:noFill/>
-          <a:ln/>
-        </p:spPr>
-        <p:txBody>
-          <a:bodyPr wrap="square" lIns="0" tIns="0" rIns="0" bIns="0" rtlCol="0" anchor="ctr"/>
-          <a:lstStyle/>
-          <a:p>
-            <a:pPr algn="ctr" indent="0" marL="0">
-              <a:buNone/>
-            </a:pPr>
-            <a:r>
-              <a:rPr lang="en-US" sz="2000" dirty="0">
-                <a:solidFill>
-                  <a:srgbClr val="000000"/>
-                </a:solidFill>
-              </a:rPr>
-              <a:t>⚠</a:t>
-            </a:r>
-            <a:endParaRPr lang="en-US" sz="2000" dirty="0"/>
-          </a:p>
-        </p:txBody>
-      </p:sp>
-      <p:sp>
-        <p:nvSpPr>
-          <p:cNvPr id="17" name="Text 15"/>
-          <p:cNvSpPr/>
-          <p:nvPr/>
-        </p:nvSpPr>
-        <p:spPr>
-          <a:xfrm>
-            <a:off x="1371600" y="3840480"/>
-            <a:ext cx="4335628" cy="502920"/>
-          </a:xfrm>
-          <a:prstGeom prst="rect">
-            <a:avLst/>
-          </a:prstGeom>
-          <a:noFill/>
-          <a:ln/>
-        </p:spPr>
-        <p:txBody>
-          <a:bodyPr wrap="square" lIns="0" tIns="0" rIns="0" bIns="0" rtlCol="0" anchor="ctr"/>
-          <a:lstStyle/>
-          <a:p>
-            <a:pPr indent="0" marL="0">
-              <a:lnSpc>
-                <a:spcPct val="105000"/>
-              </a:lnSpc>
-              <a:buNone/>
-            </a:pPr>
-            <a:r>
-              <a:rPr lang="en-US" sz="1400" b="1" dirty="0">
-                <a:solidFill>
-                  <a:srgbClr val="F8FAFC"/>
-                </a:solidFill>
-                <a:latin typeface="Calibri" pitchFamily="34" charset="0"/>
-                <a:ea typeface="Calibri" pitchFamily="34" charset="-122"/>
-                <a:cs typeface="Calibri" pitchFamily="34" charset="-120"/>
-              </a:rPr>
-              <a:t>Anular solo un lado</a:t>
-            </a:r>
-            <a:endParaRPr lang="en-US" sz="1400" dirty="0"/>
-          </a:p>
-        </p:txBody>
-      </p:sp>
-      <p:sp>
-        <p:nvSpPr>
-          <p:cNvPr id="18" name="Text 16"/>
-          <p:cNvSpPr/>
-          <p:nvPr/>
-        </p:nvSpPr>
-        <p:spPr>
-          <a:xfrm>
-            <a:off x="822960" y="4526280"/>
-            <a:ext cx="4838548" cy="731520"/>
-          </a:xfrm>
-          <a:prstGeom prst="rect">
-            <a:avLst/>
-          </a:prstGeom>
-          <a:noFill/>
-          <a:ln/>
-        </p:spPr>
-        <p:txBody>
-          <a:bodyPr wrap="square" lIns="0" tIns="0" rIns="0" bIns="0" rtlCol="0" anchor="t"/>
-          <a:lstStyle/>
-          <a:p>
-            <a:pPr algn="l" indent="0" marL="0">
-              <a:lnSpc>
-                <a:spcPct val="112000"/>
-              </a:lnSpc>
-              <a:buNone/>
-            </a:pPr>
-            <a:r>
-              <a:rPr lang="en-US" sz="1250" dirty="0">
-                <a:solidFill>
-                  <a:srgbClr val="CBD5E1"/>
-                </a:solidFill>
-                <a:latin typeface="Calibri" pitchFamily="34" charset="0"/>
-                <a:ea typeface="Calibri" pitchFamily="34" charset="-122"/>
-                <a:cs typeface="Calibri" pitchFamily="34" charset="-120"/>
-              </a:rPr>
-              <a:t>El anulador debe aplicarse a AMBOS lados de la ecuación — no solo al lado derecho.</a:t>
-            </a:r>
-            <a:endParaRPr lang="en-US" sz="1250" dirty="0"/>
-          </a:p>
-        </p:txBody>
-      </p:sp>
-      <p:sp>
-        <p:nvSpPr>
-          <p:cNvPr id="19" name="Shape 17"/>
-          <p:cNvSpPr/>
-          <p:nvPr/>
-        </p:nvSpPr>
-        <p:spPr>
-          <a:xfrm>
-            <a:off x="6255868" y="3657600"/>
-            <a:ext cx="5387188" cy="1783080"/>
-          </a:xfrm>
-          <a:prstGeom prst="roundRect">
-            <a:avLst>
-              <a:gd name="adj" fmla="val 4103"/>
-            </a:avLst>
-          </a:prstGeom>
-          <a:solidFill>
-            <a:srgbClr val="3A2A0E"/>
-          </a:solidFill>
-          <a:ln w="12700">
-            <a:solidFill>
-              <a:srgbClr val="F59E0B"/>
-            </a:solidFill>
-            <a:prstDash val="solid"/>
-          </a:ln>
-        </p:spPr>
-      </p:sp>
-      <p:sp>
-        <p:nvSpPr>
-          <p:cNvPr id="20" name="Shape 18"/>
-          <p:cNvSpPr/>
-          <p:nvPr/>
-        </p:nvSpPr>
-        <p:spPr>
-          <a:xfrm>
-            <a:off x="6484468" y="3840480"/>
-            <a:ext cx="457200" cy="457200"/>
-          </a:xfrm>
-          <a:prstGeom prst="rect">
-            <a:avLst/>
-          </a:prstGeom>
-          <a:solidFill>
-            <a:srgbClr val="FBBF24"/>
-          </a:solidFill>
-          <a:ln/>
-        </p:spPr>
-      </p:sp>
-      <p:sp>
-        <p:nvSpPr>
-          <p:cNvPr id="21" name="Text 19"/>
-          <p:cNvSpPr/>
-          <p:nvPr/>
-        </p:nvSpPr>
-        <p:spPr>
-          <a:xfrm>
-            <a:off x="6484468" y="3840480"/>
-            <a:ext cx="457200" cy="457200"/>
-          </a:xfrm>
-          <a:prstGeom prst="rect">
-            <a:avLst/>
-          </a:prstGeom>
-          <a:noFill/>
-          <a:ln/>
-        </p:spPr>
-        <p:txBody>
-          <a:bodyPr wrap="square" lIns="0" tIns="0" rIns="0" bIns="0" rtlCol="0" anchor="ctr"/>
-          <a:lstStyle/>
-          <a:p>
-            <a:pPr algn="ctr" indent="0" marL="0">
-              <a:buNone/>
-            </a:pPr>
-            <a:r>
-              <a:rPr lang="en-US" sz="2000" dirty="0">
-                <a:solidFill>
-                  <a:srgbClr val="000000"/>
-                </a:solidFill>
-              </a:rPr>
-              <a:t>⚠</a:t>
-            </a:r>
-            <a:endParaRPr lang="en-US" sz="2000" dirty="0"/>
-          </a:p>
-        </p:txBody>
-      </p:sp>
-      <p:sp>
-        <p:nvSpPr>
-          <p:cNvPr id="22" name="Text 20"/>
-          <p:cNvSpPr/>
-          <p:nvPr/>
-        </p:nvSpPr>
-        <p:spPr>
-          <a:xfrm>
-            <a:off x="7078828" y="3840480"/>
-            <a:ext cx="4335628" cy="502920"/>
-          </a:xfrm>
-          <a:prstGeom prst="rect">
-            <a:avLst/>
-          </a:prstGeom>
-          <a:noFill/>
-          <a:ln/>
-        </p:spPr>
-        <p:txBody>
-          <a:bodyPr wrap="square" lIns="0" tIns="0" rIns="0" bIns="0" rtlCol="0" anchor="ctr"/>
-          <a:lstStyle/>
-          <a:p>
-            <a:pPr indent="0" marL="0">
-              <a:lnSpc>
-                <a:spcPct val="105000"/>
-              </a:lnSpc>
-              <a:buNone/>
-            </a:pPr>
-            <a:r>
-              <a:rPr lang="en-US" sz="1400" b="1" dirty="0">
-                <a:solidFill>
-                  <a:srgbClr val="F8FAFC"/>
-                </a:solidFill>
-                <a:latin typeface="Calibri" pitchFamily="34" charset="0"/>
-                <a:ea typeface="Calibri" pitchFamily="34" charset="-122"/>
-                <a:cs typeface="Calibri" pitchFamily="34" charset="-120"/>
-              </a:rPr>
-              <a:t>Olvidar que Cauchy-Euler asume x&gt;0</a:t>
-            </a:r>
-            <a:endParaRPr lang="en-US" sz="1400" dirty="0"/>
-          </a:p>
-        </p:txBody>
-      </p:sp>
-      <p:sp>
-        <p:nvSpPr>
-          <p:cNvPr id="23" name="Text 21"/>
-          <p:cNvSpPr/>
-          <p:nvPr/>
-        </p:nvSpPr>
-        <p:spPr>
-          <a:xfrm>
-            <a:off x="6530188" y="4526280"/>
-            <a:ext cx="4838548" cy="731520"/>
-          </a:xfrm>
-          <a:prstGeom prst="rect">
-            <a:avLst/>
-          </a:prstGeom>
-          <a:noFill/>
-          <a:ln/>
-        </p:spPr>
-        <p:txBody>
-          <a:bodyPr wrap="square" lIns="0" tIns="0" rIns="0" bIns="0" rtlCol="0" anchor="t"/>
-          <a:lstStyle/>
-          <a:p>
-            <a:pPr algn="l" indent="0" marL="0">
-              <a:lnSpc>
-                <a:spcPct val="112000"/>
-              </a:lnSpc>
-              <a:buNone/>
-            </a:pPr>
-            <a:r>
-              <a:rPr lang="en-US" sz="1250" dirty="0">
-                <a:solidFill>
-                  <a:srgbClr val="CBD5E1"/>
-                </a:solidFill>
-                <a:latin typeface="Calibri" pitchFamily="34" charset="0"/>
-                <a:ea typeface="Calibri" pitchFamily="34" charset="-122"/>
-                <a:cs typeface="Calibri" pitchFamily="34" charset="-120"/>
-              </a:rPr>
-              <a:t>Para x&lt;0 se necesitan ajustes con |x| que no cubrimos hoy.</a:t>
-            </a:r>
-            <a:endParaRPr lang="en-US" sz="1250" dirty="0"/>
-          </a:p>
-        </p:txBody>
-      </p:sp>
-      <p:sp>
-        <p:nvSpPr>
-          <p:cNvPr id="24" name="Text 22"/>
+              <a:rPr lang="en-US" sz="1300" b="1" dirty="0">
+                <a:solidFill>
+                  <a:srgbClr val="A78BFA"/>
+                </a:solidFill>
+                <a:latin typeface="Calibri" pitchFamily="34" charset="0"/>
+                <a:ea typeface="Calibri" pitchFamily="34" charset="-122"/>
+                <a:cs typeface="Calibri" pitchFamily="34" charset="-120"/>
+              </a:rPr>
+              <a:t>Sin importar C₁ y C₂, el término exponencial decae a cero cuando t→∞: el sistema termina asentándose en un NUEVO EQUILIBRIO, desplazado 2 unidades. xᶜ es la respuesta transitoria que se apaga; xₚ es hacia dónde se dirige el sistema a largo plazo.</a:t>
+            </a:r>
+            <a:endParaRPr lang="en-US" sz="1300" dirty="0"/>
+          </a:p>
+        </p:txBody>
+      </p:sp>
+      <p:sp>
+        <p:nvSpPr>
+          <p:cNvPr id="10" name="Text 6"/>
           <p:cNvSpPr/>
           <p:nvPr/>
         </p:nvSpPr>
@@ -10832,7 +10718,7 @@
       </p:sp>
       <p:sp>
         <p:nvSpPr>
-          <p:cNvPr id="25" name="Text 23"/>
+          <p:cNvPr id="11" name="Text 7"/>
           <p:cNvSpPr/>
           <p:nvPr/>
         </p:nvSpPr>
@@ -10903,6 +10789,862 @@
       </p:grpSpPr>
       <p:sp>
         <p:nvSpPr>
+          <p:cNvPr id="2" name="Text 0"/>
+          <p:cNvSpPr/>
+          <p:nvPr/>
+        </p:nvSpPr>
+        <p:spPr>
+          <a:xfrm>
+            <a:off x="548640" y="365760"/>
+            <a:ext cx="11094415" cy="274320"/>
+          </a:xfrm>
+          <a:prstGeom prst="rect">
+            <a:avLst/>
+          </a:prstGeom>
+          <a:noFill/>
+          <a:ln/>
+        </p:spPr>
+        <p:txBody>
+          <a:bodyPr wrap="square" lIns="0" tIns="0" rIns="0" bIns="0" rtlCol="0" anchor="ctr"/>
+          <a:lstStyle/>
+          <a:p>
+            <a:pPr indent="0" marL="0">
+              <a:buNone/>
+            </a:pPr>
+            <a:r>
+              <a:rPr lang="en-US" sz="1300" b="1" spc="150" kern="0" dirty="0">
+                <a:solidFill>
+                  <a:srgbClr val="FBBF24"/>
+                </a:solidFill>
+                <a:latin typeface="Calibri" pitchFamily="34" charset="0"/>
+                <a:ea typeface="Calibri" pitchFamily="34" charset="-122"/>
+                <a:cs typeface="Calibri" pitchFamily="34" charset="-120"/>
+              </a:rPr>
+              <a:t>ANTES DE SEGUIR</a:t>
+            </a:r>
+            <a:endParaRPr lang="en-US" sz="1300" dirty="0"/>
+          </a:p>
+        </p:txBody>
+      </p:sp>
+      <p:sp>
+        <p:nvSpPr>
+          <p:cNvPr id="3" name="Text 1"/>
+          <p:cNvSpPr/>
+          <p:nvPr/>
+        </p:nvSpPr>
+        <p:spPr>
+          <a:xfrm>
+            <a:off x="548640" y="640080"/>
+            <a:ext cx="11094415" cy="548640"/>
+          </a:xfrm>
+          <a:prstGeom prst="rect">
+            <a:avLst/>
+          </a:prstGeom>
+          <a:noFill/>
+          <a:ln/>
+        </p:spPr>
+        <p:txBody>
+          <a:bodyPr wrap="square" lIns="0" tIns="0" rIns="0" bIns="0" rtlCol="0" anchor="ctr"/>
+          <a:lstStyle/>
+          <a:p>
+            <a:pPr indent="0" marL="0">
+              <a:buNone/>
+            </a:pPr>
+            <a:r>
+              <a:rPr lang="en-US" sz="2900" b="1" dirty="0">
+                <a:solidFill>
+                  <a:srgbClr val="F8FAFC"/>
+                </a:solidFill>
+                <a:latin typeface="Calibri" pitchFamily="34" charset="0"/>
+                <a:ea typeface="Calibri" pitchFamily="34" charset="-122"/>
+                <a:cs typeface="Calibri" pitchFamily="34" charset="-120"/>
+              </a:rPr>
+              <a:t>Errores Comunes</a:t>
+            </a:r>
+            <a:endParaRPr lang="en-US" sz="2900" dirty="0"/>
+          </a:p>
+        </p:txBody>
+      </p:sp>
+      <p:sp>
+        <p:nvSpPr>
+          <p:cNvPr id="4" name="Shape 2"/>
+          <p:cNvSpPr/>
+          <p:nvPr/>
+        </p:nvSpPr>
+        <p:spPr>
+          <a:xfrm>
+            <a:off x="548640" y="1600200"/>
+            <a:ext cx="5387188" cy="1783080"/>
+          </a:xfrm>
+          <a:prstGeom prst="roundRect">
+            <a:avLst>
+              <a:gd name="adj" fmla="val 4103"/>
+            </a:avLst>
+          </a:prstGeom>
+          <a:solidFill>
+            <a:srgbClr val="3A2A0E"/>
+          </a:solidFill>
+          <a:ln w="12700">
+            <a:solidFill>
+              <a:srgbClr val="F59E0B"/>
+            </a:solidFill>
+            <a:prstDash val="solid"/>
+          </a:ln>
+        </p:spPr>
+      </p:sp>
+      <p:sp>
+        <p:nvSpPr>
+          <p:cNvPr id="5" name="Shape 3"/>
+          <p:cNvSpPr/>
+          <p:nvPr/>
+        </p:nvSpPr>
+        <p:spPr>
+          <a:xfrm>
+            <a:off x="777240" y="1783080"/>
+            <a:ext cx="457200" cy="457200"/>
+          </a:xfrm>
+          <a:prstGeom prst="rect">
+            <a:avLst/>
+          </a:prstGeom>
+          <a:solidFill>
+            <a:srgbClr val="FBBF24"/>
+          </a:solidFill>
+          <a:ln/>
+        </p:spPr>
+      </p:sp>
+      <p:sp>
+        <p:nvSpPr>
+          <p:cNvPr id="6" name="Text 4"/>
+          <p:cNvSpPr/>
+          <p:nvPr/>
+        </p:nvSpPr>
+        <p:spPr>
+          <a:xfrm>
+            <a:off x="777240" y="1783080"/>
+            <a:ext cx="457200" cy="457200"/>
+          </a:xfrm>
+          <a:prstGeom prst="rect">
+            <a:avLst/>
+          </a:prstGeom>
+          <a:noFill/>
+          <a:ln/>
+        </p:spPr>
+        <p:txBody>
+          <a:bodyPr wrap="square" lIns="0" tIns="0" rIns="0" bIns="0" rtlCol="0" anchor="ctr"/>
+          <a:lstStyle/>
+          <a:p>
+            <a:pPr algn="ctr" indent="0" marL="0">
+              <a:buNone/>
+            </a:pPr>
+            <a:r>
+              <a:rPr lang="en-US" sz="2000" dirty="0">
+                <a:solidFill>
+                  <a:srgbClr val="000000"/>
+                </a:solidFill>
+              </a:rPr>
+              <a:t>⚠</a:t>
+            </a:r>
+            <a:endParaRPr lang="en-US" sz="2000" dirty="0"/>
+          </a:p>
+        </p:txBody>
+      </p:sp>
+      <p:sp>
+        <p:nvSpPr>
+          <p:cNvPr id="7" name="Text 5"/>
+          <p:cNvSpPr/>
+          <p:nvPr/>
+        </p:nvSpPr>
+        <p:spPr>
+          <a:xfrm>
+            <a:off x="1371600" y="1783080"/>
+            <a:ext cx="4335628" cy="502920"/>
+          </a:xfrm>
+          <a:prstGeom prst="rect">
+            <a:avLst/>
+          </a:prstGeom>
+          <a:noFill/>
+          <a:ln/>
+        </p:spPr>
+        <p:txBody>
+          <a:bodyPr wrap="square" lIns="0" tIns="0" rIns="0" bIns="0" rtlCol="0" anchor="ctr"/>
+          <a:lstStyle/>
+          <a:p>
+            <a:pPr indent="0" marL="0">
+              <a:lnSpc>
+                <a:spcPct val="105000"/>
+              </a:lnSpc>
+              <a:buNone/>
+            </a:pPr>
+            <a:r>
+              <a:rPr lang="en-US" sz="1400" b="1" dirty="0">
+                <a:solidFill>
+                  <a:srgbClr val="F8FAFC"/>
+                </a:solidFill>
+                <a:latin typeface="Calibri" pitchFamily="34" charset="0"/>
+                <a:ea typeface="Calibri" pitchFamily="34" charset="-122"/>
+                <a:cs typeface="Calibri" pitchFamily="34" charset="-120"/>
+              </a:rPr>
+              <a:t>Cauchy-Euler no es coeficientes constantes</a:t>
+            </a:r>
+            <a:endParaRPr lang="en-US" sz="1400" dirty="0"/>
+          </a:p>
+        </p:txBody>
+      </p:sp>
+      <p:sp>
+        <p:nvSpPr>
+          <p:cNvPr id="8" name="Text 6"/>
+          <p:cNvSpPr/>
+          <p:nvPr/>
+        </p:nvSpPr>
+        <p:spPr>
+          <a:xfrm>
+            <a:off x="822960" y="2468880"/>
+            <a:ext cx="4838548" cy="731520"/>
+          </a:xfrm>
+          <a:prstGeom prst="rect">
+            <a:avLst/>
+          </a:prstGeom>
+          <a:noFill/>
+          <a:ln/>
+        </p:spPr>
+        <p:txBody>
+          <a:bodyPr wrap="square" lIns="0" tIns="0" rIns="0" bIns="0" rtlCol="0" anchor="t"/>
+          <a:lstStyle/>
+          <a:p>
+            <a:pPr algn="l" indent="0" marL="0">
+              <a:lnSpc>
+                <a:spcPct val="112000"/>
+              </a:lnSpc>
+              <a:buNone/>
+            </a:pPr>
+            <a:r>
+              <a:rPr lang="en-US" sz="1250" dirty="0">
+                <a:solidFill>
+                  <a:srgbClr val="CBD5E1"/>
+                </a:solidFill>
+                <a:latin typeface="Calibri" pitchFamily="34" charset="0"/>
+                <a:ea typeface="Calibri" pitchFamily="34" charset="-122"/>
+                <a:cs typeface="Calibri" pitchFamily="34" charset="-120"/>
+              </a:rPr>
+              <a:t>La sustitución es y=xᵐ, no y=eʳˣ — son ecuaciones distintas, con trucos distintos; no las mezclen.</a:t>
+            </a:r>
+            <a:endParaRPr lang="en-US" sz="1250" dirty="0"/>
+          </a:p>
+        </p:txBody>
+      </p:sp>
+      <p:sp>
+        <p:nvSpPr>
+          <p:cNvPr id="9" name="Shape 7"/>
+          <p:cNvSpPr/>
+          <p:nvPr/>
+        </p:nvSpPr>
+        <p:spPr>
+          <a:xfrm>
+            <a:off x="6255868" y="1600200"/>
+            <a:ext cx="5387188" cy="1783080"/>
+          </a:xfrm>
+          <a:prstGeom prst="roundRect">
+            <a:avLst>
+              <a:gd name="adj" fmla="val 4103"/>
+            </a:avLst>
+          </a:prstGeom>
+          <a:solidFill>
+            <a:srgbClr val="3A2A0E"/>
+          </a:solidFill>
+          <a:ln w="12700">
+            <a:solidFill>
+              <a:srgbClr val="F59E0B"/>
+            </a:solidFill>
+            <a:prstDash val="solid"/>
+          </a:ln>
+        </p:spPr>
+      </p:sp>
+      <p:sp>
+        <p:nvSpPr>
+          <p:cNvPr id="10" name="Shape 8"/>
+          <p:cNvSpPr/>
+          <p:nvPr/>
+        </p:nvSpPr>
+        <p:spPr>
+          <a:xfrm>
+            <a:off x="6484468" y="1783080"/>
+            <a:ext cx="457200" cy="457200"/>
+          </a:xfrm>
+          <a:prstGeom prst="rect">
+            <a:avLst/>
+          </a:prstGeom>
+          <a:solidFill>
+            <a:srgbClr val="FBBF24"/>
+          </a:solidFill>
+          <a:ln/>
+        </p:spPr>
+      </p:sp>
+      <p:sp>
+        <p:nvSpPr>
+          <p:cNvPr id="11" name="Text 9"/>
+          <p:cNvSpPr/>
+          <p:nvPr/>
+        </p:nvSpPr>
+        <p:spPr>
+          <a:xfrm>
+            <a:off x="6484468" y="1783080"/>
+            <a:ext cx="457200" cy="457200"/>
+          </a:xfrm>
+          <a:prstGeom prst="rect">
+            <a:avLst/>
+          </a:prstGeom>
+          <a:noFill/>
+          <a:ln/>
+        </p:spPr>
+        <p:txBody>
+          <a:bodyPr wrap="square" lIns="0" tIns="0" rIns="0" bIns="0" rtlCol="0" anchor="ctr"/>
+          <a:lstStyle/>
+          <a:p>
+            <a:pPr algn="ctr" indent="0" marL="0">
+              <a:buNone/>
+            </a:pPr>
+            <a:r>
+              <a:rPr lang="en-US" sz="2000" dirty="0">
+                <a:solidFill>
+                  <a:srgbClr val="000000"/>
+                </a:solidFill>
+              </a:rPr>
+              <a:t>⚠</a:t>
+            </a:r>
+            <a:endParaRPr lang="en-US" sz="2000" dirty="0"/>
+          </a:p>
+        </p:txBody>
+      </p:sp>
+      <p:sp>
+        <p:nvSpPr>
+          <p:cNvPr id="12" name="Text 10"/>
+          <p:cNvSpPr/>
+          <p:nvPr/>
+        </p:nvSpPr>
+        <p:spPr>
+          <a:xfrm>
+            <a:off x="7078828" y="1783080"/>
+            <a:ext cx="4335628" cy="502920"/>
+          </a:xfrm>
+          <a:prstGeom prst="rect">
+            <a:avLst/>
+          </a:prstGeom>
+          <a:noFill/>
+          <a:ln/>
+        </p:spPr>
+        <p:txBody>
+          <a:bodyPr wrap="square" lIns="0" tIns="0" rIns="0" bIns="0" rtlCol="0" anchor="ctr"/>
+          <a:lstStyle/>
+          <a:p>
+            <a:pPr indent="0" marL="0">
+              <a:lnSpc>
+                <a:spcPct val="105000"/>
+              </a:lnSpc>
+              <a:buNone/>
+            </a:pPr>
+            <a:r>
+              <a:rPr lang="en-US" sz="1400" b="1" dirty="0">
+                <a:solidFill>
+                  <a:srgbClr val="F8FAFC"/>
+                </a:solidFill>
+                <a:latin typeface="Calibri" pitchFamily="34" charset="0"/>
+                <a:ea typeface="Calibri" pitchFamily="34" charset="-122"/>
+                <a:cs typeface="Calibri" pitchFamily="34" charset="-120"/>
+              </a:rPr>
+              <a:t>Olvidar revisar contra yᶜ</a:t>
+            </a:r>
+            <a:endParaRPr lang="en-US" sz="1400" dirty="0"/>
+          </a:p>
+        </p:txBody>
+      </p:sp>
+      <p:sp>
+        <p:nvSpPr>
+          <p:cNvPr id="13" name="Text 11"/>
+          <p:cNvSpPr/>
+          <p:nvPr/>
+        </p:nvSpPr>
+        <p:spPr>
+          <a:xfrm>
+            <a:off x="6530188" y="2468880"/>
+            <a:ext cx="4838548" cy="731520"/>
+          </a:xfrm>
+          <a:prstGeom prst="rect">
+            <a:avLst/>
+          </a:prstGeom>
+          <a:noFill/>
+          <a:ln/>
+        </p:spPr>
+        <p:txBody>
+          <a:bodyPr wrap="square" lIns="0" tIns="0" rIns="0" bIns="0" rtlCol="0" anchor="t"/>
+          <a:lstStyle/>
+          <a:p>
+            <a:pPr algn="l" indent="0" marL="0">
+              <a:lnSpc>
+                <a:spcPct val="112000"/>
+              </a:lnSpc>
+              <a:buNone/>
+            </a:pPr>
+            <a:r>
+              <a:rPr lang="en-US" sz="1250" dirty="0">
+                <a:solidFill>
+                  <a:srgbClr val="CBD5E1"/>
+                </a:solidFill>
+                <a:latin typeface="Calibri" pitchFamily="34" charset="0"/>
+                <a:ea typeface="Calibri" pitchFamily="34" charset="-122"/>
+                <a:cs typeface="Calibri" pitchFamily="34" charset="-120"/>
+              </a:rPr>
+              <a:t>Si un término de la solución de orden mayor ya está en yᶜ y no lo eliminan, el sistema de coeficientes no va a tener solución.</a:t>
+            </a:r>
+            <a:endParaRPr lang="en-US" sz="1250" dirty="0"/>
+          </a:p>
+        </p:txBody>
+      </p:sp>
+      <p:sp>
+        <p:nvSpPr>
+          <p:cNvPr id="14" name="Shape 12"/>
+          <p:cNvSpPr/>
+          <p:nvPr/>
+        </p:nvSpPr>
+        <p:spPr>
+          <a:xfrm>
+            <a:off x="548640" y="3657600"/>
+            <a:ext cx="5387188" cy="1783080"/>
+          </a:xfrm>
+          <a:prstGeom prst="roundRect">
+            <a:avLst>
+              <a:gd name="adj" fmla="val 4103"/>
+            </a:avLst>
+          </a:prstGeom>
+          <a:solidFill>
+            <a:srgbClr val="3A2A0E"/>
+          </a:solidFill>
+          <a:ln w="12700">
+            <a:solidFill>
+              <a:srgbClr val="F59E0B"/>
+            </a:solidFill>
+            <a:prstDash val="solid"/>
+          </a:ln>
+        </p:spPr>
+      </p:sp>
+      <p:sp>
+        <p:nvSpPr>
+          <p:cNvPr id="15" name="Shape 13"/>
+          <p:cNvSpPr/>
+          <p:nvPr/>
+        </p:nvSpPr>
+        <p:spPr>
+          <a:xfrm>
+            <a:off x="777240" y="3840480"/>
+            <a:ext cx="457200" cy="457200"/>
+          </a:xfrm>
+          <a:prstGeom prst="rect">
+            <a:avLst/>
+          </a:prstGeom>
+          <a:solidFill>
+            <a:srgbClr val="FBBF24"/>
+          </a:solidFill>
+          <a:ln/>
+        </p:spPr>
+      </p:sp>
+      <p:sp>
+        <p:nvSpPr>
+          <p:cNvPr id="16" name="Text 14"/>
+          <p:cNvSpPr/>
+          <p:nvPr/>
+        </p:nvSpPr>
+        <p:spPr>
+          <a:xfrm>
+            <a:off x="777240" y="3840480"/>
+            <a:ext cx="457200" cy="457200"/>
+          </a:xfrm>
+          <a:prstGeom prst="rect">
+            <a:avLst/>
+          </a:prstGeom>
+          <a:noFill/>
+          <a:ln/>
+        </p:spPr>
+        <p:txBody>
+          <a:bodyPr wrap="square" lIns="0" tIns="0" rIns="0" bIns="0" rtlCol="0" anchor="ctr"/>
+          <a:lstStyle/>
+          <a:p>
+            <a:pPr algn="ctr" indent="0" marL="0">
+              <a:buNone/>
+            </a:pPr>
+            <a:r>
+              <a:rPr lang="en-US" sz="2000" dirty="0">
+                <a:solidFill>
+                  <a:srgbClr val="000000"/>
+                </a:solidFill>
+              </a:rPr>
+              <a:t>⚠</a:t>
+            </a:r>
+            <a:endParaRPr lang="en-US" sz="2000" dirty="0"/>
+          </a:p>
+        </p:txBody>
+      </p:sp>
+      <p:sp>
+        <p:nvSpPr>
+          <p:cNvPr id="17" name="Text 15"/>
+          <p:cNvSpPr/>
+          <p:nvPr/>
+        </p:nvSpPr>
+        <p:spPr>
+          <a:xfrm>
+            <a:off x="1371600" y="3840480"/>
+            <a:ext cx="4335628" cy="502920"/>
+          </a:xfrm>
+          <a:prstGeom prst="rect">
+            <a:avLst/>
+          </a:prstGeom>
+          <a:noFill/>
+          <a:ln/>
+        </p:spPr>
+        <p:txBody>
+          <a:bodyPr wrap="square" lIns="0" tIns="0" rIns="0" bIns="0" rtlCol="0" anchor="ctr"/>
+          <a:lstStyle/>
+          <a:p>
+            <a:pPr indent="0" marL="0">
+              <a:lnSpc>
+                <a:spcPct val="105000"/>
+              </a:lnSpc>
+              <a:buNone/>
+            </a:pPr>
+            <a:r>
+              <a:rPr lang="en-US" sz="1400" b="1" dirty="0">
+                <a:solidFill>
+                  <a:srgbClr val="F8FAFC"/>
+                </a:solidFill>
+                <a:latin typeface="Calibri" pitchFamily="34" charset="0"/>
+                <a:ea typeface="Calibri" pitchFamily="34" charset="-122"/>
+                <a:cs typeface="Calibri" pitchFamily="34" charset="-120"/>
+              </a:rPr>
+              <a:t>Anular solo un lado</a:t>
+            </a:r>
+            <a:endParaRPr lang="en-US" sz="1400" dirty="0"/>
+          </a:p>
+        </p:txBody>
+      </p:sp>
+      <p:sp>
+        <p:nvSpPr>
+          <p:cNvPr id="18" name="Text 16"/>
+          <p:cNvSpPr/>
+          <p:nvPr/>
+        </p:nvSpPr>
+        <p:spPr>
+          <a:xfrm>
+            <a:off x="822960" y="4526280"/>
+            <a:ext cx="4838548" cy="731520"/>
+          </a:xfrm>
+          <a:prstGeom prst="rect">
+            <a:avLst/>
+          </a:prstGeom>
+          <a:noFill/>
+          <a:ln/>
+        </p:spPr>
+        <p:txBody>
+          <a:bodyPr wrap="square" lIns="0" tIns="0" rIns="0" bIns="0" rtlCol="0" anchor="t"/>
+          <a:lstStyle/>
+          <a:p>
+            <a:pPr algn="l" indent="0" marL="0">
+              <a:lnSpc>
+                <a:spcPct val="112000"/>
+              </a:lnSpc>
+              <a:buNone/>
+            </a:pPr>
+            <a:r>
+              <a:rPr lang="en-US" sz="1250" dirty="0">
+                <a:solidFill>
+                  <a:srgbClr val="CBD5E1"/>
+                </a:solidFill>
+                <a:latin typeface="Calibri" pitchFamily="34" charset="0"/>
+                <a:ea typeface="Calibri" pitchFamily="34" charset="-122"/>
+                <a:cs typeface="Calibri" pitchFamily="34" charset="-120"/>
+              </a:rPr>
+              <a:t>El anulador debe aplicarse a AMBOS lados de la ecuación — no solo al lado derecho.</a:t>
+            </a:r>
+            <a:endParaRPr lang="en-US" sz="1250" dirty="0"/>
+          </a:p>
+        </p:txBody>
+      </p:sp>
+      <p:sp>
+        <p:nvSpPr>
+          <p:cNvPr id="19" name="Shape 17"/>
+          <p:cNvSpPr/>
+          <p:nvPr/>
+        </p:nvSpPr>
+        <p:spPr>
+          <a:xfrm>
+            <a:off x="6255868" y="3657600"/>
+            <a:ext cx="5387188" cy="1783080"/>
+          </a:xfrm>
+          <a:prstGeom prst="roundRect">
+            <a:avLst>
+              <a:gd name="adj" fmla="val 4103"/>
+            </a:avLst>
+          </a:prstGeom>
+          <a:solidFill>
+            <a:srgbClr val="3A2A0E"/>
+          </a:solidFill>
+          <a:ln w="12700">
+            <a:solidFill>
+              <a:srgbClr val="F59E0B"/>
+            </a:solidFill>
+            <a:prstDash val="solid"/>
+          </a:ln>
+        </p:spPr>
+      </p:sp>
+      <p:sp>
+        <p:nvSpPr>
+          <p:cNvPr id="20" name="Shape 18"/>
+          <p:cNvSpPr/>
+          <p:nvPr/>
+        </p:nvSpPr>
+        <p:spPr>
+          <a:xfrm>
+            <a:off x="6484468" y="3840480"/>
+            <a:ext cx="457200" cy="457200"/>
+          </a:xfrm>
+          <a:prstGeom prst="rect">
+            <a:avLst/>
+          </a:prstGeom>
+          <a:solidFill>
+            <a:srgbClr val="FBBF24"/>
+          </a:solidFill>
+          <a:ln/>
+        </p:spPr>
+      </p:sp>
+      <p:sp>
+        <p:nvSpPr>
+          <p:cNvPr id="21" name="Text 19"/>
+          <p:cNvSpPr/>
+          <p:nvPr/>
+        </p:nvSpPr>
+        <p:spPr>
+          <a:xfrm>
+            <a:off x="6484468" y="3840480"/>
+            <a:ext cx="457200" cy="457200"/>
+          </a:xfrm>
+          <a:prstGeom prst="rect">
+            <a:avLst/>
+          </a:prstGeom>
+          <a:noFill/>
+          <a:ln/>
+        </p:spPr>
+        <p:txBody>
+          <a:bodyPr wrap="square" lIns="0" tIns="0" rIns="0" bIns="0" rtlCol="0" anchor="ctr"/>
+          <a:lstStyle/>
+          <a:p>
+            <a:pPr algn="ctr" indent="0" marL="0">
+              <a:buNone/>
+            </a:pPr>
+            <a:r>
+              <a:rPr lang="en-US" sz="2000" dirty="0">
+                <a:solidFill>
+                  <a:srgbClr val="000000"/>
+                </a:solidFill>
+              </a:rPr>
+              <a:t>⚠</a:t>
+            </a:r>
+            <a:endParaRPr lang="en-US" sz="2000" dirty="0"/>
+          </a:p>
+        </p:txBody>
+      </p:sp>
+      <p:sp>
+        <p:nvSpPr>
+          <p:cNvPr id="22" name="Text 20"/>
+          <p:cNvSpPr/>
+          <p:nvPr/>
+        </p:nvSpPr>
+        <p:spPr>
+          <a:xfrm>
+            <a:off x="7078828" y="3840480"/>
+            <a:ext cx="4335628" cy="502920"/>
+          </a:xfrm>
+          <a:prstGeom prst="rect">
+            <a:avLst/>
+          </a:prstGeom>
+          <a:noFill/>
+          <a:ln/>
+        </p:spPr>
+        <p:txBody>
+          <a:bodyPr wrap="square" lIns="0" tIns="0" rIns="0" bIns="0" rtlCol="0" anchor="ctr"/>
+          <a:lstStyle/>
+          <a:p>
+            <a:pPr indent="0" marL="0">
+              <a:lnSpc>
+                <a:spcPct val="105000"/>
+              </a:lnSpc>
+              <a:buNone/>
+            </a:pPr>
+            <a:r>
+              <a:rPr lang="en-US" sz="1400" b="1" dirty="0">
+                <a:solidFill>
+                  <a:srgbClr val="F8FAFC"/>
+                </a:solidFill>
+                <a:latin typeface="Calibri" pitchFamily="34" charset="0"/>
+                <a:ea typeface="Calibri" pitchFamily="34" charset="-122"/>
+                <a:cs typeface="Calibri" pitchFamily="34" charset="-120"/>
+              </a:rPr>
+              <a:t>Olvidar que Cauchy-Euler asume x&gt;0</a:t>
+            </a:r>
+            <a:endParaRPr lang="en-US" sz="1400" dirty="0"/>
+          </a:p>
+        </p:txBody>
+      </p:sp>
+      <p:sp>
+        <p:nvSpPr>
+          <p:cNvPr id="23" name="Text 21"/>
+          <p:cNvSpPr/>
+          <p:nvPr/>
+        </p:nvSpPr>
+        <p:spPr>
+          <a:xfrm>
+            <a:off x="6530188" y="4526280"/>
+            <a:ext cx="4838548" cy="731520"/>
+          </a:xfrm>
+          <a:prstGeom prst="rect">
+            <a:avLst/>
+          </a:prstGeom>
+          <a:noFill/>
+          <a:ln/>
+        </p:spPr>
+        <p:txBody>
+          <a:bodyPr wrap="square" lIns="0" tIns="0" rIns="0" bIns="0" rtlCol="0" anchor="t"/>
+          <a:lstStyle/>
+          <a:p>
+            <a:pPr algn="l" indent="0" marL="0">
+              <a:lnSpc>
+                <a:spcPct val="112000"/>
+              </a:lnSpc>
+              <a:buNone/>
+            </a:pPr>
+            <a:r>
+              <a:rPr lang="en-US" sz="1250" dirty="0">
+                <a:solidFill>
+                  <a:srgbClr val="CBD5E1"/>
+                </a:solidFill>
+                <a:latin typeface="Calibri" pitchFamily="34" charset="0"/>
+                <a:ea typeface="Calibri" pitchFamily="34" charset="-122"/>
+                <a:cs typeface="Calibri" pitchFamily="34" charset="-120"/>
+              </a:rPr>
+              <a:t>Para x&lt;0 se necesitan ajustes con |x| que no cubrimos hoy.</a:t>
+            </a:r>
+            <a:endParaRPr lang="en-US" sz="1250" dirty="0"/>
+          </a:p>
+        </p:txBody>
+      </p:sp>
+      <p:sp>
+        <p:nvSpPr>
+          <p:cNvPr id="24" name="Text 22"/>
+          <p:cNvSpPr/>
+          <p:nvPr/>
+        </p:nvSpPr>
+        <p:spPr>
+          <a:xfrm>
+            <a:off x="548640" y="6528816"/>
+            <a:ext cx="4572000" cy="256032"/>
+          </a:xfrm>
+          <a:prstGeom prst="rect">
+            <a:avLst/>
+          </a:prstGeom>
+          <a:noFill/>
+          <a:ln/>
+        </p:spPr>
+        <p:txBody>
+          <a:bodyPr wrap="square" lIns="0" tIns="0" rIns="0" bIns="0" rtlCol="0" anchor="ctr"/>
+          <a:lstStyle/>
+          <a:p>
+            <a:pPr indent="0" marL="0">
+              <a:buNone/>
+            </a:pPr>
+            <a:r>
+              <a:rPr lang="en-US" sz="900" spc="120" kern="0" dirty="0">
+                <a:solidFill>
+                  <a:srgbClr val="94A3B8"/>
+                </a:solidFill>
+                <a:latin typeface="Calibri" pitchFamily="34" charset="0"/>
+                <a:ea typeface="Calibri" pitchFamily="34" charset="-122"/>
+                <a:cs typeface="Calibri" pitchFamily="34" charset="-120"/>
+              </a:rPr>
+              <a:t>SESIÓN 10 · CÁLCULO III</a:t>
+            </a:r>
+            <a:endParaRPr lang="en-US" sz="900" dirty="0"/>
+          </a:p>
+        </p:txBody>
+      </p:sp>
+      <p:sp>
+        <p:nvSpPr>
+          <p:cNvPr id="25" name="Text 23"/>
+          <p:cNvSpPr/>
+          <p:nvPr/>
+        </p:nvSpPr>
+        <p:spPr>
+          <a:xfrm>
+            <a:off x="11094415" y="6528816"/>
+            <a:ext cx="548640" cy="256032"/>
+          </a:xfrm>
+          <a:prstGeom prst="rect">
+            <a:avLst/>
+          </a:prstGeom>
+          <a:noFill/>
+          <a:ln/>
+        </p:spPr>
+        <p:txBody>
+          <a:bodyPr wrap="square" lIns="0" tIns="0" rIns="0" bIns="0" rtlCol="0" anchor="ctr"/>
+          <a:lstStyle/>
+          <a:p>
+            <a:pPr algn="r" indent="0" marL="0">
+              <a:buNone/>
+            </a:pPr>
+            <a:r>
+              <a:rPr lang="en-US" sz="900" dirty="0">
+                <a:solidFill>
+                  <a:srgbClr val="94A3B8"/>
+                </a:solidFill>
+                <a:latin typeface="Calibri" pitchFamily="34" charset="0"/>
+                <a:ea typeface="Calibri" pitchFamily="34" charset="-122"/>
+                <a:cs typeface="Calibri" pitchFamily="34" charset="-120"/>
+              </a:rPr>
+              <a:t>26</a:t>
+            </a:r>
+            <a:endParaRPr lang="en-US" sz="900" dirty="0"/>
+          </a:p>
+        </p:txBody>
+      </p:sp>
+    </p:spTree>
+  </p:cSld>
+  <p:clrMapOvr>
+    <a:masterClrMapping/>
+  </p:clrMapOvr>
+</p:sld>
+</file>
+
+<file path=ppt/slides/slide27.xml><?xml version="1.0" encoding="utf-8"?>
+<p:sld xmlns:a="http://schemas.openxmlformats.org/drawingml/2006/main" xmlns:r="http://schemas.openxmlformats.org/officeDocument/2006/relationships" xmlns:p="http://schemas.openxmlformats.org/presentationml/2006/main">
+  <p:cSld name="Slide 27">
+    <p:bg>
+      <p:bgPr>
+        <a:solidFill>
+          <a:srgbClr val="0B0F19"/>
+        </a:solidFill>
+      </p:bgPr>
+    </p:bg>
+    <p:spTree>
+      <p:nvGrpSpPr>
+        <p:cNvPr id="1" name=""/>
+        <p:cNvGrpSpPr/>
+        <p:nvPr/>
+      </p:nvGrpSpPr>
+      <p:grpSpPr>
+        <a:xfrm>
+          <a:off x="0" y="0"/>
+          <a:ext cx="0" cy="0"/>
+          <a:chOff x="0" y="0"/>
+          <a:chExt cx="0" cy="0"/>
+        </a:xfrm>
+      </p:grpSpPr>
+      <p:sp>
+        <p:nvSpPr>
           <p:cNvPr id="2" name="Shape 0"/>
           <p:cNvSpPr/>
           <p:nvPr/>
@@ -11536,7 +12278,7 @@
                 <a:ea typeface="Calibri" pitchFamily="34" charset="-122"/>
                 <a:cs typeface="Calibri" pitchFamily="34" charset="-120"/>
               </a:rPr>
-              <a:t>26</a:t>
+              <a:t>27</a:t>
             </a:r>
             <a:endParaRPr lang="en-US" sz="900" dirty="0"/>
           </a:p>
